--- a/Claude outputs/Deck upload/Module-3/unit-06.pptx
+++ b/Claude outputs/Deck upload/Module-3/unit-06.pptx
@@ -28,6 +28,8 @@
     <p:sldId id="302" r:id="rId42"/>
     <p:sldId id="267" r:id="rId15"/>
     <p:sldId id="303" r:id="rId43"/>
+    <p:sldId id="310" r:id="rId26"/>
+    <p:sldId id="311" r:id="rId23"/>
     <p:sldId id="270" r:id="rId18"/>
     <p:sldId id="271" r:id="rId19"/>
     <p:sldId id="304" r:id="rId44"/>
@@ -40,6 +42,7 @@
     <p:sldId id="279" r:id="rId24"/>
     <p:sldId id="280" r:id="rId25"/>
     <p:sldId id="293" r:id="rId34"/>
+    <p:sldId id="312" r:id="rId20"/>
     <p:sldId id="309" r:id="rId35"/>
     <p:sldId id="283" r:id="rId28"/>
   </p:sldIdLst>
@@ -315,7 +318,7 @@
           <a:lstStyle/>
           <a:p>
             <a:r>
-              <a:rPr lang="en-GB" b="1" dirty="0"/>
+              <a:rPr lang="en-GB" dirty="0" b="1"/>
               <a:t>UNIT 6 · PERFORMANCE MANAGEMENT SETUP</a:t>
             </a:r>
           </a:p>
@@ -325,61 +328,101 @@
               <a:t>Module 3 · Influence · Unit 6</a:t>
             </a:r>
           </a:p>
-          <a:p>
-            <a:endParaRPr lang="en-GB" dirty="0"/>
-          </a:p>
-          <a:p>
-            <a:r>
-              <a:rPr lang="en-GB" b="1" dirty="0"/>
+          <a:p/>
+          <a:p>
+            <a:r>
+              <a:rPr lang="en-GB" dirty="0" b="1"/>
               <a:t>HOW TO USE THIS SLIDE:</a:t>
             </a:r>
           </a:p>
-          <a:p>
-            <a:endParaRPr lang="en-GB" dirty="0"/>
-          </a:p>
-          <a:p>
-            <a:r>
-              <a:rPr lang="en-GB" b="1" dirty="0"/>
-              <a:t>1. Open the unit with its intent.</a:t>
-            </a:r>
-          </a:p>
-          <a:p>
-            <a:r>
-              <a:rPr lang="en-GB" dirty="0"/>
-              <a:t>Unit 6 sets up enterprise performance management on two operating systems: people performance, what people deliver (the Human Operating System), and organisational performance, what the organisation enables through its organisational conditions (the Organisational Operating System).</a:t>
-            </a:r>
-          </a:p>
-          <a:p>
-            <a:r>
-              <a:rPr lang="en-GB" dirty="0"/>
-              <a:t>Participants learn the S2R® Contribution Map™, which connects an enterprise Key Result to the contributions of business functions, people and organisational conditions, and FACES, the five functions through which those contributions are managed. In Section 5 each group builds both for its own Capstone strategy.</a:t>
-            </a:r>
-          </a:p>
-          <a:p>
-            <a:endParaRPr lang="en-GB" dirty="0"/>
-          </a:p>
-          <a:p>
-            <a:r>
-              <a:rPr lang="en-GB" b="1" dirty="0"/>
-              <a:t>2. Set the tone.</a:t>
-            </a:r>
-          </a:p>
-          <a:p>
-            <a:r>
-              <a:rPr lang="en-GB" dirty="0"/>
-              <a:t>Avoid: turning the Contribution Map or FACES into a compliance checklist. They are design and management tools.</a:t>
-            </a:r>
-          </a:p>
-          <a:p>
-            <a:r>
-              <a:rPr lang="en-GB" dirty="0"/>
-              <a:t>Keep in view: a missed target is evidence of a performance gap; it does not establish its cause.</a:t>
-            </a:r>
-          </a:p>
-          <a:p>
-            <a:r>
-              <a:rPr lang="en-GB" dirty="0"/>
-              <a:t>Probe leaders who equate "we have a scorecard" with "we have a PM system": "What happens after you look at the scorecard? What changes? Who decides what?"</a:t>
+          <a:p/>
+          <a:p>
+            <a:r>
+              <a:rPr lang="en-GB" dirty="0" b="1"/>
+              <a:t>1. Place the unit in Module 3.</a:t>
+            </a:r>
+          </a:p>
+          <a:p>
+            <a:r>
+              <a:rPr lang="en-GB" dirty="0"/>
+              <a:t>Say: "This unit sits in Module 3, Influence. Influence mobilises the people and performance systems through which strategy is carried into execution. Unit 5 aligned hearts and minds behind the strategy. Unit 6 builds the performance architecture that connects enterprise results to the contribution of people and the conditions the organisation provides. Unit 7 then turns that architecture into owned expectations, Unit 8 into review discipline and Unit 9 into the flow of execution."</a:t>
+            </a:r>
+          </a:p>
+          <a:p/>
+          <a:p>
+            <a:r>
+              <a:rPr lang="en-GB" dirty="0" b="1"/>
+              <a:t>2. State the unit intent.</a:t>
+            </a:r>
+          </a:p>
+          <a:p>
+            <a:r>
+              <a:rPr lang="en-GB" dirty="0"/>
+              <a:t>Say: "Unit 6 sets up enterprise performance management on two operating systems. People performance is what people deliver: the Human Operating System. Organisational performance is what the organisation enables through its organisational conditions: the Organisational Operating System. You learn the S2R® Contribution Map™, which connects an enterprise Key Result to the contributions of business functions, people and organisational conditions, and FACES, the five functions through which those contributions are managed."</a:t>
+            </a:r>
+          </a:p>
+          <a:p/>
+          <a:p>
+            <a:r>
+              <a:rPr lang="en-GB" dirty="0" b="1"/>
+              <a:t>3. Say what the unit produces.</a:t>
+            </a:r>
+          </a:p>
+          <a:p>
+            <a:r>
+              <a:rPr lang="en-GB" dirty="0"/>
+              <a:t>Say: "Each of you writes four personal reflections, in parts 1.2, 1.3, 1.4 and 3.2. They go into your Learning Portfolio. In Section 5 your group builds four connected components of its Enterprise Performance Management System for the strategy in your Capstone S2R® Blueprint: the Contribution Map, the FACES application, the CEO Performance Scorecard and the WARD check-up for one enterprise Key Result."</a:t>
+            </a:r>
+          </a:p>
+          <a:p/>
+          <a:p>
+            <a:r>
+              <a:rPr lang="en-GB" dirty="0" b="1"/>
+              <a:t>4. Say how the unit runs.</a:t>
+            </a:r>
+          </a:p>
+          <a:p>
+            <a:r>
+              <a:rPr lang="en-GB" dirty="0"/>
+              <a:t>Teach the whole unit from this deck first, from Section 1 to the Unit Summary. Participants then complete their own page on the portal, in the session or after it.</a:t>
+            </a:r>
+          </a:p>
+          <a:p>
+            <a:r>
+              <a:rPr lang="en-GB" dirty="0"/>
+              <a:t>All three Section 5 activities are group work and Capstone work. Each group needs the Objectives and Key Results it confirmed in Unit 3, part 5.2. The group chooses its scribe; the scribe types what the group agrees, the entries appear on every member’s page, and each member then selects Agree.</a:t>
+            </a:r>
+          </a:p>
+          <a:p/>
+          <a:p>
+            <a:r>
+              <a:rPr lang="en-GB" dirty="0" b="1"/>
+              <a:t>5. Bridge to the outcomes.</a:t>
+            </a:r>
+          </a:p>
+          <a:p>
+            <a:r>
+              <a:rPr lang="en-GB" dirty="0"/>
+              <a:t>Say: "Here is what you will be able to do by the end of the unit."</a:t>
+            </a:r>
+          </a:p>
+          <a:p/>
+          <a:p>
+            <a:r>
+              <a:rPr lang="en-GB" dirty="0" b="1"/>
+              <a:t>WHERE THE OUTPUTS GO:</a:t>
+            </a:r>
+          </a:p>
+          <a:p>
+            <a:r>
+              <a:rPr lang="en-GB" dirty="0"/>
+              <a:t>The personal reflections go into each participant’s Learning Portfolio.</a:t>
+            </a:r>
+          </a:p>
+          <a:p>
+            <a:r>
+              <a:rPr lang="en-GB" dirty="0"/>
+              <a:t>The group’s agreed record feeds boxes 6A to 6D of the team’s Capstone S2R® Blueprint: the Contribution Map in 6A, the FACES application in 6B, the CEO Performance Scorecard in 6C and the WARD check-up in 6D.</a:t>
             </a:r>
           </a:p>
         </p:txBody>
@@ -465,25 +508,21 @@
           <a:lstStyle/>
           <a:p>
             <a:r>
-              <a:rPr lang="en-GB" b="1" dirty="0"/>
+              <a:rPr lang="en-GB" dirty="0" b="1"/>
               <a:t>SECTION 1 REFLECTIONS</a:t>
             </a:r>
           </a:p>
-          <a:p>
-            <a:endParaRPr lang="en-GB" dirty="0"/>
-          </a:p>
-          <a:p>
-            <a:r>
-              <a:rPr lang="en-GB" b="1" dirty="0"/>
+          <a:p/>
+          <a:p>
+            <a:r>
+              <a:rPr lang="en-GB" dirty="0" b="1"/>
               <a:t>HOW TO USE THIS SLIDE:</a:t>
             </a:r>
           </a:p>
-          <a:p>
-            <a:endParaRPr lang="en-GB" dirty="0"/>
-          </a:p>
-          <a:p>
-            <a:r>
-              <a:rPr lang="en-GB" b="1" dirty="0"/>
+          <a:p/>
+          <a:p>
+            <a:r>
+              <a:rPr lang="en-GB" dirty="0" b="1"/>
               <a:t>1. Show the slide and read the three prompts aloud.</a:t>
             </a:r>
           </a:p>
@@ -505,12 +544,10 @@
               <a:t>1.4 Reflection — FACES in Your Organisation: "For the Key Result you chose in part 1.3: which FACES function is weakest in the way your organisation manages these contributions today, for the people and for the organisational conditions? Which one management arrangement would strengthen it?"</a:t>
             </a:r>
           </a:p>
-          <a:p>
-            <a:endParaRPr lang="en-GB" dirty="0"/>
-          </a:p>
-          <a:p>
-            <a:r>
-              <a:rPr lang="en-GB" b="1" dirty="0"/>
+          <a:p/>
+          <a:p>
+            <a:r>
+              <a:rPr lang="en-GB" dirty="0" b="1"/>
               <a:t>2. Say what the reflections are for.</a:t>
             </a:r>
           </a:p>
@@ -520,27 +557,23 @@
               <a:t>Say: "These reflections are personal. Name one real, recurring shortfall and look at whether your system covers the people and the organisational conditions. Then map one of your own organisation’s Key Results the way the Contribution Map does, and look at how your organisation manages those contributions through FACES."</a:t>
             </a:r>
           </a:p>
-          <a:p>
-            <a:endParaRPr lang="en-GB" dirty="0"/>
-          </a:p>
-          <a:p>
-            <a:r>
-              <a:rPr lang="en-GB" b="1" dirty="0"/>
-              <a:t>3. Bridge to Section 2.</a:t>
-            </a:r>
-          </a:p>
-          <a:p>
-            <a:r>
-              <a:rPr lang="en-GB" dirty="0"/>
-              <a:t>Say: "You now know what must be managed. Section 2 shows how performance management keeps strategy connected to performance throughout delivery."</a:t>
-            </a:r>
-          </a:p>
-          <a:p>
-            <a:endParaRPr lang="en-GB" dirty="0"/>
-          </a:p>
-          <a:p>
-            <a:r>
-              <a:rPr lang="en-GB" b="1" dirty="0"/>
+          <a:p/>
+          <a:p>
+            <a:r>
+              <a:rPr lang="en-GB" dirty="0" b="1"/>
+              <a:t>3. Close Section 1 and bridge to Section 2.</a:t>
+            </a:r>
+          </a:p>
+          <a:p>
+            <a:r>
+              <a:rPr lang="en-GB" dirty="0"/>
+              <a:t>Say: "Performance management connects enterprise results to the contributions of people and the conditions the organisation provides. Section 2 examines why performance management is the bridge between strategy and execution."</a:t>
+            </a:r>
+          </a:p>
+          <a:p/>
+          <a:p>
+            <a:r>
+              <a:rPr lang="en-GB" dirty="0" b="1"/>
               <a:t>ON THE PORTAL, AFTER THE TEACHING:</a:t>
             </a:r>
           </a:p>
@@ -617,7 +650,7 @@
           <a:lstStyle/>
           <a:p>
             <a:r>
-              <a:rPr lang="en-GB" b="1" dirty="0"/>
+              <a:rPr lang="en-GB" dirty="0" b="1"/>
               <a:t>SECTION 2 · INTELLIGENCE — WHY</a:t>
             </a:r>
           </a:p>
@@ -627,19 +660,37 @@
               <a:t>Performance Management as the Execution Bridge</a:t>
             </a:r>
           </a:p>
-          <a:p>
-            <a:r>
-              <a:rPr lang="en-GB" dirty="0"/>
-              <a:t>Understanding why enterprise performance depends on connecting strategic outcomes, human contributions and organisational operating capability through an integrated management system.</a:t>
-            </a:r>
-          </a:p>
-          <a:p>
-            <a:endParaRPr lang="en-GB" dirty="0"/>
-          </a:p>
-          <a:p>
-            <a:r>
-              <a:rPr lang="en-GB" b="1" dirty="0"/>
-              <a:t>Section learning outcomes:</a:t>
+          <a:p/>
+          <a:p>
+            <a:r>
+              <a:rPr lang="en-GB" dirty="0" b="1"/>
+              <a:t>HOW THIS SECTION RUNS:</a:t>
+            </a:r>
+          </a:p>
+          <a:p>
+            <a:r>
+              <a:rPr lang="en-GB" dirty="0"/>
+              <a:t>1. 2.1: performance management as the execution bridge. The four bridges, then how they work together (two slides).</a:t>
+            </a:r>
+          </a:p>
+          <a:p>
+            <a:r>
+              <a:rPr lang="en-GB" dirty="0"/>
+              <a:t>2. 2.2: compliance and commitment architecture. The four dimensions, then accountability for people performance and organisational performance (two slides).
+3. 2.3: performance scorecard development. The three categories, then how a scorecard is developed (two slides).</a:t>
+            </a:r>
+          </a:p>
+          <a:p>
+            <a:r>
+              <a:rPr lang="en-GB" dirty="0"/>
+              <a:t>Section 2 carries no personal reflection. The section closes on the 2.3b slide and bridges to Section 3.</a:t>
+            </a:r>
+          </a:p>
+          <a:p/>
+          <a:p>
+            <a:r>
+              <a:rPr lang="en-GB" dirty="0" b="1"/>
+              <a:t>SECTION LEARNING OUTCOMES:</a:t>
             </a:r>
           </a:p>
           <a:p>
@@ -654,28 +705,50 @@
               <a:t>2. Evaluate whether performance practices build genuine commitment or merely compliance.</a:t>
             </a:r>
           </a:p>
-          <a:p>
-            <a:endParaRPr lang="en-GB" dirty="0"/>
-          </a:p>
-          <a:p>
-            <a:r>
-              <a:rPr lang="en-GB" b="1" dirty="0"/>
-              <a:t>HOW TO TEACH IT:</a:t>
-            </a:r>
-          </a:p>
-          <a:p>
-            <a:endParaRPr lang="en-GB" dirty="0"/>
-          </a:p>
-          <a:p>
-            <a:r>
-              <a:rPr lang="en-GB" b="1" dirty="0"/>
-              <a:t>1. Frame the section.</a:t>
-            </a:r>
-          </a:p>
-          <a:p>
-            <a:r>
-              <a:rPr lang="en-GB" dirty="0"/>
-              <a:t>Say: "Section 1 set out what must be managed. Section 2 explains why performance management is the bridge that keeps strategy connected to performance throughout delivery, and how the architecture you choose shapes accountability."</a:t>
+          <a:p/>
+          <a:p>
+            <a:r>
+              <a:rPr lang="en-GB" dirty="0" b="1"/>
+              <a:t>HOW TO OPEN THE SECTION:</a:t>
+            </a:r>
+          </a:p>
+          <a:p/>
+          <a:p>
+            <a:r>
+              <a:rPr lang="en-GB" dirty="0" b="1"/>
+              <a:t>1. Link to Section 1.</a:t>
+            </a:r>
+          </a:p>
+          <a:p>
+            <a:r>
+              <a:rPr lang="en-GB" dirty="0"/>
+              <a:t>Say: "Section 1 set out what performance management must manage. The S2R® Contribution Map™ establishes the contributions an enterprise result requires, and FACES the five functions through which they are managed."</a:t>
+            </a:r>
+          </a:p>
+          <a:p/>
+          <a:p>
+            <a:r>
+              <a:rPr lang="en-GB" dirty="0" b="1"/>
+              <a:t>2. Name the question of this section.</a:t>
+            </a:r>
+          </a:p>
+          <a:p>
+            <a:r>
+              <a:rPr lang="en-GB" dirty="0"/>
+              <a:t>Say: "Section 2 explains why enterprise performance depends on connecting strategic outcomes, human contributions and organisational operating capability through an integrated management system. Strategy is delivered over time, and the connection between intent and delivery weakens unless something sustains it."</a:t>
+            </a:r>
+          </a:p>
+          <a:p/>
+          <a:p>
+            <a:r>
+              <a:rPr lang="en-GB" dirty="0" b="1"/>
+              <a:t>3. Bridge to 2.1.</a:t>
+            </a:r>
+          </a:p>
+          <a:p>
+            <a:r>
+              <a:rPr lang="en-GB" dirty="0"/>
+              <a:t>Say: "Performance management is that bridge. We look first at the four disciplines that hold it up."</a:t>
             </a:r>
           </a:p>
         </p:txBody>
@@ -1115,7 +1188,7 @@
           <a:lstStyle/>
           <a:p>
             <a:r>
-              <a:rPr lang="en-GB" b="1" dirty="0"/>
+              <a:rPr lang="en-GB" dirty="0" b="1"/>
               <a:t>SECTION 3 · EXTRAPOLATING — WHERE</a:t>
             </a:r>
           </a:p>
@@ -1125,19 +1198,36 @@
               <a:t>Executive Performance Integration and the Evolution of Performance Management</a:t>
             </a:r>
           </a:p>
-          <a:p>
-            <a:r>
-              <a:rPr lang="en-GB" dirty="0"/>
-              <a:t>Where does enterprise performance management become vulnerable? How executive performance perspectives and the evolution of performance management practice shape what leaders see and how they respond.</a:t>
-            </a:r>
-          </a:p>
-          <a:p>
-            <a:endParaRPr lang="en-GB" dirty="0"/>
-          </a:p>
-          <a:p>
-            <a:r>
-              <a:rPr lang="en-GB" b="1" dirty="0"/>
-              <a:t>Section learning outcomes:</a:t>
+          <a:p/>
+          <a:p>
+            <a:r>
+              <a:rPr lang="en-GB" dirty="0" b="1"/>
+              <a:t>HOW THIS SECTION RUNS:</a:t>
+            </a:r>
+          </a:p>
+          <a:p>
+            <a:r>
+              <a:rPr lang="en-GB" dirty="0"/>
+              <a:t>1. 3.1: Unity in Diversity. Executive performance perspectives and functional bias, then the ten executive performance hot zones (two slides).</a:t>
+            </a:r>
+          </a:p>
+          <a:p>
+            <a:r>
+              <a:rPr lang="en-GB" dirty="0"/>
+              <a:t>2. 3.2: the continuous performance management shift, through three shifts in practice.</a:t>
+            </a:r>
+          </a:p>
+          <a:p>
+            <a:r>
+              <a:rPr lang="en-GB" dirty="0"/>
+              <a:t>3. The Section 3 Reflections slide: the reflection participants write after the teaching.</a:t>
+            </a:r>
+          </a:p>
+          <a:p/>
+          <a:p>
+            <a:r>
+              <a:rPr lang="en-GB" dirty="0" b="1"/>
+              <a:t>SECTION LEARNING OUTCOMES:</a:t>
             </a:r>
           </a:p>
           <a:p>
@@ -1152,34 +1242,50 @@
               <a:t>2. Redesign performance practices towards continuous, developmental and team-based management.</a:t>
             </a:r>
           </a:p>
-          <a:p>
-            <a:endParaRPr lang="en-GB" dirty="0"/>
-          </a:p>
-          <a:p>
-            <a:r>
-              <a:rPr lang="en-GB" b="1" dirty="0"/>
-              <a:t>HOW TO TEACH IT:</a:t>
-            </a:r>
-          </a:p>
-          <a:p>
-            <a:endParaRPr lang="en-GB" dirty="0"/>
-          </a:p>
-          <a:p>
-            <a:r>
-              <a:rPr lang="en-GB" b="1" dirty="0"/>
-              <a:t>1. Frame the section.</a:t>
-            </a:r>
-          </a:p>
-          <a:p>
-            <a:r>
-              <a:rPr lang="en-GB" dirty="0"/>
-              <a:t>Say: "Section 2 established the four execution bridges that sustain the connection between strategy and results. It also examined how compliance-driven and commitment-driven approaches influence accountability, performance behaviour and management responses."</a:t>
-            </a:r>
-          </a:p>
-          <a:p>
-            <a:r>
-              <a:rPr lang="en-GB" dirty="0"/>
-              <a:t>Say: "Section 3 examines where enterprise performance management becomes vulnerable, through two areas: Unity in Diversity, how executive performance perspectives influence what leaders notice, prioritise and interpret; and the Continuous Performance Management Shift, how performance management practices are evolving to strengthen timely feedback, development and collective performance."</a:t>
+          <a:p/>
+          <a:p>
+            <a:r>
+              <a:rPr lang="en-GB" dirty="0" b="1"/>
+              <a:t>HOW TO OPEN THE SECTION:</a:t>
+            </a:r>
+          </a:p>
+          <a:p/>
+          <a:p>
+            <a:r>
+              <a:rPr lang="en-GB" dirty="0" b="1"/>
+              <a:t>1. Link to Section 2.</a:t>
+            </a:r>
+          </a:p>
+          <a:p>
+            <a:r>
+              <a:rPr lang="en-GB" dirty="0"/>
+              <a:t>Say: "Section 2 established the four execution bridges that sustain the connection between strategy and results. It also examined how compliance-driven and commitment-driven approaches influence accountability, performance behaviour and management responses, and how a performance scorecard carries the connection to the individual."</a:t>
+            </a:r>
+          </a:p>
+          <a:p/>
+          <a:p>
+            <a:r>
+              <a:rPr lang="en-GB" dirty="0" b="1"/>
+              <a:t>2. Name the two areas of the section.</a:t>
+            </a:r>
+          </a:p>
+          <a:p>
+            <a:r>
+              <a:rPr lang="en-GB" dirty="0"/>
+              <a:t>Say: "Section 3 examines where enterprise performance management becomes vulnerable, through two areas. Unity in Diversity: how executive performance perspectives influence what leaders notice, prioritise and interpret. The Continuous Performance Management Shift: how performance management practices are evolving to strengthen timely feedback, development and collective performance."</a:t>
+            </a:r>
+          </a:p>
+          <a:p/>
+          <a:p>
+            <a:r>
+              <a:rPr lang="en-GB" dirty="0" b="1"/>
+              <a:t>3. Bridge to 3.1.</a:t>
+            </a:r>
+          </a:p>
+          <a:p>
+            <a:r>
+              <a:rPr lang="en-GB" dirty="0"/>
+              <a:t>Say: "We begin with the executive team itself, and the different ways each executive reads performance."</a:t>
             </a:r>
           </a:p>
         </p:txBody>
@@ -1415,6 +1521,278 @@
 </p:notes>
 </file>
 
+<file path=ppt/notesSlides/notesSlide19.xml><?xml version="1.0" encoding="utf-8"?>
+<p:notes xmlns:a="http://schemas.openxmlformats.org/drawingml/2006/main" xmlns:p="http://schemas.openxmlformats.org/presentationml/2006/main" xmlns:r="http://schemas.openxmlformats.org/officeDocument/2006/relationships">
+  <p:cSld>
+    <p:spTree>
+      <p:nvGrpSpPr>
+        <p:cNvPr id="1" name=""/>
+        <p:cNvGrpSpPr/>
+        <p:nvPr/>
+      </p:nvGrpSpPr>
+      <p:grpSpPr>
+        <a:xfrm>
+          <a:off x="0" y="0"/>
+          <a:ext cx="0" cy="0"/>
+          <a:chOff x="0" y="0"/>
+          <a:chExt cx="0" cy="0"/>
+        </a:xfrm>
+      </p:grpSpPr>
+      <p:sp>
+        <p:nvSpPr>
+          <p:cNvPr id="2" name="Slide Image Placeholder 1"/>
+          <p:cNvSpPr>
+            <a:spLocks noGrp="1" noRot="1" noChangeAspect="1"/>
+          </p:cNvSpPr>
+          <p:nvPr>
+            <p:ph type="sldImg"/>
+          </p:nvPr>
+        </p:nvSpPr>
+        <p:spPr/>
+      </p:sp>
+      <p:sp>
+        <p:nvSpPr>
+          <p:cNvPr id="3" name="Notes Placeholder 2"/>
+          <p:cNvSpPr>
+            <a:spLocks noGrp="1"/>
+          </p:cNvSpPr>
+          <p:nvPr>
+            <p:ph type="body" idx="1"/>
+          </p:nvPr>
+        </p:nvSpPr>
+        <p:spPr/>
+        <p:txBody>
+          <a:bodyPr/>
+          <a:lstStyle/>
+          <a:p>
+            <a:r>
+              <a:rPr b="1"/>
+              <a:t>5.3 — ACTIVITY 3: DESIGN THE CEO PERFORMANCE SCORECARD (CAPSTONE WORK)</a:t>
+            </a:r>
+          </a:p>
+          <a:p>
+            <a:r>
+              <a:t/>
+            </a:r>
+          </a:p>
+          <a:p>
+            <a:r>
+              <a:rPr b="1"/>
+              <a:t>HOW TO TEACH IT:</a:t>
+            </a:r>
+          </a:p>
+          <a:p>
+            <a:r>
+              <a:t/>
+            </a:r>
+          </a:p>
+          <a:p>
+            <a:r>
+              <a:rPr b="1"/>
+              <a:t>1. Open from part 2.3.</a:t>
+            </a:r>
+          </a:p>
+          <a:p>
+            <a:r>
+              <a:t>Say: "In part 2.3 we set out the three categories of a performance scorecard and their typical weighting: Strategy 30–50% at senior levels, Operational 30–50% and Behavioural 20–40%. At executive level, the leader is measured on the cumulative outcome that the team's activities produce."</a:t>
+            </a:r>
+          </a:p>
+          <a:p>
+            <a:r>
+              <a:t/>
+            </a:r>
+          </a:p>
+          <a:p>
+            <a:r>
+              <a:rPr b="1"/>
+              <a:t>2. Brief the activity.</a:t>
+            </a:r>
+          </a:p>
+          <a:p>
+            <a:r>
+              <a:t>Say: "Your group designs one scorecard, for your CEO. The Strategy measures start from the enterprise Key Result you chose in Activity 1, and you can add a second Key Result from your Unit 3 OKRs. Then name the Operational KPIs and the Behavioural measures, and weight the three categories so that the weights add up to 100%."</a:t>
+            </a:r>
+          </a:p>
+          <a:p>
+            <a:r>
+              <a:t/>
+            </a:r>
+          </a:p>
+          <a:p>
+            <a:r>
+              <a:rPr b="1"/>
+              <a:t>3. Walk through the template.</a:t>
+            </a:r>
+          </a:p>
+          <a:p>
+            <a:r>
+              <a:t>Say: "The template on your page shows the enterprise Key Result from Activity 1. You complete five fields."</a:t>
+            </a:r>
+          </a:p>
+          <a:p>
+            <a:r>
+              <a:t>Strategy · Key Result 1: what the CEO is measured on for the enterprise Key Result from Activity 1, and its weight.</a:t>
+            </a:r>
+          </a:p>
+          <a:p>
+            <a:r>
+              <a:t>Strategy · Key Result 2 (optional): what the CEO is measured on for a second Key Result from your Unit 3 OKRs, and its weight.</a:t>
+            </a:r>
+          </a:p>
+          <a:p>
+            <a:r>
+              <a:t>Operational: the operational KPIs the CEO is measured on, with their targets, and their weight.</a:t>
+            </a:r>
+          </a:p>
+          <a:p>
+            <a:r>
+              <a:t>Behavioural: the values and leadership behaviours the CEO is measured on, how they are assessed, and their weight.</a:t>
+            </a:r>
+          </a:p>
+          <a:p>
+            <a:r>
+              <a:t>Total weight: the weights add up to 100%.</a:t>
+            </a:r>
+          </a:p>
+          <a:p>
+            <a:r>
+              <a:t/>
+            </a:r>
+          </a:p>
+          <a:p>
+            <a:r>
+              <a:rPr b="1"/>
+              <a:t>4. Ask the weighting question.</a:t>
+            </a:r>
+          </a:p>
+          <a:p>
+            <a:r>
+              <a:t>Ask: "Does the Strategy weight reflect that the CEO is measured on the cumulative outcome the team's activities produce?"</a:t>
+            </a:r>
+          </a:p>
+          <a:p>
+            <a:r>
+              <a:t/>
+            </a:r>
+          </a:p>
+          <a:p>
+            <a:r>
+              <a:rPr b="1"/>
+              <a:t>5. Read the completion check.</a:t>
+            </a:r>
+          </a:p>
+          <a:p>
+            <a:r>
+              <a:t>Say: "Before you confirm, check four things."</a:t>
+            </a:r>
+          </a:p>
+          <a:p>
+            <a:r>
+              <a:rPr b="1"/>
+              <a:t>1. The Strategy measures come from your enterprise Key Results.</a:t>
+            </a:r>
+          </a:p>
+          <a:p>
+            <a:r>
+              <a:rPr b="1"/>
+              <a:t>2. Each category has a weight, and the weights add up to 100%.</a:t>
+            </a:r>
+          </a:p>
+          <a:p>
+            <a:r>
+              <a:rPr b="1"/>
+              <a:t>3. The weighting reflects the CEO's level and influence on the strategy.</a:t>
+            </a:r>
+          </a:p>
+          <a:p>
+            <a:r>
+              <a:rPr b="1"/>
+              <a:t>4. The Behavioural measures state how they are assessed.</a:t>
+            </a:r>
+          </a:p>
+          <a:p>
+            <a:r>
+              <a:t/>
+            </a:r>
+          </a:p>
+          <a:p>
+            <a:r>
+              <a:rPr b="1"/>
+              <a:t>6. Bridge to Activity 4.</a:t>
+            </a:r>
+          </a:p>
+          <a:p>
+            <a:r>
+              <a:t>Say: "With the CEO's measures set, Activity 4 sets the vital check-up for the Key Result itself."</a:t>
+            </a:r>
+          </a:p>
+          <a:p>
+            <a:r>
+              <a:t/>
+            </a:r>
+          </a:p>
+          <a:p>
+            <a:r>
+              <a:rPr b="1"/>
+              <a:t>ON THE PORTAL, AFTER THE TEACHING:</a:t>
+            </a:r>
+          </a:p>
+          <a:p>
+            <a:r>
+              <a:t>Participants work as a group in Activity 3 of Section 5 of the participant file. This is Capstone work. The group chooses its scribe for this work. The scribe types what the group agrees, and the entries appear on every member's page.</a:t>
+            </a:r>
+          </a:p>
+          <a:p>
+            <a:r>
+              <a:rPr b="1"/>
+              <a:t>1. The group sets the Strategy measures and their weight.</a:t>
+            </a:r>
+          </a:p>
+          <a:p>
+            <a:r>
+              <a:rPr b="1"/>
+              <a:t>2. The group sets the Operational and Behavioural measures and their weights.</a:t>
+            </a:r>
+          </a:p>
+          <a:p>
+            <a:r>
+              <a:rPr b="1"/>
+              <a:t>3. The group checks that the weights add up to 100%, then goes to Activity 4.</a:t>
+            </a:r>
+          </a:p>
+        </p:txBody>
+      </p:sp>
+      <p:sp>
+        <p:nvSpPr>
+          <p:cNvPr id="4" name="Slide Number Placeholder 3"/>
+          <p:cNvSpPr>
+            <a:spLocks noGrp="1"/>
+          </p:cNvSpPr>
+          <p:nvPr>
+            <p:ph type="sldNum" sz="quarter" idx="10"/>
+          </p:nvPr>
+        </p:nvSpPr>
+        <p:spPr/>
+        <p:txBody>
+          <a:bodyPr/>
+          <a:lstStyle/>
+          <a:p>
+            <a:fld id="{F7021451-1387-4CA6-816F-3879F97B5CBC}" type="slidenum">
+              <a:rPr lang="en-US"/>
+              <a:t>7</a:t>
+            </a:fld>
+            <a:endParaRPr lang="en-US"/>
+          </a:p>
+        </p:txBody>
+      </p:sp>
+    </p:spTree>
+  </p:cSld>
+  <p:clrMapOvr>
+    <a:masterClrMapping/>
+  </p:clrMapOvr>
+</p:notes>
+</file>
+
 <file path=ppt/notesSlides/notesSlide2.xml><?xml version="1.0" encoding="utf-8"?>
 <p:notes xmlns:a="http://schemas.openxmlformats.org/drawingml/2006/main" xmlns:r="http://schemas.openxmlformats.org/officeDocument/2006/relationships" xmlns:p="http://schemas.openxmlformats.org/presentationml/2006/main">
   <p:cSld>
@@ -1460,26 +1838,22 @@
           <a:lstStyle/>
           <a:p>
             <a:r>
-              <a:rPr lang="en-GB" b="1" dirty="0"/>
-              <a:t>KEY LEARNING OUTCOMES (identical in the participant and facilitator files)</a:t>
-            </a:r>
-          </a:p>
-          <a:p>
-            <a:endParaRPr lang="en-GB" dirty="0"/>
-          </a:p>
-          <a:p>
-            <a:r>
-              <a:rPr lang="en-GB" b="1" dirty="0"/>
+              <a:rPr lang="en-GB" dirty="0" b="1"/>
+              <a:t>KEY LEARNING OUTCOMES</a:t>
+            </a:r>
+          </a:p>
+          <a:p/>
+          <a:p>
+            <a:r>
+              <a:rPr lang="en-GB" dirty="0" b="1"/>
               <a:t>HOW TO USE THIS SLIDE:</a:t>
             </a:r>
           </a:p>
-          <a:p>
-            <a:endParaRPr lang="en-GB" dirty="0"/>
-          </a:p>
-          <a:p>
-            <a:r>
-              <a:rPr lang="en-GB" b="1" dirty="0"/>
-              <a:t>1. Read the four outcomes.</a:t>
+          <a:p/>
+          <a:p>
+            <a:r>
+              <a:rPr lang="en-GB" dirty="0" b="1"/>
+              <a:t>1. Read the four outcomes aloud.</a:t>
             </a:r>
           </a:p>
           <a:p>
@@ -1506,13 +1880,55 @@
               <a:t>4. Use performance insight to improve accountability, decisions and organisational responsiveness.</a:t>
             </a:r>
           </a:p>
-          <a:p>
-            <a:endParaRPr lang="en-GB" dirty="0"/>
-          </a:p>
-          <a:p>
-            <a:r>
-              <a:rPr lang="en-GB" dirty="0"/>
-              <a:t>Each section slide carries that section’s learning outcomes.</a:t>
+          <a:p/>
+          <a:p>
+            <a:r>
+              <a:rPr lang="en-GB" dirty="0" b="1"/>
+              <a:t>2. Say where the unit builds each one.</a:t>
+            </a:r>
+          </a:p>
+          <a:p>
+            <a:r>
+              <a:rPr lang="en-GB" dirty="0"/>
+              <a:t>Outcome 1 is built in Section 1, where measurement is separated from management, and in 3.2, where you place your own organisation on the three shifts in performance management practice.</a:t>
+            </a:r>
+          </a:p>
+          <a:p>
+            <a:r>
+              <a:rPr lang="en-GB" dirty="0"/>
+              <a:t>Outcome 2 is built in 1.3 and 4.1 with the S2R® Contribution Map™, and produced in Activity 1 of Section 5, where your group maps one of its own enterprise Key Results.</a:t>
+            </a:r>
+          </a:p>
+          <a:p>
+            <a:r>
+              <a:rPr lang="en-GB" dirty="0"/>
+              <a:t>Outcome 3 is built in Section 3, where the ten executive performance perspectives come together into one view of enterprise progress, and produced in Activity 4, where your group sets the waypoints, the alert and the decider for its Key Result.</a:t>
+            </a:r>
+          </a:p>
+          <a:p>
+            <a:r>
+              <a:rPr lang="en-GB" dirty="0"/>
+              <a:t>Outcome 4 is built in 1.4 and 4.2 with FACES and in 2.1 with the four execution bridges, and produced in Activity 2, where your group applies FACES to its own map.</a:t>
+            </a:r>
+          </a:p>
+          <a:p/>
+          <a:p>
+            <a:r>
+              <a:rPr lang="en-GB" dirty="0" b="1"/>
+              <a:t>3. Connect the outcomes to the module.</a:t>
+            </a:r>
+          </a:p>
+          <a:p>
+            <a:r>
+              <a:rPr lang="en-GB" dirty="0"/>
+              <a:t>Say: "These outcomes carry the second outcome of Module 3: establishing performance arrangements that connect enterprise results to owned individual contributions and enabling organisational conditions."</a:t>
+            </a:r>
+          </a:p>
+          <a:p/>
+          <a:p>
+            <a:r>
+              <a:rPr lang="en-GB" dirty="0"/>
+              <a:t>Each section slide carries that section’s two learning outcomes.</a:t>
             </a:r>
           </a:p>
         </p:txBody>
@@ -1805,7 +2221,7 @@
           <a:lstStyle/>
           <a:p>
             <a:r>
-              <a:rPr lang="en-GB" b="1" dirty="0"/>
+              <a:rPr lang="en-GB" dirty="0" b="1"/>
               <a:t>SECTION 4 · INTEGRATION — COLLECTIVE</a:t>
             </a:r>
           </a:p>
@@ -1815,19 +2231,36 @@
               <a:t>Integration of Human and Organisational Performance</a:t>
             </a:r>
           </a:p>
-          <a:p>
-            <a:r>
-              <a:rPr lang="en-GB" dirty="0"/>
-              <a:t>One worked example brings the unit together: the contributions an enterprise Key Result requires, mapped across four functions, and how FACES manages them.</a:t>
-            </a:r>
-          </a:p>
-          <a:p>
-            <a:endParaRPr lang="en-GB" dirty="0"/>
-          </a:p>
-          <a:p>
-            <a:r>
-              <a:rPr lang="en-GB" b="1" dirty="0"/>
-              <a:t>Section learning outcomes:</a:t>
+          <a:p/>
+          <a:p>
+            <a:r>
+              <a:rPr lang="en-GB" dirty="0" b="1"/>
+              <a:t>HOW THIS SECTION RUNS:</a:t>
+            </a:r>
+          </a:p>
+          <a:p>
+            <a:r>
+              <a:rPr lang="en-GB" dirty="0"/>
+              <a:t>1. 4.1: the worked example. The S2R® Contribution Map™ for one enterprise Key Result across Customer Service, IT, Operations and Workforce Planning, then how to interpret the map (two slides).</a:t>
+            </a:r>
+          </a:p>
+          <a:p>
+            <a:r>
+              <a:rPr lang="en-GB" dirty="0"/>
+              <a:t>2. 4.2: managing the same contributions through FACES across the four functions.</a:t>
+            </a:r>
+          </a:p>
+          <a:p>
+            <a:r>
+              <a:rPr lang="en-GB" dirty="0"/>
+              <a:t>Section 4 carries no personal reflection. The worked example is the model each group follows in Section 5.</a:t>
+            </a:r>
+          </a:p>
+          <a:p/>
+          <a:p>
+            <a:r>
+              <a:rPr lang="en-GB" dirty="0" b="1"/>
+              <a:t>SECTION LEARNING OUTCOMES:</a:t>
             </a:r>
           </a:p>
           <a:p>
@@ -1842,28 +2275,63 @@
               <a:t>2. Coordinate cross-functional contributions and enabling conditions towards shared results.</a:t>
             </a:r>
           </a:p>
-          <a:p>
-            <a:endParaRPr lang="en-GB" dirty="0"/>
-          </a:p>
-          <a:p>
-            <a:r>
-              <a:rPr lang="en-GB" b="1" dirty="0"/>
-              <a:t>HOW TO TEACH IT:</a:t>
-            </a:r>
-          </a:p>
-          <a:p>
-            <a:endParaRPr lang="en-GB" dirty="0"/>
-          </a:p>
-          <a:p>
-            <a:r>
-              <a:rPr lang="en-GB" b="1" dirty="0"/>
-              <a:t>1. Frame the section.</a:t>
-            </a:r>
-          </a:p>
-          <a:p>
-            <a:r>
-              <a:rPr lang="en-GB" dirty="0"/>
-              <a:t>Say: "The previous sections established the foundations of enterprise performance management, the disciplines that sustain execution and the importance of integrating executive performance perspectives. We now bring these concepts together through a worked example."</a:t>
+          <a:p/>
+          <a:p>
+            <a:r>
+              <a:rPr lang="en-GB" dirty="0" b="1"/>
+              <a:t>HOW TO OPEN THE SECTION:</a:t>
+            </a:r>
+          </a:p>
+          <a:p/>
+          <a:p>
+            <a:r>
+              <a:rPr lang="en-GB" dirty="0" b="1"/>
+              <a:t>1. Link the three sections before it.</a:t>
+            </a:r>
+          </a:p>
+          <a:p>
+            <a:r>
+              <a:rPr lang="en-GB" dirty="0"/>
+              <a:t>Say: "The previous sections established the foundations of enterprise performance management, the disciplines that sustain execution and the importance of integrating executive performance perspectives. We now bring these concepts together through one worked example."</a:t>
+            </a:r>
+          </a:p>
+          <a:p/>
+          <a:p>
+            <a:r>
+              <a:rPr lang="en-GB" dirty="0" b="1"/>
+              <a:t>2. Name the example.</a:t>
+            </a:r>
+          </a:p>
+          <a:p>
+            <a:r>
+              <a:rPr lang="en-GB" dirty="0"/>
+              <a:t>Say: "The enterprise objective is to deliver a reliable and responsive customer service experience. The Key Result is to increase customer enquiries resolved within 48 hours from 65% to 90% by year-end. You met this department in 1.2 and 1.4. Now we map and manage every contribution it depends on."</a:t>
+            </a:r>
+          </a:p>
+          <a:p/>
+          <a:p>
+            <a:r>
+              <a:rPr lang="en-GB" dirty="0" b="1"/>
+              <a:t>3. Say why the example matters.</a:t>
+            </a:r>
+          </a:p>
+          <a:p>
+            <a:r>
+              <a:rPr lang="en-GB" dirty="0"/>
+              <a:t>Say: "In Section 5 your group builds the same three things for its own strategy. Read the example as the model you will follow."</a:t>
+            </a:r>
+          </a:p>
+          <a:p/>
+          <a:p>
+            <a:r>
+              <a:rPr lang="en-GB" dirty="0" b="1"/>
+              <a:t>4. Bridge to 4.1.</a:t>
+            </a:r>
+          </a:p>
+          <a:p>
+            <a:r>
+              <a:rPr lang="en-GB" dirty="0"/>
+              <a:t>Say: "We start with the Contribution Map."</a:t>
             </a:r>
           </a:p>
         </p:txBody>
@@ -1897,6 +2365,211 @@
         <p14:creationId xmlns:p14="http://schemas.microsoft.com/office/powerpoint/2010/main" val="1024086991"/>
       </p:ext>
     </p:extLst>
+  </p:cSld>
+  <p:clrMapOvr>
+    <a:masterClrMapping/>
+  </p:clrMapOvr>
+</p:notes>
+</file>
+
+<file path=ppt/notesSlides/notesSlide22.xml><?xml version="1.0" encoding="utf-8"?>
+<p:notes xmlns:a="http://schemas.openxmlformats.org/drawingml/2006/main" xmlns:p="http://schemas.openxmlformats.org/presentationml/2006/main" xmlns:r="http://schemas.openxmlformats.org/officeDocument/2006/relationships">
+  <p:cSld>
+    <p:spTree>
+      <p:nvGrpSpPr>
+        <p:cNvPr id="1" name=""/>
+        <p:cNvGrpSpPr/>
+        <p:nvPr/>
+      </p:nvGrpSpPr>
+      <p:grpSpPr>
+        <a:xfrm>
+          <a:off x="0" y="0"/>
+          <a:ext cx="0" cy="0"/>
+          <a:chOff x="0" y="0"/>
+          <a:chExt cx="0" cy="0"/>
+        </a:xfrm>
+      </p:grpSpPr>
+      <p:sp>
+        <p:nvSpPr>
+          <p:cNvPr id="2" name="Slide Image Placeholder 1"/>
+          <p:cNvSpPr>
+            <a:spLocks noGrp="1" noRot="1" noChangeAspect="1"/>
+          </p:cNvSpPr>
+          <p:nvPr>
+            <p:ph type="sldImg"/>
+          </p:nvPr>
+        </p:nvSpPr>
+        <p:spPr/>
+      </p:sp>
+      <p:sp>
+        <p:nvSpPr>
+          <p:cNvPr id="3" name="Notes Placeholder 2"/>
+          <p:cNvSpPr>
+            <a:spLocks noGrp="1"/>
+          </p:cNvSpPr>
+          <p:nvPr>
+            <p:ph type="body" idx="1"/>
+          </p:nvPr>
+        </p:nvSpPr>
+        <p:spPr/>
+        <p:txBody>
+          <a:bodyPr/>
+          <a:lstStyle/>
+          <a:p>
+            <a:r>
+              <a:rPr b="1"/>
+              <a:t>2.3.1 — DEVELOPING A PERFORMANCE SCORECARD</a:t>
+            </a:r>
+          </a:p>
+          <a:p>
+            <a:r>
+              <a:t/>
+            </a:r>
+          </a:p>
+          <a:p>
+            <a:r>
+              <a:rPr b="1"/>
+              <a:t>HOW TO TEACH IT:</a:t>
+            </a:r>
+          </a:p>
+          <a:p>
+            <a:r>
+              <a:t/>
+            </a:r>
+          </a:p>
+          <a:p>
+            <a:r>
+              <a:rPr b="1"/>
+              <a:t>1. Start from the enterprise Key Results.</a:t>
+            </a:r>
+          </a:p>
+          <a:p>
+            <a:r>
+              <a:t>Say: "The Strategy measures come from the Key Results the role contributes to, as set out in the S2R® Contribution Map™."</a:t>
+            </a:r>
+          </a:p>
+          <a:p>
+            <a:r>
+              <a:t/>
+            </a:r>
+          </a:p>
+          <a:p>
+            <a:r>
+              <a:rPr b="1"/>
+              <a:t>2. Add the Operational KPIs.</a:t>
+            </a:r>
+          </a:p>
+          <a:p>
+            <a:r>
+              <a:t>Say: "Name the KPIs that show whether the role's function performs at the standard the strategy requires."</a:t>
+            </a:r>
+          </a:p>
+          <a:p>
+            <a:r>
+              <a:t/>
+            </a:r>
+          </a:p>
+          <a:p>
+            <a:r>
+              <a:rPr b="1"/>
+              <a:t>3. Add the Behavioural measures.</a:t>
+            </a:r>
+          </a:p>
+          <a:p>
+            <a:r>
+              <a:t>Say: "Name the values and leadership behaviours expected of the role, and how they will be assessed."</a:t>
+            </a:r>
+          </a:p>
+          <a:p>
+            <a:r>
+              <a:t/>
+            </a:r>
+          </a:p>
+          <a:p>
+            <a:r>
+              <a:rPr b="1"/>
+              <a:t>4. Weight the three categories.</a:t>
+            </a:r>
+          </a:p>
+          <a:p>
+            <a:r>
+              <a:t>Say: "Set the weight of each category to reflect the role's level and its influence on the strategy. The weights add up to 100%."</a:t>
+            </a:r>
+          </a:p>
+          <a:p>
+            <a:r>
+              <a:t/>
+            </a:r>
+          </a:p>
+          <a:p>
+            <a:r>
+              <a:rPr b="1"/>
+              <a:t>5. Make it transparent.</a:t>
+            </a:r>
+          </a:p>
+          <a:p>
+            <a:r>
+              <a:t>Say: "The role holder understands the KPIs, targets, weightings, behavioural standards and rating criteria on which performance will be assessed."</a:t>
+            </a:r>
+          </a:p>
+          <a:p>
+            <a:r>
+              <a:t/>
+            </a:r>
+          </a:p>
+          <a:p>
+            <a:r>
+              <a:rPr b="1"/>
+              <a:t>6. Show how the weighting changes with the role's level.</a:t>
+            </a:r>
+          </a:p>
+          <a:p>
+            <a:r>
+              <a:t>Say: "At executive level, the leader is measured on the cumulative outcome that the team's activities produce. The scorecard of a CEO therefore carries a higher Strategy weight than the scorecard of a frontline role. In Section 5, Activity 3, your group designs one scorecard, for its CEO."</a:t>
+            </a:r>
+          </a:p>
+          <a:p>
+            <a:r>
+              <a:t/>
+            </a:r>
+          </a:p>
+          <a:p>
+            <a:r>
+              <a:rPr b="1"/>
+              <a:t>7. Close Section 2 and bridge to Section 3.</a:t>
+            </a:r>
+          </a:p>
+          <a:p>
+            <a:r>
+              <a:t>Say: "Performance management bridges strategy and execution when it builds commitment to results, and the scorecard carries that commitment to each role. Section 3 examines where performance management becomes vulnerable across executive perspectives, and how its practice is evolving."</a:t>
+            </a:r>
+          </a:p>
+        </p:txBody>
+      </p:sp>
+      <p:sp>
+        <p:nvSpPr>
+          <p:cNvPr id="4" name="Slide Number Placeholder 3"/>
+          <p:cNvSpPr>
+            <a:spLocks noGrp="1"/>
+          </p:cNvSpPr>
+          <p:nvPr>
+            <p:ph type="sldNum" sz="quarter" idx="10"/>
+          </p:nvPr>
+        </p:nvSpPr>
+        <p:spPr/>
+        <p:txBody>
+          <a:bodyPr/>
+          <a:lstStyle/>
+          <a:p>
+            <a:fld id="{F7021451-1387-4CA6-816F-3879F97B5CBC}" type="slidenum">
+              <a:rPr lang="en-US"/>
+              <a:t>7</a:t>
+            </a:fld>
+            <a:endParaRPr lang="en-US"/>
+          </a:p>
+        </p:txBody>
+      </p:sp>
+    </p:spTree>
   </p:cSld>
   <p:clrMapOvr>
     <a:masterClrMapping/>
@@ -1949,77 +2622,142 @@
           <a:lstStyle/>
           <a:p>
             <a:r>
-              <a:rPr lang="en-GB"/>
+              <a:rPr lang="en-GB" dirty="0" b="1"/>
               <a:t>SECTION 5 · APPLICATION — IN PRACTICE</a:t>
             </a:r>
           </a:p>
           <a:p>
             <a:r>
-              <a:rPr lang="en-GB"/>
+              <a:rPr lang="en-GB" dirty="0"/>
               <a:t>Building Your Enterprise Performance Management System</a:t>
             </a:r>
           </a:p>
-          <a:p>
-            <a:r>
-              <a:rPr lang="en-GB"/>
-              <a:t>Application · Each group builds three connected components of the Enterprise Performance Management System for the strategy in its Capstone Blueprint: the S2R® Contribution Map™, the FACES application and the WARD check-up for its enterprise Key Result.</a:t>
-            </a:r>
-          </a:p>
-          <a:p>
-            <a:endParaRPr lang="en-GB"/>
-          </a:p>
-          <a:p>
-            <a:r>
-              <a:rPr lang="en-GB"/>
-              <a:t>Section learning outcomes:</a:t>
-            </a:r>
-          </a:p>
-          <a:p>
-            <a:r>
-              <a:rPr lang="en-GB"/>
+          <a:p/>
+          <a:p>
+            <a:r>
+              <a:rPr lang="en-GB" dirty="0" b="1"/>
+              <a:t>HOW THIS SECTION RUNS:</a:t>
+            </a:r>
+          </a:p>
+          <a:p>
+            <a:r>
+              <a:rPr lang="en-GB" dirty="0"/>
+              <a:t>1. 5.1 · Activity 1: the S2R® Contribution Map™. Each group selects one enterprise Key Result from the Objectives and Key Results it confirmed in Unit 3, part 5.2, names three or four business functions and completes six fields for each.</a:t>
+            </a:r>
+          </a:p>
+          <a:p>
+            <a:r>
+              <a:rPr lang="en-GB" dirty="0"/>
+              <a:t>2. 5.2 · Activity 2: the FACES application. For each business function named in Activity 1, the group describes one practical management arrangement for each FACES function.</a:t>
+            </a:r>
+          </a:p>
+          <a:p>
+            <a:r>
+              <a:rPr lang="en-GB" dirty="0"/>
+              <a:t>3. 5.3 · Activity 3: the CEO Performance Scorecard. The group sets the Strategy, Operational and Behavioural measures on which its CEO is assessed, and the weight of each, using part 2.3.</a:t>
+            </a:r>
+          </a:p>
+          <a:p>
+            <a:r>
+              <a:rPr lang="en-GB" dirty="0"/>
+              <a:t>4. 5.4 · Activity 4: the WARD check-up. The group sets the waypoints, the alert, the recovery and the decider for the Key Result chosen in Activity 1, using the conditions named in its Contribution Map.</a:t>
+            </a:r>
+          </a:p>
+          <a:p>
+            <a:r>
+              <a:rPr lang="en-GB" dirty="0"/>
+              <a:t>All four activities are group work and Capstone work. Brief each activity from the worked example in Section 4. The groups then work through the steps on their own pages.</a:t>
+            </a:r>
+          </a:p>
+          <a:p/>
+          <a:p>
+            <a:r>
+              <a:rPr lang="en-GB" dirty="0" b="1"/>
+              <a:t>SECTION LEARNING OUTCOMES:</a:t>
+            </a:r>
+          </a:p>
+          <a:p>
+            <a:r>
+              <a:rPr lang="en-GB" dirty="0"/>
               <a:t>1. Design the contribution arrangements required to deliver a chosen enterprise Key Result.</a:t>
             </a:r>
           </a:p>
           <a:p>
             <a:r>
-              <a:rPr lang="en-GB"/>
+              <a:rPr lang="en-GB" dirty="0"/>
               <a:t>2. Establish shared management accountability for contributions across functions.</a:t>
             </a:r>
           </a:p>
-          <a:p>
-            <a:endParaRPr lang="en-GB"/>
-          </a:p>
-          <a:p>
-            <a:r>
-              <a:rPr lang="en-GB"/>
-              <a:t>HOW TO TEACH IT:</a:t>
-            </a:r>
-          </a:p>
-          <a:p>
-            <a:endParaRPr lang="en-GB"/>
-          </a:p>
-          <a:p>
-            <a:r>
-              <a:rPr lang="en-GB"/>
+          <a:p/>
+          <a:p>
+            <a:r>
+              <a:rPr lang="en-GB" dirty="0" b="1"/>
+              <a:t>HOW TO OPEN THE SECTION:</a:t>
+            </a:r>
+          </a:p>
+          <a:p/>
+          <a:p>
+            <a:r>
+              <a:rPr lang="en-GB" dirty="0" b="1"/>
               <a:t>1. Frame the application.</a:t>
             </a:r>
           </a:p>
           <a:p>
             <a:r>
-              <a:rPr lang="en-GB"/>
-              <a:t>Say: "You have already established your capstone organisation’s strategic direction, strategic objectives and Key Results. In this application, your group uses that work to develop three connected components of your Enterprise Performance Management System: Activity 1, the S2R® Contribution Map™, Activity 2, the FACES application, and Activity 3, the WARD check-up for your enterprise Key Result."</a:t>
-            </a:r>
-          </a:p>
-          <a:p>
-            <a:r>
-              <a:rPr lang="en-GB"/>
-              <a:t>Order: all three activities are group work and Capstone work. Activity 1 needs the group’s confirmed Enterprise OKRs from Unit 3, part 5.2. Activity 2 uses the business functions the group names in Activity 1. Activity 3 sets the WARD check-up for the Key Result chosen in Activity 1, using the conditions named in the Contribution Map.</a:t>
-            </a:r>
-          </a:p>
-          <a:p>
-            <a:r>
-              <a:rPr lang="en-GB"/>
-              <a:t>How to guide the work: brief each activity from the worked example in Section 4, then let the groups work through the steps on their own pages. The group chooses its scribe; the entries appear on every member’s page.</a:t>
+              <a:rPr lang="en-GB" dirty="0"/>
+              <a:t>Say: "Your group has already established its capstone organisation’s strategic direction, strategic objectives and Key Results. In this application you use that work to develop four connected components of your Enterprise Performance Management System: Activity 1, the S2R® Contribution Map™; Activity 2, the FACES application; Activity 3, the CEO Performance Scorecard; and Activity 4, the WARD check-up for your enterprise Key Result."</a:t>
+            </a:r>
+          </a:p>
+          <a:p/>
+          <a:p>
+            <a:r>
+              <a:rPr lang="en-GB" dirty="0" b="1"/>
+              <a:t>2. Say how the activities connect.</a:t>
+            </a:r>
+          </a:p>
+          <a:p>
+            <a:r>
+              <a:rPr lang="en-GB" dirty="0"/>
+              <a:t>Say: "Each activity builds on the one before it. Activity 2 uses the business functions you name in Activity 1. Activity 3 builds the CEO Performance Scorecard from that Key Result. Activity 4 sets the check-up for the Key Result you choose in Activity 1, and its recovery uses the organisational conditions you name in your map."</a:t>
+            </a:r>
+          </a:p>
+          <a:p/>
+          <a:p>
+            <a:r>
+              <a:rPr lang="en-GB" dirty="0" b="1"/>
+              <a:t>3. Say how the group works.</a:t>
+            </a:r>
+          </a:p>
+          <a:p>
+            <a:r>
+              <a:rPr lang="en-GB" dirty="0"/>
+              <a:t>Say: "This is group work. Your group chooses its scribe for this work. The scribe types what the group agrees, and the entries appear on every member’s page. When the record is complete, each member reads it and selects Agree."</a:t>
+            </a:r>
+          </a:p>
+          <a:p/>
+          <a:p>
+            <a:r>
+              <a:rPr lang="en-GB" dirty="0" b="1"/>
+              <a:t>4. Say where the work goes.</a:t>
+            </a:r>
+          </a:p>
+          <a:p>
+            <a:r>
+              <a:rPr lang="en-GB" dirty="0"/>
+              <a:t>Say: "This is Capstone work. Your group’s agreed record feeds boxes 6A to 6D of your Capstone S2R® Blueprint."</a:t>
+            </a:r>
+          </a:p>
+          <a:p/>
+          <a:p>
+            <a:r>
+              <a:rPr lang="en-GB" dirty="0" b="1"/>
+              <a:t>5. Bridge to Activity 1.</a:t>
+            </a:r>
+          </a:p>
+          <a:p>
+            <a:r>
+              <a:rPr lang="en-GB" dirty="0"/>
+              <a:t>Say: "We start with the Contribution Map for one of your own Key Results."</a:t>
             </a:r>
           </a:p>
         </p:txBody>
@@ -2321,6 +3059,221 @@
 </p:notes>
 </file>
 
+<file path=ppt/notesSlides/notesSlide25.xml><?xml version="1.0" encoding="utf-8"?>
+<p:notes xmlns:a="http://schemas.openxmlformats.org/drawingml/2006/main" xmlns:p="http://schemas.openxmlformats.org/presentationml/2006/main" xmlns:r="http://schemas.openxmlformats.org/officeDocument/2006/relationships">
+  <p:cSld>
+    <p:spTree>
+      <p:nvGrpSpPr>
+        <p:cNvPr id="1" name=""/>
+        <p:cNvGrpSpPr/>
+        <p:nvPr/>
+      </p:nvGrpSpPr>
+      <p:grpSpPr>
+        <a:xfrm>
+          <a:off x="0" y="0"/>
+          <a:ext cx="0" cy="0"/>
+          <a:chOff x="0" y="0"/>
+          <a:chExt cx="0" cy="0"/>
+        </a:xfrm>
+      </p:grpSpPr>
+      <p:sp>
+        <p:nvSpPr>
+          <p:cNvPr id="2" name="Slide Image Placeholder 1"/>
+          <p:cNvSpPr>
+            <a:spLocks noGrp="1" noRot="1" noChangeAspect="1"/>
+          </p:cNvSpPr>
+          <p:nvPr>
+            <p:ph type="sldImg"/>
+          </p:nvPr>
+        </p:nvSpPr>
+        <p:spPr/>
+      </p:sp>
+      <p:sp>
+        <p:nvSpPr>
+          <p:cNvPr id="3" name="Notes Placeholder 2"/>
+          <p:cNvSpPr>
+            <a:spLocks noGrp="1"/>
+          </p:cNvSpPr>
+          <p:nvPr>
+            <p:ph type="body" idx="1"/>
+          </p:nvPr>
+        </p:nvSpPr>
+        <p:spPr/>
+        <p:txBody>
+          <a:bodyPr/>
+          <a:lstStyle/>
+          <a:p>
+            <a:r>
+              <a:rPr b="1"/>
+              <a:t>2.3 — PERFORMANCE SCORECARD DEVELOPMENT: THE THREE CATEGORIES</a:t>
+            </a:r>
+          </a:p>
+          <a:p>
+            <a:r>
+              <a:t/>
+            </a:r>
+          </a:p>
+          <a:p>
+            <a:r>
+              <a:rPr b="1"/>
+              <a:t>HOW TO TEACH IT:</a:t>
+            </a:r>
+          </a:p>
+          <a:p>
+            <a:r>
+              <a:t/>
+            </a:r>
+          </a:p>
+          <a:p>
+            <a:r>
+              <a:rPr b="1"/>
+              <a:t>1. Link to the execution bridges.</a:t>
+            </a:r>
+          </a:p>
+          <a:p>
+            <a:r>
+              <a:t>Say: "The execution bridges carry enterprise results to the people who deliver them. The performance scorecard is where that connection reaches the individual: it states the measures on which a role's performance is assessed and the weight each carries."</a:t>
+            </a:r>
+          </a:p>
+          <a:p>
+            <a:r>
+              <a:t/>
+            </a:r>
+          </a:p>
+          <a:p>
+            <a:r>
+              <a:rPr b="1"/>
+              <a:t>2. Name the three categories.</a:t>
+            </a:r>
+          </a:p>
+          <a:p>
+            <a:r>
+              <a:t>Say: "A well-designed scorecard tracks performance in three categories: Strategy, Operational and Behavioural. Each gives a different angle on whether the organisation is progressing towards its strategic intent."</a:t>
+            </a:r>
+          </a:p>
+          <a:p>
+            <a:r>
+              <a:t/>
+            </a:r>
+          </a:p>
+          <a:p>
+            <a:r>
+              <a:rPr b="1"/>
+              <a:t>3. Teach Strategy.</a:t>
+            </a:r>
+          </a:p>
+          <a:p>
+            <a:r>
+              <a:t>Say: "Strategy measures are the strategic OKRs directly connected to the organisation's multi-year strategy. They ask: are we making progress on what matters most for where we are going? They typically carry 30–50% of the scorecard at senior levels, and less for frontline roles. They are reviewed quarterly, with executive visibility."</a:t>
+            </a:r>
+          </a:p>
+          <a:p>
+            <a:r>
+              <a:t/>
+            </a:r>
+          </a:p>
+          <a:p>
+            <a:r>
+              <a:rPr b="1"/>
+              <a:t>4. Teach Operational.</a:t>
+            </a:r>
+          </a:p>
+          <a:p>
+            <a:r>
+              <a:t>Say: "Operational measures are the departmental KPIs that track the operational engine: efficiency, output, quality and service delivery. They ask: are operations performing at the standard required to sustain the strategy? They carry 30–50% across most role levels, highest for frontline and specialist roles. They are reviewed monthly or fortnightly."</a:t>
+            </a:r>
+          </a:p>
+          <a:p>
+            <a:r>
+              <a:t/>
+            </a:r>
+          </a:p>
+          <a:p>
+            <a:r>
+              <a:rPr b="1"/>
+              <a:t>5. Teach Behavioural.</a:t>
+            </a:r>
+          </a:p>
+          <a:p>
+            <a:r>
+              <a:t>Say: "Behavioural measures cover how individuals demonstrate the organisation's values and leadership behaviours, assessed through 360° feedback and peer observation. They ask: how are our results being achieved? They carry 20–40% across role levels, higher for leadership and customer-facing roles. They are reviewed bi-annually, through structured 360° feedback."</a:t>
+            </a:r>
+          </a:p>
+          <a:p>
+            <a:r>
+              <a:t>Point to the bar on the slide. Say: "How results are achieved matters as much as what results are achieved."</a:t>
+            </a:r>
+          </a:p>
+          <a:p>
+            <a:r>
+              <a:t/>
+            </a:r>
+          </a:p>
+          <a:p>
+            <a:r>
+              <a:rPr b="1"/>
+              <a:t>6. Ask, now that the three categories are taught.</a:t>
+            </a:r>
+          </a:p>
+          <a:p>
+            <a:r>
+              <a:t>Ask: "If your CEO's scorecard were published tomorrow, what share of it would be Strategy, Operational and Behavioural, and does that reflect the role?"</a:t>
+            </a:r>
+          </a:p>
+          <a:p>
+            <a:r>
+              <a:t>Take two or three answers.</a:t>
+            </a:r>
+          </a:p>
+          <a:p>
+            <a:r>
+              <a:t/>
+            </a:r>
+          </a:p>
+          <a:p>
+            <a:r>
+              <a:rPr b="1"/>
+              <a:t>7. Bridge to 2.3.1.</a:t>
+            </a:r>
+          </a:p>
+          <a:p>
+            <a:r>
+              <a:t>Say: "Next, how a scorecard is put together for a role."</a:t>
+            </a:r>
+          </a:p>
+        </p:txBody>
+      </p:sp>
+      <p:sp>
+        <p:nvSpPr>
+          <p:cNvPr id="4" name="Slide Number Placeholder 3"/>
+          <p:cNvSpPr>
+            <a:spLocks noGrp="1"/>
+          </p:cNvSpPr>
+          <p:nvPr>
+            <p:ph type="sldNum" sz="quarter" idx="10"/>
+          </p:nvPr>
+        </p:nvSpPr>
+        <p:spPr/>
+        <p:txBody>
+          <a:bodyPr/>
+          <a:lstStyle/>
+          <a:p>
+            <a:fld id="{F7021451-1387-4CA6-816F-3879F97B5CBC}" type="slidenum">
+              <a:rPr lang="en-US"/>
+              <a:t>24</a:t>
+            </a:fld>
+            <a:endParaRPr lang="en-US"/>
+          </a:p>
+        </p:txBody>
+      </p:sp>
+    </p:spTree>
+  </p:cSld>
+  <p:clrMapOvr>
+    <a:masterClrMapping/>
+  </p:clrMapOvr>
+</p:notes>
+</file>
+
 <file path=ppt/notesSlides/notesSlide26.xml><?xml version="1.0" encoding="utf-8"?>
 <p:notes xmlns:a="http://schemas.openxmlformats.org/drawingml/2006/main" xmlns:p="http://schemas.openxmlformats.org/presentationml/2006/main" xmlns:r="http://schemas.openxmlformats.org/officeDocument/2006/relationships">
   <p:cSld>
@@ -2366,25 +3319,21 @@
           <a:lstStyle/>
           <a:p>
             <a:r>
-              <a:rPr lang="en-GB" b="1" dirty="0"/>
+              <a:rPr lang="en-GB" dirty="0" b="1"/>
               <a:t>1.2 — TWO OPERATING SYSTEMS BEHIND ENTERPRISE PERFORMANCE (Understanding what people deliver and what the organisation enables)</a:t>
             </a:r>
           </a:p>
-          <a:p>
-            <a:endParaRPr lang="en-GB" dirty="0"/>
-          </a:p>
-          <a:p>
-            <a:r>
-              <a:rPr lang="en-GB" b="1" dirty="0"/>
+          <a:p/>
+          <a:p>
+            <a:r>
+              <a:rPr lang="en-GB" dirty="0" b="1"/>
               <a:t>HOW TO TEACH IT:</a:t>
             </a:r>
           </a:p>
-          <a:p>
-            <a:endParaRPr lang="en-GB" dirty="0"/>
-          </a:p>
-          <a:p>
-            <a:r>
-              <a:rPr lang="en-GB" b="1" dirty="0"/>
+          <a:p/>
+          <a:p>
+            <a:r>
+              <a:rPr lang="en-GB" dirty="0" b="1"/>
               <a:t>1. Open with the question.</a:t>
             </a:r>
           </a:p>
@@ -2394,12 +3343,10 @@
               <a:t>Begin by asking participants: "When an employee or department misses a performance target, how does your organisation determine whether the problem is with individual performance or the conditions under which the work is performed?" Take two or three answers in the chat.</a:t>
             </a:r>
           </a:p>
-          <a:p>
-            <a:endParaRPr lang="en-GB" dirty="0"/>
-          </a:p>
-          <a:p>
-            <a:r>
-              <a:rPr lang="en-GB" b="1" dirty="0"/>
+          <a:p/>
+          <a:p>
+            <a:r>
+              <a:rPr lang="en-GB" dirty="0" b="1"/>
               <a:t>2. Teach why there are two systems.</a:t>
             </a:r>
           </a:p>
@@ -2421,12 +3368,10 @@
               <a:t>Say: "This distinction is fundamental to Enterprise Performance Management (EPM). A complete performance management system must evaluate what people contribute and whether the organisation provides the conditions necessary for those contributions to produce the intended results. We refer to these as two interconnected operating systems."</a:t>
             </a:r>
           </a:p>
-          <a:p>
-            <a:endParaRPr lang="en-GB" dirty="0"/>
-          </a:p>
-          <a:p>
-            <a:r>
-              <a:rPr lang="en-GB" b="1" dirty="0"/>
+          <a:p/>
+          <a:p>
+            <a:r>
+              <a:rPr lang="en-GB" dirty="0" b="1"/>
               <a:t>3. Teach the Human Operating System (left card).</a:t>
             </a:r>
           </a:p>
@@ -2466,12 +3411,10 @@
               <a:t>The Human Operating System answers: "Are individuals and teams delivering their expected results and demonstrating the behaviours required for sustained organisational performance?"</a:t>
             </a:r>
           </a:p>
-          <a:p>
-            <a:endParaRPr lang="en-GB" dirty="0"/>
-          </a:p>
-          <a:p>
-            <a:r>
-              <a:rPr lang="en-GB" b="1" dirty="0"/>
+          <a:p/>
+          <a:p>
+            <a:r>
+              <a:rPr lang="en-GB" dirty="0" b="1"/>
               <a:t>4. Introduce the Organisational Operating System (right card).</a:t>
             </a:r>
           </a:p>
@@ -2484,7 +3427,13 @@
           <a:p>
             <a:r>
               <a:rPr lang="en-GB" dirty="0"/>
-              <a:t>Say: "Within S2R®, these conditions are examined through ESRG: Environment, Systems, Resources and Governance. ESRG provides the structure for evaluating whether the organisation has the operating capability necessary to support its strategic ambition." The next slide takes the four elements one at a time.</a:t>
+              <a:t>Say: "Within S2R®, these conditions are examined through ESRG: Environment, Systems, Resources and Governance, each with three components. ESRG provides the structure for evaluating whether the organisation has the operating capability necessary to support its strategic ambition."</a:t>
+            </a:r>
+          </a:p>
+          <a:p>
+            <a:r>
+              <a:rPr lang="en-GB" dirty="0"/>
+              <a:t>The next slide takes the four domains one at a time.</a:t>
             </a:r>
           </a:p>
         </p:txBody>
@@ -2565,131 +3514,123 @@
           <a:lstStyle/>
           <a:p>
             <a:r>
-              <a:rPr lang="en-GB"/>
+              <a:rPr lang="en-GB" dirty="0"/>
               <a:t>UNIT SUMMARY (UNIT 6 SYNTHESIS)</a:t>
             </a:r>
           </a:p>
-          <a:p>
-            <a:endParaRPr lang="en-GB"/>
-          </a:p>
-          <a:p>
-            <a:r>
-              <a:rPr lang="en-GB"/>
+          <a:p/>
+          <a:p>
+            <a:r>
+              <a:rPr lang="en-GB" dirty="0"/>
               <a:t>HOW TO TEACH IT:</a:t>
             </a:r>
           </a:p>
-          <a:p>
-            <a:endParaRPr lang="en-GB"/>
-          </a:p>
-          <a:p>
-            <a:r>
-              <a:rPr lang="en-GB"/>
+          <a:p/>
+          <a:p>
+            <a:r>
+              <a:rPr lang="en-GB" dirty="0"/>
               <a:t>1. Recap the unit, section by section.</a:t>
             </a:r>
           </a:p>
           <a:p>
             <a:r>
-              <a:rPr lang="en-GB"/>
+              <a:rPr lang="en-GB" dirty="0"/>
               <a:t>- 1 · Awareness: Performance measurement answers what happened; performance management decides what to do about it. Enterprise performance comes from people performance (results against KPIs and OKRs, and behaviours) and organisational performance (the organisational conditions: environment, systems, resources and governance). The S2R® Contribution Map™ connects an enterprise Key Result to the contribution each function, its people and the organisation must make. FACES names the five functions that manage those contributions across both systems.</a:t>
             </a:r>
           </a:p>
           <a:p>
             <a:r>
-              <a:rPr lang="en-GB"/>
+              <a:rPr lang="en-GB" dirty="0"/>
               <a:t>- 2 · Intelligence: Performance management is the execution bridge that keeps strategy connected to performance throughout delivery. Four bridges sustain it: Decomposing the Big Picture, Defining the Logic of Success, Calibrating the Rhythm and Structuring the Dialogue. Compliance-driven and commitment-driven architectures shape how accountability works for people and for the organisation when results fall short.</a:t>
             </a:r>
           </a:p>
           <a:p>
             <a:r>
-              <a:rPr lang="en-GB"/>
+              <a:rPr lang="en-GB" dirty="0"/>
               <a:t>- 3 · Extrapolating: Each executive brings a natural performance focus and a potential blind spot. Unity in Diversity integrates the ten executive performance perspectives into one view of enterprise progress. Three shifts are moving performance management from annual to continuous, from rating-centric to development-centric, and from individual to team performance.</a:t>
             </a:r>
           </a:p>
           <a:p>
             <a:r>
-              <a:rPr lang="en-GB"/>
+              <a:rPr lang="en-GB" dirty="0"/>
               <a:t>- 4 · Integration: The worked example mapped one enterprise Key Result across Customer Service, IT, Operations and Workforce Planning: each function’s contribution, what its people must deliver and the organisational conditions that enable them, each with a measure or evidence. FACES then showed how those contributions are managed in practice.</a:t>
             </a:r>
           </a:p>
           <a:p>
             <a:r>
-              <a:rPr lang="en-GB"/>
-              <a:t>- 5 · Application: Each group built an S2R® Contribution Map™ for one of its own enterprise Key Results, applied FACES to manage each function’s contribution and set the WARD check-up for the Key Result. The confirmed record feeds the team’s Capstone Blueprint.</a:t>
-            </a:r>
-          </a:p>
-          <a:p>
-            <a:endParaRPr lang="en-GB"/>
-          </a:p>
-          <a:p>
-            <a:r>
-              <a:rPr lang="en-GB"/>
+              <a:rPr lang="en-GB" dirty="0"/>
+              <a:t>- 5 · Application: Each group built an S2R® Contribution Map™ for one of its own enterprise Key Results, applied FACES to manage each function’s contribution and set the WARD check-up for the Key Result. The confirmed record feeds the team’s Capstone S2R® Blueprint.</a:t>
+            </a:r>
+          </a:p>
+          <a:p/>
+          <a:p>
+            <a:r>
+              <a:rPr lang="en-GB" dirty="0"/>
               <a:t>2. Ask the closing question on the slide.</a:t>
             </a:r>
           </a:p>
           <a:p>
             <a:r>
-              <a:rPr lang="en-GB"/>
+              <a:rPr lang="en-GB" dirty="0"/>
               <a:t>Ask: "Which contribution in your group’s map was hardest to agree, and what does that tell you about the performance management system in your own organisation?" Take an answer from each group.</a:t>
             </a:r>
           </a:p>
-          <a:p>
-            <a:endParaRPr lang="en-GB"/>
-          </a:p>
-          <a:p>
-            <a:r>
-              <a:rPr lang="en-GB"/>
+          <a:p/>
+          <a:p>
+            <a:r>
+              <a:rPr lang="en-GB" dirty="0" b="1"/>
               <a:t>3. Close the unit.</a:t>
             </a:r>
           </a:p>
           <a:p>
             <a:r>
-              <a:rPr lang="en-GB"/>
-              <a:t>Say: "A performance management system that only measures has not yet become a management system. The moment measurement becomes the basis for a decision, a conversation, and an accountable intervention — that is the moment execution begins."</a:t>
-            </a:r>
-          </a:p>
-          <a:p>
-            <a:endParaRPr lang="en-GB"/>
-          </a:p>
-          <a:p>
-            <a:r>
-              <a:rPr lang="en-GB"/>
-              <a:t>4. Say what happens on the portal.</a:t>
-            </a:r>
-          </a:p>
-          <a:p>
-            <a:r>
-              <a:rPr lang="en-GB"/>
-              <a:t>Say: "You now complete the unit on the portal: your four personal reflections and your group’s record in Section 5. When your page is complete, you submit the unit."</a:t>
-            </a:r>
-          </a:p>
-          <a:p>
-            <a:endParaRPr lang="en-GB"/>
-          </a:p>
-          <a:p>
-            <a:r>
-              <a:rPr lang="en-GB"/>
+              <a:rPr lang="en-GB" dirty="0"/>
+              <a:t>Say: "A performance management system becomes a management system when measurement becomes the basis for a decision, a conversation and an accountable intervention. Execution begins at that moment."</a:t>
+            </a:r>
+          </a:p>
+          <a:p>
+            <a:r>
+              <a:rPr lang="en-GB" dirty="0"/>
+              <a:t>Say: "Each group’s Enterprise Performance Management System now links one Key Result to its contributions, their management and its vital check-up."</a:t>
+            </a:r>
+          </a:p>
+          <a:p/>
+          <a:p>
+            <a:r>
+              <a:rPr lang="en-GB" dirty="0" b="1"/>
+              <a:t>4. Bridge to Unit 7.</a:t>
+            </a:r>
+          </a:p>
+          <a:p>
+            <a:r>
+              <a:rPr lang="en-GB" dirty="0"/>
+              <a:t>Say: "Unit 7 turns the contributions on your group’s Contribution Map into expectations their owners commit to."</a:t>
+            </a:r>
+          </a:p>
+          <a:p/>
+          <a:p>
+            <a:r>
+              <a:rPr lang="en-GB" dirty="0"/>
               <a:t>ON THE PORTAL, AFTER THE TEACHING:</a:t>
             </a:r>
           </a:p>
           <a:p>
             <a:r>
-              <a:rPr lang="en-GB"/>
-              <a:t>Participants complete every part of the participant file and submit the unit to the facilitator from the end of Section 5.</a:t>
-            </a:r>
-          </a:p>
-          <a:p>
-            <a:endParaRPr lang="en-GB"/>
-          </a:p>
-          <a:p>
-            <a:r>
-              <a:rPr lang="en-GB"/>
+              <a:rPr lang="en-GB" dirty="0"/>
+              <a:t>Participants complete every part of the participant file: the four personal reflections and the group’s record in Section 5. When the page is complete, each participant submits the unit to the facilitator from the end of Section 5.</a:t>
+            </a:r>
+          </a:p>
+          <a:p/>
+          <a:p>
+            <a:r>
+              <a:rPr lang="en-GB" dirty="0"/>
               <a:t>AFTER THE SESSION:</a:t>
             </a:r>
           </a:p>
           <a:p>
             <a:r>
-              <a:rPr lang="en-GB"/>
-              <a:t>Each submission reaches you in the facilitator dashboard. The personal reflections go to each participant’s Learning Portfolio; the group’s confirmed record feeds the team’s Capstone Blueprint.</a:t>
+              <a:rPr lang="en-GB" dirty="0"/>
+              <a:t>Each submission reaches you in the facilitator dashboard. The personal reflections go to each participant’s Learning Portfolio; the group’s agreed record feeds the team’s Capstone S2R® Blueprint.</a:t>
             </a:r>
           </a:p>
         </p:txBody>
@@ -2995,221 +3936,213 @@
           <a:lstStyle/>
           <a:p>
             <a:r>
-              <a:rPr lang="en-GB"/>
-              <a:t>5.3 — ACTIVITY 3: WARD · YOUR KEY RESULT’S VITAL CHECK-UP (CAPSTONE WORK)</a:t>
-            </a:r>
-          </a:p>
-          <a:p>
-            <a:endParaRPr lang="en-GB"/>
-          </a:p>
-          <a:p>
-            <a:r>
-              <a:rPr lang="en-GB"/>
+              <a:rPr lang="en-GB" dirty="0"/>
+              <a:t>5.4 — ACTIVITY 4: WARD · YOUR KEY RESULT’S VITAL CHECK-UP (CAPSTONE WORK)</a:t>
+            </a:r>
+          </a:p>
+          <a:p/>
+          <a:p>
+            <a:r>
+              <a:rPr lang="en-GB" dirty="0"/>
               <a:t>HOW TO TEACH IT:</a:t>
             </a:r>
           </a:p>
-          <a:p>
-            <a:endParaRPr lang="en-GB"/>
-          </a:p>
-          <a:p>
-            <a:r>
-              <a:rPr lang="en-GB"/>
+          <a:p/>
+          <a:p>
+            <a:r>
+              <a:rPr lang="en-GB" dirty="0"/>
               <a:t>1. Open with the check-up.</a:t>
             </a:r>
           </a:p>
           <a:p>
             <a:r>
-              <a:rPr lang="en-GB"/>
+              <a:rPr lang="en-GB" dirty="0"/>
               <a:t>Say: "Every Key Result your group set in Unit 3 has a baseline, a target and a deadline. Performance management must set out in advance when a Key Result will be checked and which result raises a red flag. Corrective action then starts early, while the gap is still small enough to close. WARD is the vital check-up that sets these points for your Key Result."</a:t>
             </a:r>
           </a:p>
-          <a:p>
-            <a:endParaRPr lang="en-GB"/>
-          </a:p>
-          <a:p>
-            <a:r>
-              <a:rPr lang="en-GB"/>
+          <a:p/>
+          <a:p>
+            <a:r>
+              <a:rPr lang="en-GB" dirty="0"/>
               <a:t>2. Teach the four letters.</a:t>
             </a:r>
           </a:p>
           <a:p>
             <a:r>
-              <a:rPr lang="en-GB"/>
+              <a:rPr lang="en-GB" dirty="0"/>
               <a:t>W · Waypoints: The dates on which the Key Result is checked, and the level it must have reached by each.</a:t>
             </a:r>
           </a:p>
           <a:p>
             <a:r>
-              <a:rPr lang="en-GB"/>
+              <a:rPr lang="en-GB" dirty="0"/>
               <a:t>A · Alert: How far off a waypoint the result can be before it raises a red flag.</a:t>
             </a:r>
           </a:p>
           <a:p>
             <a:r>
-              <a:rPr lang="en-GB"/>
+              <a:rPr lang="en-GB" dirty="0"/>
               <a:t>R · Recovery: The corrective action that follows a red flag, for the individuals and for the organisational conditions.</a:t>
             </a:r>
           </a:p>
           <a:p>
             <a:r>
-              <a:rPr lang="en-GB"/>
+              <a:rPr lang="en-GB" dirty="0"/>
               <a:t>D · Decider: The executive who decides on the recovery and sees it through.</a:t>
             </a:r>
           </a:p>
-          <a:p>
-            <a:endParaRPr lang="en-GB"/>
-          </a:p>
-          <a:p>
-            <a:r>
-              <a:rPr lang="en-GB"/>
+          <a:p/>
+          <a:p>
+            <a:r>
+              <a:rPr lang="en-GB" dirty="0"/>
               <a:t>3. Take the worked example through WARD.</a:t>
             </a:r>
           </a:p>
           <a:p>
             <a:r>
-              <a:rPr lang="en-GB"/>
+              <a:rPr lang="en-GB" dirty="0"/>
               <a:t>Enterprise Key Result from part 4.1: Increase customer enquiries resolved within 48 hours from 65% to 90% by year-end.</a:t>
             </a:r>
           </a:p>
           <a:p>
             <a:r>
-              <a:rPr lang="en-GB"/>
+              <a:rPr lang="en-GB" dirty="0"/>
               <a:t>W · Waypoints: 72% by the end of March, 80% by the end of June and 85% by the end of September, on the way to 90% at year-end.</a:t>
             </a:r>
           </a:p>
           <a:p>
             <a:r>
-              <a:rPr lang="en-GB"/>
+              <a:rPr lang="en-GB" dirty="0"/>
               <a:t>A · Alert: More than three percentage points below a waypoint at a monthly review.</a:t>
             </a:r>
           </a:p>
           <a:p>
             <a:r>
-              <a:rPr lang="en-GB"/>
+              <a:rPr lang="en-GB" dirty="0"/>
               <a:t>R · Recovery · individuals: Team leaders review every open enquiry with its owner each morning, and agents with repeated follow-through gaps are coached.</a:t>
             </a:r>
           </a:p>
           <a:p>
             <a:r>
-              <a:rPr lang="en-GB"/>
+              <a:rPr lang="en-GB" dirty="0"/>
               <a:t>R · Recovery · organisational conditions: The owner of the condition named in the Contribution Map restores it: IT for system availability, Workforce Planning for staffing coverage, Operations for approval delays.</a:t>
             </a:r>
           </a:p>
           <a:p>
             <a:r>
-              <a:rPr lang="en-GB"/>
+              <a:rPr lang="en-GB" dirty="0"/>
               <a:t>D · Decider: The Customer Service Executive.</a:t>
             </a:r>
           </a:p>
           <a:p>
             <a:r>
-              <a:rPr lang="en-GB"/>
+              <a:rPr lang="en-GB" dirty="0"/>
               <a:t>Ask: "At the end of June the result is 74%. What happens on Monday morning, and who decides?"</a:t>
             </a:r>
           </a:p>
           <a:p>
             <a:r>
-              <a:rPr lang="en-GB"/>
+              <a:rPr lang="en-GB" dirty="0"/>
               <a:t>Guide the groups to see that the waypoint, the alert and the recovery answer the question before the review takes place.</a:t>
             </a:r>
           </a:p>
-          <a:p>
-            <a:endParaRPr lang="en-GB"/>
-          </a:p>
-          <a:p>
-            <a:r>
-              <a:rPr lang="en-GB"/>
+          <a:p/>
+          <a:p>
+            <a:r>
+              <a:rPr lang="en-GB" dirty="0"/>
               <a:t>4. Read the completion check.</a:t>
             </a:r>
           </a:p>
           <a:p>
             <a:r>
-              <a:rPr lang="en-GB"/>
+              <a:rPr lang="en-GB" dirty="0"/>
               <a:t>1. Each waypoint has a date and a level, and the waypoints lead to the target by the deadline.</a:t>
             </a:r>
           </a:p>
           <a:p>
             <a:r>
-              <a:rPr lang="en-GB"/>
+              <a:rPr lang="en-GB" dirty="0"/>
               <a:t>2. The alert is specific enough that every member reads the same result the same way.</a:t>
             </a:r>
           </a:p>
           <a:p>
             <a:r>
-              <a:rPr lang="en-GB"/>
+              <a:rPr lang="en-GB" dirty="0"/>
               <a:t>3. The recovery covers the individuals and the organisational conditions named in the Contribution Map.</a:t>
             </a:r>
           </a:p>
           <a:p>
             <a:r>
-              <a:rPr lang="en-GB"/>
+              <a:rPr lang="en-GB" dirty="0"/>
               <a:t>4. One executive is named as the decider.</a:t>
             </a:r>
           </a:p>
           <a:p>
             <a:r>
-              <a:rPr lang="en-GB"/>
+              <a:rPr lang="en-GB" dirty="0"/>
               <a:t>Say: "In Unit 8 your group tests its WARD: the alert fires, and you run the recovery."</a:t>
             </a:r>
           </a:p>
-          <a:p>
-            <a:endParaRPr lang="en-GB"/>
-          </a:p>
-          <a:p>
-            <a:r>
-              <a:rPr lang="en-GB"/>
+          <a:p/>
+          <a:p>
+            <a:r>
+              <a:rPr lang="en-GB" dirty="0"/>
               <a:t>ON THE PORTAL, AFTER THE TEACHING:</a:t>
             </a:r>
           </a:p>
           <a:p>
             <a:r>
-              <a:rPr lang="en-GB"/>
-              <a:t>Participants work as a group in Activity 3 of Section 5 of the participant file. This is Capstone work. The group chooses its scribe for this work. The scribe types what the group agrees, and the entries appear on every member’s page.</a:t>
-            </a:r>
-          </a:p>
-          <a:p>
-            <a:r>
-              <a:rPr lang="en-GB"/>
+              <a:rPr lang="en-GB" dirty="0"/>
+              <a:t>Participants work as a group in Activity 4 of Section 5 of the participant file. This is Capstone work. The group chooses its scribe for this work. The scribe types what the group agrees, and the entries appear on every member’s page.</a:t>
+            </a:r>
+          </a:p>
+          <a:p>
+            <a:r>
+              <a:rPr lang="en-GB" dirty="0"/>
               <a:t>1. The group sets two or three waypoints for its enterprise Key Result: a date and a level for each.</a:t>
             </a:r>
           </a:p>
           <a:p>
             <a:r>
-              <a:rPr lang="en-GB"/>
+              <a:rPr lang="en-GB" dirty="0"/>
               <a:t>2. The group sets the alert, the recovery for the individuals and for the organisational conditions, and the decider.</a:t>
             </a:r>
           </a:p>
           <a:p>
             <a:r>
-              <a:rPr lang="en-GB"/>
+              <a:rPr lang="en-GB" dirty="0"/>
               <a:t>3. The group reads the completion check.</a:t>
             </a:r>
           </a:p>
           <a:p>
             <a:r>
-              <a:rPr lang="en-GB"/>
+              <a:rPr lang="en-GB" dirty="0"/>
               <a:t>4. Each participant reads the record and selects Agree. Print gives a copy.</a:t>
             </a:r>
           </a:p>
           <a:p>
             <a:r>
-              <a:rPr lang="en-GB"/>
-              <a:t>The agreed record feeds the team’s Capstone Blueprint.</a:t>
-            </a:r>
-          </a:p>
-          <a:p>
-            <a:endParaRPr lang="en-GB"/>
-          </a:p>
-          <a:p>
-            <a:r>
-              <a:rPr lang="en-GB"/>
-              <a:t>AFTER THE SESSION:</a:t>
-            </a:r>
-          </a:p>
-          <a:p>
-            <a:r>
-              <a:rPr lang="en-GB"/>
-              <a:t>The record reaches you with each participant’s submission, under the heading of Section 5. The agreed record feeds the Unit 6 boxes of the team’s Capstone Blueprint: the Contribution Map in 6A, the FACES application in 6B and the WARD check-up in 6C.</a:t>
+              <a:rPr lang="en-GB" dirty="0"/>
+              <a:t>Close the group work with Our Position. Say: "When your record is complete, write as a group a short summary statement of your team's position from this unit, in the unit's own terms. Every member agrees it with the rest of the record. It closes this unit's section of your Capstone S2R Blueprint and guides the assessors through your work."</a:t>
+            </a:r>
+          </a:p>
+          <a:p>
+            <a:r>
+              <a:rPr lang="en-GB" dirty="0"/>
+              <a:t>The agreed record feeds the team’s Capstone S2R® Blueprint.</a:t>
+            </a:r>
+          </a:p>
+          <a:p/>
+          <a:p>
+            <a:r>
+              <a:rPr lang="en-GB" dirty="0" b="1"/>
+              <a:t>WHERE THE RECORD GOES:</a:t>
+            </a:r>
+          </a:p>
+          <a:p>
+            <a:r>
+              <a:rPr lang="en-GB" dirty="0"/>
+              <a:t>The agreed record feeds the Unit 6 boxes of the team’s Capstone S2R® Blueprint: the Contribution Map in 6A, the FACES application in 6B, the CEO Performance Scorecard in 6C and the WARD check-up in 6D. The external panel assesses the Blueprint.</a:t>
             </a:r>
           </a:p>
         </p:txBody>
@@ -3290,83 +4223,78 @@
           <a:lstStyle/>
           <a:p>
             <a:r>
-              <a:rPr lang="en-GB" b="1" dirty="0"/>
+              <a:rPr lang="en-GB" dirty="0" b="1"/>
               <a:t>THE UNIT JOURNEY</a:t>
             </a:r>
           </a:p>
-          <a:p>
-            <a:endParaRPr lang="en-GB" dirty="0"/>
-          </a:p>
-          <a:p>
-            <a:r>
-              <a:rPr lang="en-GB" b="1" dirty="0"/>
+          <a:p/>
+          <a:p>
+            <a:r>
+              <a:rPr lang="en-GB" dirty="0" b="1"/>
               <a:t>HOW TO USE THIS SLIDE:</a:t>
             </a:r>
           </a:p>
-          <a:p>
-            <a:endParaRPr lang="en-GB" dirty="0"/>
-          </a:p>
-          <a:p>
-            <a:r>
-              <a:rPr lang="en-GB" b="1" dirty="0"/>
-              <a:t>1. Walk the five sections.</a:t>
-            </a:r>
-          </a:p>
-          <a:p>
-            <a:r>
-              <a:rPr lang="en-GB" dirty="0"/>
-              <a:t>Section 1 · Awareness: measurement and management, people performance and organisational performance, the S2R® Contribution Map™ and FACES.</a:t>
-            </a:r>
-          </a:p>
-          <a:p>
-            <a:r>
-              <a:rPr lang="en-GB" dirty="0"/>
-              <a:t>Section 2 · Intelligence: performance management as the execution bridge, and compliance and commitment architecture.</a:t>
-            </a:r>
-          </a:p>
-          <a:p>
-            <a:r>
-              <a:rPr lang="en-GB" dirty="0"/>
-              <a:t>Section 3 · Extrapolating: executive performance perspectives and the continuous performance management shift.</a:t>
-            </a:r>
-          </a:p>
-          <a:p>
-            <a:r>
-              <a:rPr lang="en-GB" dirty="0"/>
-              <a:t>Section 4 · Integration: one worked example that maps the contributions to an enterprise Key Result and manages them through FACES.</a:t>
-            </a:r>
-          </a:p>
-          <a:p>
-            <a:r>
-              <a:rPr lang="en-GB" dirty="0"/>
-              <a:t>Section 5 · Application: each group builds its own Contribution Map and FACES application, as Capstone work.</a:t>
-            </a:r>
-          </a:p>
-          <a:p>
-            <a:endParaRPr lang="en-GB" dirty="0"/>
-          </a:p>
-          <a:p>
-            <a:r>
-              <a:rPr lang="en-GB" b="1" dirty="0"/>
-              <a:t>2. Name the questions the unit keeps asking.</a:t>
-            </a:r>
-          </a:p>
-          <a:p>
-            <a:r>
-              <a:rPr lang="en-GB" dirty="0"/>
-              <a:t>"If your organisation stopped producing its performance reports tomorrow, which decisions would leaders no longer be able to make?"</a:t>
-            </a:r>
-          </a:p>
-          <a:p>
-            <a:r>
-              <a:rPr lang="en-GB" dirty="0"/>
-              <a:t>"When a target is missed, how do you distinguish an individual contribution problem from an organisational delivery problem?"</a:t>
-            </a:r>
-          </a:p>
-          <a:p>
-            <a:r>
-              <a:rPr lang="en-GB" dirty="0"/>
-              <a:t>"If employees are meeting their performance commitments but system outages continue to delay customer resolution, who must take responsibility for the performance gap?"</a:t>
+          <a:p/>
+          <a:p>
+            <a:r>
+              <a:rPr lang="en-GB" dirty="0" b="1"/>
+              <a:t>1. Walk the five sections, one sentence each.</a:t>
+            </a:r>
+          </a:p>
+          <a:p>
+            <a:r>
+              <a:rPr lang="en-GB" dirty="0"/>
+              <a:t>Section 1 · Awareness — What: what performance management must manage. The contribution of people and the conditions the organisation provides, connected to enterprise results through the S2R® Contribution Map™ and managed through FACES.</a:t>
+            </a:r>
+          </a:p>
+          <a:p>
+            <a:r>
+              <a:rPr lang="en-GB" dirty="0"/>
+              <a:t>Section 2 · Intelligence — Why: why enterprise performance depends on connecting strategic outcomes, human contributions and organisational operating capability. The four execution bridges, compliance and commitment architecture, and the performance scorecard that carries it to the individual.</a:t>
+            </a:r>
+          </a:p>
+          <a:p>
+            <a:r>
+              <a:rPr lang="en-GB" dirty="0"/>
+              <a:t>Section 3 · Extrapolating — Where: where enterprise performance management becomes vulnerable. How executive performance perspectives and the evolution of performance management practice shape what leaders see and how they respond.</a:t>
+            </a:r>
+          </a:p>
+          <a:p>
+            <a:r>
+              <a:rPr lang="en-GB" dirty="0"/>
+              <a:t>Section 4 · Integration — Collective: one worked example brings the unit together. The contributions an enterprise Key Result requires, mapped across four functions, and how FACES manages them.</a:t>
+            </a:r>
+          </a:p>
+          <a:p>
+            <a:r>
+              <a:rPr lang="en-GB" dirty="0"/>
+              <a:t>Section 5 · Application — In Practice: each group builds four connected components of its Enterprise Performance Management System for the strategy in its Capstone S2R® Blueprint: the Contribution Map, the FACES application, the CEO Performance Scorecard and the WARD check-up for its enterprise Key Result.</a:t>
+            </a:r>
+          </a:p>
+          <a:p/>
+          <a:p>
+            <a:r>
+              <a:rPr lang="en-GB" dirty="0" b="1"/>
+              <a:t>2. Say how the sections connect.</a:t>
+            </a:r>
+          </a:p>
+          <a:p>
+            <a:r>
+              <a:rPr lang="en-GB" dirty="0"/>
+              <a:t>Say: "Sections 1 to 4 build the thinking, and one example runs through all of them: a customer service department that must raise enquiries resolved within 48 hours from 65% to 90% by year-end. Section 5 is where your group applies the same thinking to its own strategy."</a:t>
+            </a:r>
+          </a:p>
+          <a:p/>
+          <a:p>
+            <a:r>
+              <a:rPr lang="en-GB" dirty="0" b="1"/>
+              <a:t>3. Bridge to Section 1.</a:t>
+            </a:r>
+          </a:p>
+          <a:p>
+            <a:r>
+              <a:rPr lang="en-GB" dirty="0"/>
+              <a:t>Say: "We start with what performance management must manage."</a:t>
             </a:r>
           </a:p>
         </p:txBody>
@@ -3452,95 +4380,122 @@
           <a:lstStyle/>
           <a:p>
             <a:r>
-              <a:rPr lang="en-GB" b="1" dirty="0"/>
+              <a:rPr lang="en-GB" dirty="0" b="1"/>
               <a:t>1.2 — THE ORGANISATIONAL OPERATING SYSTEM · ESRG</a:t>
             </a:r>
           </a:p>
-          <a:p>
-            <a:endParaRPr lang="en-GB" dirty="0"/>
-          </a:p>
-          <a:p>
-            <a:r>
-              <a:rPr lang="en-GB" b="1" dirty="0"/>
+          <a:p/>
+          <a:p>
+            <a:r>
+              <a:rPr lang="en-GB" dirty="0" b="1"/>
               <a:t>HOW TO TEACH IT:</a:t>
             </a:r>
           </a:p>
-          <a:p>
-            <a:endParaRPr lang="en-GB" dirty="0"/>
-          </a:p>
-          <a:p>
-            <a:r>
-              <a:rPr lang="en-GB" b="1" dirty="0"/>
-              <a:t>1. Teach the four elements, one row at a time.</a:t>
-            </a:r>
-          </a:p>
-          <a:p>
-            <a:r>
-              <a:rPr lang="en-GB" dirty="0"/>
-              <a:t>E · Environment. Say: "The conditions within which people and organisational processes operate. These include the working environment, organisational climate, cross-functional relationships and external operating conditions that influence delivery."</a:t>
-            </a:r>
-          </a:p>
-          <a:p>
-            <a:r>
-              <a:rPr lang="en-GB" dirty="0"/>
-              <a:t>Example: a customer service team may have clear targets, but persistent conflict between departments prevents timely resolution of customer enquiries.</a:t>
-            </a:r>
-          </a:p>
-          <a:p>
-            <a:r>
-              <a:rPr lang="en-GB" dirty="0"/>
-              <a:t>Performance management consideration: Are the operating conditions supporting or obstructing the achievement of expected results?</a:t>
-            </a:r>
-          </a:p>
-          <a:p>
-            <a:endParaRPr lang="en-GB" dirty="0"/>
-          </a:p>
-          <a:p>
-            <a:r>
-              <a:rPr lang="en-GB" dirty="0"/>
-              <a:t>S · Systems. Say: "The processes, workflows, technologies and operating mechanisms through which work is performed. Systems determine how efficiently and reliably the organisation converts effort and resources into outputs."</a:t>
-            </a:r>
-          </a:p>
-          <a:p>
-            <a:r>
-              <a:rPr lang="en-GB" dirty="0"/>
-              <a:t>Example: employees may be expected to process 100 applications daily, but an unreliable processing system limits actual throughput to 60 applications.</a:t>
-            </a:r>
-          </a:p>
-          <a:p>
-            <a:r>
-              <a:rPr lang="en-GB" dirty="0"/>
-              <a:t>Performance management consideration: Are the systems and processes capable of supporting the required performance standards?</a:t>
-            </a:r>
-          </a:p>
-          <a:p>
-            <a:endParaRPr lang="en-GB" dirty="0"/>
-          </a:p>
-          <a:p>
-            <a:r>
-              <a:rPr lang="en-GB" dirty="0"/>
-              <a:t>R · Resources. Say: "The people, skills, capacity, funding, equipment, information and other resources required to deliver results. Resource adequacy must be evaluated against the level of performance the organisation expects."</a:t>
-            </a:r>
-          </a:p>
-          <a:p>
-            <a:r>
-              <a:rPr lang="en-GB" dirty="0"/>
-              <a:t>Example: a department may be required to double its service output while operating with the same capacity and equipment.</a:t>
-            </a:r>
-          </a:p>
-          <a:p>
-            <a:r>
-              <a:rPr lang="en-GB" dirty="0"/>
-              <a:t>Performance management consideration: Does the organisation have sufficient and appropriately deployed resources to achieve its targets?</a:t>
-            </a:r>
-          </a:p>
-          <a:p>
-            <a:endParaRPr lang="en-GB" dirty="0"/>
-          </a:p>
-          <a:p>
-            <a:r>
-              <a:rPr lang="en-GB" dirty="0"/>
-              <a:t>G · Governance. Say: "The decision rights, accountability arrangements, policies, controls and escalation mechanisms that guide organisational execution. Governance determines whether decisions can be made at the appropriate level and whether constraints can be resolved in time."</a:t>
+          <a:p/>
+          <a:p>
+            <a:r>
+              <a:rPr lang="en-GB" dirty="0" b="1"/>
+              <a:t>1. Frame the four domains.</a:t>
+            </a:r>
+          </a:p>
+          <a:p>
+            <a:r>
+              <a:rPr lang="en-GB" dirty="0"/>
+              <a:t>Say: "Within S2R®, the organisational conditions are examined through ESRG: Environment, Systems, Resources and Governance. Each domain has three components. ESRG gives the structure for evaluating whether the organisation has the operating capability its strategic ambition requires."</a:t>
+            </a:r>
+          </a:p>
+          <a:p>
+            <a:r>
+              <a:rPr lang="en-GB" dirty="0"/>
+              <a:t>Say: "The capacity, capability and behaviour of people sit in the Human Operating System. ESRG covers what the organisation provides for them."</a:t>
+            </a:r>
+          </a:p>
+          <a:p/>
+          <a:p>
+            <a:r>
+              <a:rPr lang="en-GB" dirty="0" b="1"/>
+              <a:t>2. Teach Environment · FIT.</a:t>
+            </a:r>
+          </a:p>
+          <a:p>
+            <a:r>
+              <a:rPr lang="en-GB" dirty="0"/>
+              <a:t>Say: "Environment covers Facilities, Infrastructure and Technology: the physical and technological setting in which the work takes place. Facilities suited to the planned activity, infrastructure that reliably carries operational demand, and technology that is available and fit for the required work."</a:t>
+            </a:r>
+          </a:p>
+          <a:p>
+            <a:r>
+              <a:rPr lang="en-GB" dirty="0"/>
+              <a:t>Example: a customer service team has clear targets, but repeated outages of the customer management system leave enquiries unresolved.</a:t>
+            </a:r>
+          </a:p>
+          <a:p>
+            <a:r>
+              <a:rPr lang="en-GB" dirty="0"/>
+              <a:t>Say: "The performance management question is: are the facilities, infrastructure and technology supporting or obstructing the achievement of expected results?"</a:t>
+            </a:r>
+          </a:p>
+          <a:p/>
+          <a:p>
+            <a:r>
+              <a:rPr lang="en-GB" dirty="0" b="1"/>
+              <a:t>3. Teach Systems · SIP.</a:t>
+            </a:r>
+          </a:p>
+          <a:p>
+            <a:r>
+              <a:rPr lang="en-GB" dirty="0"/>
+              <a:t>Say: "Systems covers Standardisation, Integration and Process Efficiency: how work is defined, connected and performed across the organisation. Processes clearly defined and consistently applied, handovers that connect across functions, and process design that delivers the required output without unnecessary steps, delay or duplication."</a:t>
+            </a:r>
+          </a:p>
+          <a:p>
+            <a:r>
+              <a:rPr lang="en-GB" dirty="0"/>
+              <a:t>Example: employees may be expected to process 100 applications daily, but disconnected handovers between departments limit actual throughput to 60 applications.</a:t>
+            </a:r>
+          </a:p>
+          <a:p>
+            <a:r>
+              <a:rPr lang="en-GB" dirty="0"/>
+              <a:t>Say: "The question is: are the systems and processes capable of supporting the required performance standards?"</a:t>
+            </a:r>
+          </a:p>
+          <a:p/>
+          <a:p>
+            <a:r>
+              <a:rPr lang="en-GB" dirty="0" b="1"/>
+              <a:t>4. Teach Resources · AIR.</a:t>
+            </a:r>
+          </a:p>
+          <a:p>
+            <a:r>
+              <a:rPr lang="en-GB" dirty="0"/>
+              <a:t>Say: "Resources covers Asset Availability, Investment and Resource Utilisation: the productive assets and funding required to deliver results, and how productively they are deployed against priorities. Resource adequacy must be evaluated against the level of performance the organisation expects."</a:t>
+            </a:r>
+          </a:p>
+          <a:p>
+            <a:r>
+              <a:rPr lang="en-GB" dirty="0"/>
+              <a:t>Example: a department may be required to double its service output with the same equipment and no additional budget.</a:t>
+            </a:r>
+          </a:p>
+          <a:p>
+            <a:r>
+              <a:rPr lang="en-GB" dirty="0"/>
+              <a:t>Say: "The question is: does the organisation have sufficient and appropriately deployed assets and funding to achieve its targets?"</a:t>
+            </a:r>
+          </a:p>
+          <a:p/>
+          <a:p>
+            <a:r>
+              <a:rPr lang="en-GB" dirty="0" b="1"/>
+              <a:t>5. Teach Governance · PAR.</a:t>
+            </a:r>
+          </a:p>
+          <a:p>
+            <a:r>
+              <a:rPr lang="en-GB" dirty="0"/>
+              <a:t>Say: "Governance covers Policies and Procedures, Authority and Risk Management: the arrangements that guide organisational execution. Governance determines whether decisions can be made at the appropriate level and time, and whether risks to delivery are identified and managed."</a:t>
             </a:r>
           </a:p>
           <a:p>
@@ -3552,22 +4507,33 @@
           <a:p>
             <a:r>
               <a:rPr lang="en-GB" dirty="0"/>
-              <a:t>Performance management consideration: Do governance arrangements enable timely decisions, clear accountability and effective resolution of performance constraints?</a:t>
-            </a:r>
-          </a:p>
-          <a:p>
-            <a:endParaRPr lang="en-GB" dirty="0"/>
-          </a:p>
-          <a:p>
-            <a:r>
-              <a:rPr lang="en-GB" b="1" dirty="0"/>
-              <a:t>2. Close the slide.</a:t>
-            </a:r>
-          </a:p>
-          <a:p>
-            <a:r>
-              <a:rPr lang="en-GB" dirty="0"/>
-              <a:t>The Organisational Operating System answers: "Does the organisation have the environment, systems, resources and governance necessary to deliver its expected results consistently?"</a:t>
+              <a:t>Say: "The question is: do governance arrangements enable timely decisions, clear accountability and effective resolution of performance constraints?"</a:t>
+            </a:r>
+          </a:p>
+          <a:p/>
+          <a:p>
+            <a:r>
+              <a:rPr lang="en-GB" dirty="0" b="1"/>
+              <a:t>6. Close the slide.</a:t>
+            </a:r>
+          </a:p>
+          <a:p>
+            <a:r>
+              <a:rPr lang="en-GB" dirty="0"/>
+              <a:t>Say: "The Organisational Operating System answers one question: does the organisation have the environment, systems, resources and governance necessary to deliver its expected results consistently? Unit 10 teaches how to use ESRG to develop the organisational capability that grounds performance."</a:t>
+            </a:r>
+          </a:p>
+          <a:p/>
+          <a:p>
+            <a:r>
+              <a:rPr lang="en-GB" dirty="0" b="1"/>
+              <a:t>7. Bridge to how the two systems interact.</a:t>
+            </a:r>
+          </a:p>
+          <a:p>
+            <a:r>
+              <a:rPr lang="en-GB" dirty="0"/>
+              <a:t>Say: "We now put the two operating systems side by side on one missed target."</a:t>
             </a:r>
           </a:p>
         </p:txBody>
@@ -3648,25 +4614,21 @@
           <a:lstStyle/>
           <a:p>
             <a:r>
-              <a:rPr lang="en-GB" b="1" dirty="0"/>
+              <a:rPr lang="en-GB" dirty="0" b="1"/>
               <a:t>1.2 — HOW THE TWO OPERATING SYSTEMS INTERACT</a:t>
             </a:r>
           </a:p>
-          <a:p>
-            <a:endParaRPr lang="en-GB" dirty="0"/>
-          </a:p>
-          <a:p>
-            <a:r>
-              <a:rPr lang="en-GB" b="1" dirty="0"/>
+          <a:p/>
+          <a:p>
+            <a:r>
+              <a:rPr lang="en-GB" dirty="0" b="1"/>
               <a:t>HOW TO TEACH IT:</a:t>
             </a:r>
           </a:p>
-          <a:p>
-            <a:endParaRPr lang="en-GB" dirty="0"/>
-          </a:p>
-          <a:p>
-            <a:r>
-              <a:rPr lang="en-GB" b="1" dirty="0"/>
+          <a:p/>
+          <a:p>
+            <a:r>
+              <a:rPr lang="en-GB" dirty="0" b="1"/>
               <a:t>1. Teach the interdependence.</a:t>
             </a:r>
           </a:p>
@@ -3676,12 +4638,10 @@
               <a:t>Say: "The two systems are interdependent. Human performance measures what individuals and teams contribute. Organisational performance examines whether ESRG provides the conditions required for those contributions to produce enterprise results."</a:t>
             </a:r>
           </a:p>
-          <a:p>
-            <a:endParaRPr lang="en-GB" dirty="0"/>
-          </a:p>
-          <a:p>
-            <a:r>
-              <a:rPr lang="en-GB" b="1" dirty="0"/>
+          <a:p/>
+          <a:p>
+            <a:r>
+              <a:rPr lang="en-GB" dirty="0" b="1"/>
               <a:t>2. Use the customer service example.</a:t>
             </a:r>
           </a:p>
@@ -3700,7 +4660,7 @@
           <a:p>
             <a:r>
               <a:rPr lang="en-GB" dirty="0"/>
-              <a:t>Are employees meeting their individual resolution targets? | Environment: Are cross-functional working conditions supporting timely resolution?</a:t>
+              <a:t>Are employees meeting their individual resolution targets? | Environment: Are the facilities, infrastructure and technology the team relies on available and reliable?</a:t>
             </a:r>
           </a:p>
           <a:p>
@@ -3712,7 +4672,7 @@
           <a:p>
             <a:r>
               <a:rPr lang="en-GB" dirty="0"/>
-              <a:t>Are employees demonstrating accountability and responsiveness? | Resources: Is staffing capacity sufficient for the volume of enquiries?</a:t>
+              <a:t>Are employees demonstrating accountability and responsiveness? | Resources: Are the equipment and funding sufficient for the volume of enquiries?</a:t>
             </a:r>
           </a:p>
           <a:p>
@@ -3721,12 +4681,10 @@
               <a:t>Are team leaders meeting their supervisory commitments? | Governance: Are decisions and escalations being resolved within the required time?</a:t>
             </a:r>
           </a:p>
-          <a:p>
-            <a:endParaRPr lang="en-GB" dirty="0"/>
-          </a:p>
-          <a:p>
-            <a:r>
-              <a:rPr lang="en-GB" b="1" dirty="0"/>
+          <a:p/>
+          <a:p>
+            <a:r>
+              <a:rPr lang="en-GB" dirty="0" b="1"/>
               <a:t>3. Show the two possible findings.</a:t>
             </a:r>
           </a:p>
@@ -3745,7 +4703,7 @@
           <a:p>
             <a:r>
               <a:rPr lang="en-GB" dirty="0"/>
-              <a:t>Use the customer service example to demonstrate that a missed target is evidence of a performance gap, but does not automatically establish its cause.</a:t>
+              <a:t>Use the customer service example to demonstrate that a missed target is evidence of a performance gap, but does not by itself establish its cause.</a:t>
             </a:r>
           </a:p>
           <a:p>
@@ -3754,12 +4712,10 @@
               <a:t>Emphasise that leaders must examine both the contribution expected from people and the ESRG conditions required to enable delivery.</a:t>
             </a:r>
           </a:p>
-          <a:p>
-            <a:endParaRPr lang="en-GB" dirty="0"/>
-          </a:p>
-          <a:p>
-            <a:r>
-              <a:rPr lang="en-GB" b="1" dirty="0"/>
+          <a:p/>
+          <a:p>
+            <a:r>
+              <a:rPr lang="en-GB" dirty="0" b="1"/>
               <a:t>4. Teach the Enterprise Performance Principle.</a:t>
             </a:r>
           </a:p>
@@ -3781,12 +4737,10 @@
               <a:t>The central teaching point is that performance accountability must extend to those responsible for organisational operating conditions as well as those responsible for individual and team targets.</a:t>
             </a:r>
           </a:p>
-          <a:p>
-            <a:endParaRPr lang="en-GB" dirty="0"/>
-          </a:p>
-          <a:p>
-            <a:r>
-              <a:rPr lang="en-GB" b="1" dirty="0"/>
+          <a:p/>
+          <a:p>
+            <a:r>
+              <a:rPr lang="en-GB" dirty="0" b="1"/>
               <a:t>ON THE PORTAL, AFTER THE TEACHING:</a:t>
             </a:r>
           </a:p>
@@ -4953,25 +5907,21 @@
           <a:lstStyle/>
           <a:p>
             <a:r>
-              <a:rPr lang="en-GB" b="1" dirty="0"/>
+              <a:rPr lang="en-GB" dirty="0" b="1"/>
               <a:t>2.2.2 — ACCOUNTABILITY FOR PEOPLE PERFORMANCE AND ORGANISATIONAL PERFORMANCE</a:t>
             </a:r>
           </a:p>
-          <a:p>
-            <a:endParaRPr lang="en-GB" dirty="0"/>
-          </a:p>
-          <a:p>
-            <a:r>
-              <a:rPr lang="en-GB" b="1" dirty="0"/>
+          <a:p/>
+          <a:p>
+            <a:r>
+              <a:rPr lang="en-GB" dirty="0" b="1"/>
               <a:t>HOW TO TEACH IT:</a:t>
             </a:r>
           </a:p>
-          <a:p>
-            <a:endParaRPr lang="en-GB" dirty="0"/>
-          </a:p>
-          <a:p>
-            <a:r>
-              <a:rPr lang="en-GB" b="1" dirty="0"/>
+          <a:p/>
+          <a:p>
+            <a:r>
+              <a:rPr lang="en-GB" dirty="0" b="1"/>
               <a:t>1. Apply the distinction to both systems.</a:t>
             </a:r>
           </a:p>
@@ -4993,12 +5943,10 @@
               <a:t>Organisational performance. Say: "A compliance-driven approach may establish requirements for systems, resources, processes and governance, but concentrate primarily on whether prescribed arrangements have been followed. A commitment-driven approach also examines whether those arrangements are effective in supporting the intended results and whether emerging constraints are being addressed."</a:t>
             </a:r>
           </a:p>
-          <a:p>
-            <a:endParaRPr lang="en-GB" dirty="0"/>
-          </a:p>
-          <a:p>
-            <a:r>
-              <a:rPr lang="en-GB" b="1" dirty="0"/>
+          <a:p/>
+          <a:p>
+            <a:r>
+              <a:rPr lang="en-GB" dirty="0" b="1"/>
               <a:t>2. Show why it matters when performance falls short.</a:t>
             </a:r>
           </a:p>
@@ -5014,12 +5962,10 @@
               <a:t>Say: "Commitment strengthens accountability when employees remain responsible for their contributions and organisational leaders remain equally responsible for the enabling conditions within their authority."</a:t>
             </a:r>
           </a:p>
-          <a:p>
-            <a:endParaRPr lang="en-GB" dirty="0"/>
-          </a:p>
-          <a:p>
-            <a:r>
-              <a:rPr lang="en-GB" b="1" dirty="0"/>
+          <a:p/>
+          <a:p>
+            <a:r>
+              <a:rPr lang="en-GB" dirty="0" b="1"/>
               <a:t>3. Ask, now that the architectures are taught.</a:t>
             </a:r>
           </a:p>
@@ -5027,6 +5973,19 @@
             <a:r>
               <a:rPr lang="en-GB" dirty="0"/>
               <a:t>Ask: "When a target is missed in your organisation, which of the two architectures does the review conversation sound like?" Take two or three answers in the chat.</a:t>
+            </a:r>
+          </a:p>
+          <a:p/>
+          <a:p>
+            <a:r>
+              <a:rPr lang="en-GB" dirty="0" b="1"/>
+              <a:t>4. Bridge to 2.3.</a:t>
+            </a:r>
+          </a:p>
+          <a:p>
+            <a:r>
+              <a:rPr lang="en-GB" dirty="0"/>
+              <a:t>Say: "Commitment needs measures each person can see. The performance scorecard is where the connection between enterprise results and the people who deliver them reaches the individual."</a:t>
             </a:r>
           </a:p>
         </p:txBody>
@@ -5522,25 +6481,21 @@
           <a:lstStyle/>
           <a:p>
             <a:r>
-              <a:rPr lang="en-GB" b="1" dirty="0"/>
+              <a:rPr lang="en-GB" dirty="0" b="1"/>
               <a:t>SECTION 3 REFLECTIONS</a:t>
             </a:r>
           </a:p>
-          <a:p>
-            <a:endParaRPr lang="en-GB" dirty="0"/>
-          </a:p>
-          <a:p>
-            <a:r>
-              <a:rPr lang="en-GB" b="1" dirty="0"/>
+          <a:p/>
+          <a:p>
+            <a:r>
+              <a:rPr lang="en-GB" dirty="0" b="1"/>
               <a:t>HOW TO USE THIS SLIDE:</a:t>
             </a:r>
           </a:p>
-          <a:p>
-            <a:endParaRPr lang="en-GB" dirty="0"/>
-          </a:p>
-          <a:p>
-            <a:r>
-              <a:rPr lang="en-GB" b="1" dirty="0"/>
+          <a:p/>
+          <a:p>
+            <a:r>
+              <a:rPr lang="en-GB" dirty="0" b="1"/>
               <a:t>1. Show the slide and read the prompt aloud.</a:t>
             </a:r>
           </a:p>
@@ -5550,42 +6505,49 @@
               <a:t>3.2 Reflection — Your Current PM System: "What is the current PM architecture of your organisation? Which PM system is currently being used?"</a:t>
             </a:r>
           </a:p>
-          <a:p>
-            <a:endParaRPr lang="en-GB" dirty="0"/>
-          </a:p>
-          <a:p>
-            <a:r>
-              <a:rPr lang="en-GB" b="1" dirty="0"/>
+          <a:p/>
+          <a:p>
+            <a:r>
+              <a:rPr lang="en-GB" dirty="0" b="1"/>
               <a:t>2. Say what the reflection is for.</a:t>
             </a:r>
           </a:p>
           <a:p>
             <a:r>
               <a:rPr lang="en-GB" dirty="0"/>
-              <a:t>Say: "Describe the architecture you actually have today, against the three shifts, and name the system your organisation uses."</a:t>
-            </a:r>
-          </a:p>
-          <a:p>
-            <a:endParaRPr lang="en-GB" dirty="0"/>
-          </a:p>
-          <a:p>
-            <a:r>
-              <a:rPr lang="en-GB" b="1" dirty="0"/>
-              <a:t>3. Bridge to Section 4.</a:t>
-            </a:r>
-          </a:p>
-          <a:p>
-            <a:r>
-              <a:rPr lang="en-GB" dirty="0"/>
-              <a:t>Say: "Section 4 brings the unit together in one worked example: the contributions an enterprise Key Result requires, and how FACES manages them."</a:t>
-            </a:r>
-          </a:p>
-          <a:p>
-            <a:endParaRPr lang="en-GB" dirty="0"/>
-          </a:p>
-          <a:p>
-            <a:r>
-              <a:rPr lang="en-GB" b="1" dirty="0"/>
+              <a:t>Say: "This reflection is personal. Describe the performance management architecture you actually have today, and name the system your organisation uses."</a:t>
+            </a:r>
+          </a:p>
+          <a:p/>
+          <a:p>
+            <a:r>
+              <a:rPr lang="en-GB" dirty="0" b="1"/>
+              <a:t>3. Set the standard.</a:t>
+            </a:r>
+          </a:p>
+          <a:p>
+            <a:r>
+              <a:rPr lang="en-GB" dirty="0"/>
+              <a:t>Say: "Read your architecture against the three shifts. How often is performance reviewed: once or twice a year, or throughout execution? Do review conversations centre on ratings, or on development and improvement? Are only individuals assessed, or are team and cross-functional contributions visible too? Then name the system or tool in use."</a:t>
+            </a:r>
+          </a:p>
+          <a:p/>
+          <a:p>
+            <a:r>
+              <a:rPr lang="en-GB" dirty="0" b="1"/>
+              <a:t>4. Close Section 3 and bridge to Section 4.</a:t>
+            </a:r>
+          </a:p>
+          <a:p>
+            <a:r>
+              <a:rPr lang="en-GB" dirty="0"/>
+              <a:t>Say: "Executive perspectives on performance converge when performance management becomes continuous, developmental and team-based. Section 4 brings the unit together in one worked example: the contributions a Key Result requires and how FACES manages them."</a:t>
+            </a:r>
+          </a:p>
+          <a:p/>
+          <a:p>
+            <a:r>
+              <a:rPr lang="en-GB" dirty="0" b="1"/>
               <a:t>ON THE PORTAL, AFTER THE TEACHING:</a:t>
             </a:r>
           </a:p>
@@ -5662,7 +6624,7 @@
           <a:lstStyle/>
           <a:p>
             <a:r>
-              <a:rPr lang="en-GB" b="1" dirty="0"/>
+              <a:rPr lang="en-GB" dirty="0" b="1"/>
               <a:t>SECTION 1 · AWARENESS — WHAT</a:t>
             </a:r>
           </a:p>
@@ -5672,19 +6634,48 @@
               <a:t>Foundations of Enterprise Performance Management System Design</a:t>
             </a:r>
           </a:p>
-          <a:p>
-            <a:r>
-              <a:rPr lang="en-GB" dirty="0"/>
-              <a:t>What performance management must manage: the contribution of people and the conditions the organisation provides, connected to enterprise results.</a:t>
-            </a:r>
-          </a:p>
-          <a:p>
-            <a:endParaRPr lang="en-GB" dirty="0"/>
-          </a:p>
-          <a:p>
-            <a:r>
-              <a:rPr lang="en-GB" b="1" dirty="0"/>
-              <a:t>Section learning outcomes:</a:t>
+          <a:p/>
+          <a:p>
+            <a:r>
+              <a:rPr lang="en-GB" dirty="0" b="1"/>
+              <a:t>HOW THIS SECTION RUNS:</a:t>
+            </a:r>
+          </a:p>
+          <a:p>
+            <a:r>
+              <a:rPr lang="en-GB" dirty="0"/>
+              <a:t>1. 1.1: measurement and management, then the design sequence (two slides).</a:t>
+            </a:r>
+          </a:p>
+          <a:p>
+            <a:r>
+              <a:rPr lang="en-GB" dirty="0"/>
+              <a:t>2. 1.2: the two operating systems behind enterprise performance: the Human Operating System, the Organisational Operating System through ESRG, and how the two interact (three slides).</a:t>
+            </a:r>
+          </a:p>
+          <a:p>
+            <a:r>
+              <a:rPr lang="en-GB" dirty="0"/>
+              <a:t>3. 1.3: the S2R® Contribution Map™ and how it connects people performance and organisational performance (two slides).</a:t>
+            </a:r>
+          </a:p>
+          <a:p>
+            <a:r>
+              <a:rPr lang="en-GB" dirty="0"/>
+              <a:t>4. 1.4: the FACES framework, FACES for people and organisational performance, and how FACES works when the enterprise result falls short (three slides).</a:t>
+            </a:r>
+          </a:p>
+          <a:p>
+            <a:r>
+              <a:rPr lang="en-GB" dirty="0"/>
+              <a:t>5. The Section 1 Reflections slide: the three reflections participants write after the teaching.</a:t>
+            </a:r>
+          </a:p>
+          <a:p/>
+          <a:p>
+            <a:r>
+              <a:rPr lang="en-GB" dirty="0" b="1"/>
+              <a:t>SECTION LEARNING OUTCOMES:</a:t>
             </a:r>
           </a:p>
           <a:p>
@@ -5699,28 +6690,50 @@
               <a:t>2. Manage human contributions and organisational conditions as interdependent drivers of results.</a:t>
             </a:r>
           </a:p>
-          <a:p>
-            <a:endParaRPr lang="en-GB" dirty="0"/>
-          </a:p>
-          <a:p>
-            <a:r>
-              <a:rPr lang="en-GB" b="1" dirty="0"/>
-              <a:t>HOW TO TEACH IT:</a:t>
-            </a:r>
-          </a:p>
-          <a:p>
-            <a:endParaRPr lang="en-GB" dirty="0"/>
-          </a:p>
-          <a:p>
-            <a:r>
-              <a:rPr lang="en-GB" b="1" dirty="0"/>
-              <a:t>1. Frame the section.</a:t>
-            </a:r>
-          </a:p>
-          <a:p>
-            <a:r>
-              <a:rPr lang="en-GB" dirty="0"/>
-              <a:t>Say: "This section sets the foundations: what performance management is, people performance and organisational performance behind enterprise performance, the S2R® Contribution Map™ that connects them to an enterprise result, and FACES, the five functions that manage them."</a:t>
+          <a:p/>
+          <a:p>
+            <a:r>
+              <a:rPr lang="en-GB" dirty="0" b="1"/>
+              <a:t>HOW TO OPEN THE SECTION:</a:t>
+            </a:r>
+          </a:p>
+          <a:p/>
+          <a:p>
+            <a:r>
+              <a:rPr lang="en-GB" dirty="0" b="1"/>
+              <a:t>1. Name the question the section answers.</a:t>
+            </a:r>
+          </a:p>
+          <a:p>
+            <a:r>
+              <a:rPr lang="en-GB" dirty="0"/>
+              <a:t>Say: "Section 1 answers one question: what must performance management manage? It must manage the contribution of people and the conditions the organisation provides, connected to enterprise results."</a:t>
+            </a:r>
+          </a:p>
+          <a:p/>
+          <a:p>
+            <a:r>
+              <a:rPr lang="en-GB" dirty="0" b="1"/>
+              <a:t>2. Say the order.</a:t>
+            </a:r>
+          </a:p>
+          <a:p>
+            <a:r>
+              <a:rPr lang="en-GB" dirty="0"/>
+              <a:t>Say: "We first separate measuring performance from managing it. We then name the two operating systems behind every result, connect them to an enterprise Key Result with the S2R® Contribution Map™, and close with FACES, the five functions that manage those contributions."</a:t>
+            </a:r>
+          </a:p>
+          <a:p/>
+          <a:p>
+            <a:r>
+              <a:rPr lang="en-GB" dirty="0" b="1"/>
+              <a:t>3. Bridge to 1.1.</a:t>
+            </a:r>
+          </a:p>
+          <a:p>
+            <a:r>
+              <a:rPr lang="en-GB" dirty="0"/>
+              <a:t>Say: "We start with the difference between measurement and management."</a:t>
             </a:r>
           </a:p>
         </p:txBody>
@@ -5806,25 +6819,21 @@
           <a:lstStyle/>
           <a:p>
             <a:r>
-              <a:rPr lang="en-GB" b="1" dirty="0"/>
+              <a:rPr lang="en-GB" dirty="0" b="1"/>
               <a:t>4.1 — MAPPING THE CONTRIBUTIONS REQUIRED FOR ENTERPRISE RESULTS (Worked example: improving customer service)</a:t>
             </a:r>
           </a:p>
-          <a:p>
-            <a:endParaRPr lang="en-GB" dirty="0"/>
-          </a:p>
-          <a:p>
-            <a:r>
-              <a:rPr lang="en-GB" b="1" dirty="0"/>
+          <a:p/>
+          <a:p>
+            <a:r>
+              <a:rPr lang="en-GB" dirty="0" b="1"/>
               <a:t>HOW TO TEACH IT:</a:t>
             </a:r>
           </a:p>
-          <a:p>
-            <a:endParaRPr lang="en-GB" dirty="0"/>
-          </a:p>
-          <a:p>
-            <a:r>
-              <a:rPr lang="en-GB" b="1" dirty="0"/>
+          <a:p/>
+          <a:p>
+            <a:r>
+              <a:rPr lang="en-GB" dirty="0" b="1"/>
               <a:t>1. Frame the worked example.</a:t>
             </a:r>
           </a:p>
@@ -5834,12 +6843,10 @@
               <a:t>Say: "The S2R® Contribution Map™ establishes the interconnected contributions required to achieve an enterprise result. It identifies what each function must deliver, the performance expected from individuals and teams, and the organisational conditions necessary to enable those contributions. The following example demonstrates how these requirements are connected across four business functions."</a:t>
             </a:r>
           </a:p>
-          <a:p>
-            <a:endParaRPr lang="en-GB" dirty="0"/>
-          </a:p>
-          <a:p>
-            <a:r>
-              <a:rPr lang="en-GB" b="1" dirty="0"/>
+          <a:p/>
+          <a:p>
+            <a:r>
+              <a:rPr lang="en-GB" dirty="0" b="1"/>
               <a:t>2. Establish the enterprise result.</a:t>
             </a:r>
           </a:p>
@@ -5861,12 +6868,10 @@
               <a:t>Ask: "Which functions must contribute to achieving this result?" Draw attention to Customer Service, IT, Operations and Workforce Planning.</a:t>
             </a:r>
           </a:p>
-          <a:p>
-            <a:endParaRPr lang="en-GB" dirty="0"/>
-          </a:p>
-          <a:p>
-            <a:r>
-              <a:rPr lang="en-GB" b="1" dirty="0"/>
+          <a:p/>
+          <a:p>
+            <a:r>
+              <a:rPr lang="en-GB" dirty="0" b="1"/>
               <a:t>3. Walk through the Contribution Map.</a:t>
             </a:r>
           </a:p>
@@ -5876,9 +6881,7 @@
               <a:t>Use Customer Service to demonstrate the distinction between the functional contribution, people performance and organisational enablement. Emphasise that the enterprise target covers all customer enquiries, while the employee resolution measure covers enquiries within employees’ control. Then examine the remaining functions, highlighting how their contributions support the same enterprise result.</a:t>
             </a:r>
           </a:p>
-          <a:p>
-            <a:endParaRPr lang="en-GB" dirty="0"/>
-          </a:p>
+          <a:p/>
           <a:p>
             <a:r>
               <a:rPr lang="en-GB" dirty="0"/>
@@ -5915,9 +6918,7 @@
               <a:t>Organisational conditions, measure or evidence of readiness: Systems: Enquiry records provide complete timestamps and assigned ownership. Governance: Documented escalation routes and named decision owners.</a:t>
             </a:r>
           </a:p>
-          <a:p>
-            <a:endParaRPr lang="en-GB" dirty="0"/>
-          </a:p>
+          <a:p/>
           <a:p>
             <a:r>
               <a:rPr lang="en-GB" dirty="0"/>
@@ -5945,18 +6946,16 @@
           <a:p>
             <a:r>
               <a:rPr lang="en-GB" dirty="0"/>
-              <a:t>Required organisational condition: Systems: Reliable infrastructure and monitoring capability to maintain system availability. Resources: Sufficient technical support coverage during service hours.</a:t>
-            </a:r>
-          </a:p>
-          <a:p>
-            <a:r>
-              <a:rPr lang="en-GB" dirty="0"/>
-              <a:t>Organisational conditions, measure or evidence of readiness: Systems: ≥99% customer management system availability during service hours. Resources: Approved technical support roster covering required service hours.</a:t>
-            </a:r>
-          </a:p>
-          <a:p>
-            <a:endParaRPr lang="en-GB" dirty="0"/>
-          </a:p>
+              <a:t>Required organisational condition: Environment: Reliable infrastructure and monitoring technology to maintain system availability. Resources: A funded technical support contract covering service hours.</a:t>
+            </a:r>
+          </a:p>
+          <a:p>
+            <a:r>
+              <a:rPr lang="en-GB" dirty="0"/>
+              <a:t>Organisational conditions, measure or evidence of readiness: Environment: ≥99% customer management system availability during service hours. Resources: Approved support contract covering required service hours.</a:t>
+            </a:r>
+          </a:p>
+          <a:p/>
           <a:p>
             <a:r>
               <a:rPr lang="en-GB" dirty="0"/>
@@ -5993,9 +6992,7 @@
               <a:t>Organisational conditions, measure or evidence of readiness: Governance: Documented approval limits and designated decision owners. Systems: ≥95% of internal processing requests completed within the agreed turnaround time.</a:t>
             </a:r>
           </a:p>
-          <a:p>
-            <a:endParaRPr lang="en-GB" dirty="0"/>
-          </a:p>
+          <a:p/>
           <a:p>
             <a:r>
               <a:rPr lang="en-GB" dirty="0"/>
@@ -6023,30 +7020,26 @@
           <a:p>
             <a:r>
               <a:rPr lang="en-GB" dirty="0"/>
-              <a:t>Required organisational condition: Resources: Sufficient qualified staff available to meet forecast customer enquiry volumes. Governance: Authority to approve staffing adjustments when demand exceeds available capacity.</a:t>
-            </a:r>
-          </a:p>
-          <a:p>
-            <a:r>
-              <a:rPr lang="en-GB" dirty="0"/>
-              <a:t>Organisational conditions, measure or evidence of readiness: Resources: ≥95% staffing coverage against demand-based requirements. Governance: Agreed staffing adjustment authority and escalation arrangements.</a:t>
-            </a:r>
-          </a:p>
-          <a:p>
-            <a:endParaRPr lang="en-GB" dirty="0"/>
-          </a:p>
+              <a:t>Required organisational condition: Resources: Funding approved for the staffing levels that forecast customer enquiry volumes require. Governance: Authority to approve staffing adjustments when demand exceeds available capacity.</a:t>
+            </a:r>
+          </a:p>
+          <a:p>
+            <a:r>
+              <a:rPr lang="en-GB" dirty="0"/>
+              <a:t>Organisational conditions, measure or evidence of readiness: Resources: ≥95% of the demand-based staffing budget approved and released. Governance: Agreed staffing adjustment authority and escalation arrangements.</a:t>
+            </a:r>
+          </a:p>
+          <a:p/>
           <a:p>
             <a:r>
               <a:rPr lang="en-GB" dirty="0"/>
               <a:t>Performance targets are illustrative. The purpose is to establish sufficient evidence to determine whether the required contribution is being delivered and whether the organisation is enabling it.</a:t>
             </a:r>
           </a:p>
-          <a:p>
-            <a:endParaRPr lang="en-GB" dirty="0"/>
-          </a:p>
-          <a:p>
-            <a:r>
-              <a:rPr lang="en-GB" b="1" dirty="0"/>
+          <a:p/>
+          <a:p>
+            <a:r>
+              <a:rPr lang="en-GB" dirty="0" b="1"/>
               <a:t>4. Examine the measures.</a:t>
             </a:r>
           </a:p>
@@ -6056,12 +7049,10 @@
               <a:t>Ask: "Why do we measure both employee incident-response performance and system availability in IT?" Guide participants to recognise that employees may fulfil their responsibilities while the underlying organisational capability remains inadequate.</a:t>
             </a:r>
           </a:p>
-          <a:p>
-            <a:endParaRPr lang="en-GB" dirty="0"/>
-          </a:p>
-          <a:p>
-            <a:r>
-              <a:rPr lang="en-GB" b="1" dirty="0"/>
+          <a:p/>
+          <a:p>
+            <a:r>
+              <a:rPr lang="en-GB" dirty="0" b="1"/>
               <a:t>5. Consolidate the learning.</a:t>
             </a:r>
           </a:p>
@@ -6069,6 +7060,19 @@
             <a:r>
               <a:rPr lang="en-GB" dirty="0"/>
               <a:t>Say: "The Contribution Map gives us an integrated view of what must be delivered and enabled across the organisation. It establishes the performance requirements against which contributions can be assessed."</a:t>
+            </a:r>
+          </a:p>
+          <a:p/>
+          <a:p>
+            <a:r>
+              <a:rPr lang="en-GB" dirty="0" b="1"/>
+              <a:t>6. Bridge to interpreting the map.</a:t>
+            </a:r>
+          </a:p>
+          <a:p>
+            <a:r>
+              <a:rPr lang="en-GB" dirty="0"/>
+              <a:t>Say: "Read across any one function and the same three elements repeat. The next slide names them."</a:t>
             </a:r>
           </a:p>
         </p:txBody>
@@ -6149,25 +7153,21 @@
           <a:lstStyle/>
           <a:p>
             <a:r>
-              <a:rPr lang="en-GB" b="1" dirty="0"/>
+              <a:rPr lang="en-GB" dirty="0" b="1"/>
               <a:t>4.1.2 — INTERPRETING THE CONTRIBUTION MAP</a:t>
             </a:r>
           </a:p>
-          <a:p>
-            <a:endParaRPr lang="en-GB" dirty="0"/>
-          </a:p>
-          <a:p>
-            <a:r>
-              <a:rPr lang="en-GB" b="1" dirty="0"/>
+          <a:p/>
+          <a:p>
+            <a:r>
+              <a:rPr lang="en-GB" dirty="0" b="1"/>
               <a:t>HOW TO TEACH IT:</a:t>
             </a:r>
           </a:p>
-          <a:p>
-            <a:endParaRPr lang="en-GB" dirty="0"/>
-          </a:p>
-          <a:p>
-            <a:r>
-              <a:rPr lang="en-GB" b="1" dirty="0"/>
+          <a:p/>
+          <a:p>
+            <a:r>
+              <a:rPr lang="en-GB" dirty="0" b="1"/>
               <a:t>1. Teach the three elements, one card at a time.</a:t>
             </a:r>
           </a:p>
@@ -6195,12 +7195,10 @@
               <a:t>3 · Organisational performance: what conditions must the organisation provide? The map identifies the relevant organisational conditions necessary to enable the human contribution.</a:t>
             </a:r>
           </a:p>
-          <a:p>
-            <a:endParaRPr lang="en-GB" dirty="0"/>
-          </a:p>
-          <a:p>
-            <a:r>
-              <a:rPr lang="en-GB" b="1" dirty="0"/>
+          <a:p/>
+          <a:p>
+            <a:r>
+              <a:rPr lang="en-GB" dirty="0" b="1"/>
               <a:t>2. Close on the measures for the organisational conditions.</a:t>
             </a:r>
           </a:p>
@@ -6208,6 +7206,19 @@
             <a:r>
               <a:rPr lang="en-GB" dirty="0"/>
               <a:t>Say: "Only the organisational conditions that materially affect delivery are included. Some require numerical performance measures, such as system availability or staffing coverage. Others require evidence that an arrangement or capability exists and is functioning, such as documented approval authority or established escalation procedures."</a:t>
+            </a:r>
+          </a:p>
+          <a:p/>
+          <a:p>
+            <a:r>
+              <a:rPr lang="en-GB" dirty="0" b="1"/>
+              <a:t>3. Bridge to 4.2.</a:t>
+            </a:r>
+          </a:p>
+          <a:p>
+            <a:r>
+              <a:rPr lang="en-GB" dirty="0"/>
+              <a:t>Say: "The map sets out what must be delivered and what must be enabled. FACES sets out how those contributions are managed."</a:t>
             </a:r>
           </a:p>
         </p:txBody>
@@ -6288,25 +7299,21 @@
           <a:lstStyle/>
           <a:p>
             <a:r>
-              <a:rPr lang="en-GB" b="1" dirty="0"/>
+              <a:rPr lang="en-GB" dirty="0" b="1"/>
               <a:t>4.2 — MANAGING THE CONTRIBUTIONS THROUGH FACES (Applying FACES across the four functions)</a:t>
             </a:r>
           </a:p>
-          <a:p>
-            <a:endParaRPr lang="en-GB" dirty="0"/>
-          </a:p>
-          <a:p>
-            <a:r>
-              <a:rPr lang="en-GB" b="1" dirty="0"/>
+          <a:p/>
+          <a:p>
+            <a:r>
+              <a:rPr lang="en-GB" dirty="0" b="1"/>
               <a:t>HOW TO TEACH IT:</a:t>
             </a:r>
           </a:p>
-          <a:p>
-            <a:endParaRPr lang="en-GB" dirty="0"/>
-          </a:p>
-          <a:p>
-            <a:r>
-              <a:rPr lang="en-GB" b="1" dirty="0"/>
+          <a:p/>
+          <a:p>
+            <a:r>
+              <a:rPr lang="en-GB" dirty="0" b="1"/>
               <a:t>1. Connect FACES to the Contribution Map.</a:t>
             </a:r>
           </a:p>
@@ -6328,12 +7335,10 @@
               <a:t>Say: "The next requirement is to manage these contributions consistently throughout execution. FACES provides the five management functions through which performance expectations are aligned, evidence is examined, accountability is maintained and improvement is supported."</a:t>
             </a:r>
           </a:p>
-          <a:p>
-            <a:endParaRPr lang="en-GB" dirty="0"/>
-          </a:p>
-          <a:p>
-            <a:r>
-              <a:rPr lang="en-GB" b="1" dirty="0"/>
+          <a:p/>
+          <a:p>
+            <a:r>
+              <a:rPr lang="en-GB" dirty="0" b="1"/>
               <a:t>2. Demonstrate how FACES operates across functions.</a:t>
             </a:r>
           </a:p>
@@ -6343,9 +7348,7 @@
               <a:t>Begin with Customer Service and work through the five FACES functions. Then select IT to demonstrate how the same management functions apply to different performance responsibilities. Emphasise that FACES applies to both employee contributions and organisational enabling conditions.</a:t>
             </a:r>
           </a:p>
-          <a:p>
-            <a:endParaRPr lang="en-GB" dirty="0"/>
-          </a:p>
+          <a:p/>
           <a:p>
             <a:r>
               <a:rPr lang="en-GB" dirty="0"/>
@@ -6376,9 +7379,7 @@
               <a:t>HR / Workforce Planning: Staffing gaps are discussed as performance risks requiring action. Workforce Planning and operational managers jointly examine whether available capacity can meet expected demand and raise emerging shortages before service delivery is affected.</a:t>
             </a:r>
           </a:p>
-          <a:p>
-            <a:endParaRPr lang="en-GB" dirty="0"/>
-          </a:p>
+          <a:p/>
           <a:p>
             <a:r>
               <a:rPr lang="en-GB" dirty="0"/>
@@ -6409,9 +7410,7 @@
               <a:t>HR / Workforce Planning: Staffing forecasts and schedules are based on expected enquiry volumes and the service capacity required. Staffing coverage requirements are agreed with the operational functions that depend on them.</a:t>
             </a:r>
           </a:p>
-          <a:p>
-            <a:endParaRPr lang="en-GB" dirty="0"/>
-          </a:p>
+          <a:p/>
           <a:p>
             <a:r>
               <a:rPr lang="en-GB" dirty="0"/>
@@ -6442,9 +7441,7 @@
               <a:t>HR / Workforce Planning: Staffing schedules, forecast demand and actual staffing coverage are reviewed together. The evidence shows whether scheduling commitments have been fulfilled and whether sufficient qualified employees are available.</a:t>
             </a:r>
           </a:p>
-          <a:p>
-            <a:endParaRPr lang="en-GB" dirty="0"/>
-          </a:p>
+          <a:p/>
           <a:p>
             <a:r>
               <a:rPr lang="en-GB" dirty="0"/>
@@ -6475,9 +7472,7 @@
               <a:t>HR / Workforce Planning: Workforce Planning is responsible for forecasts, schedules and coordinating staffing adjustments. Operational managers confirm their staffing requirements, while decisions on additional capacity are referred to the appropriate resource authority.</a:t>
             </a:r>
           </a:p>
-          <a:p>
-            <a:endParaRPr lang="en-GB" dirty="0"/>
-          </a:p>
+          <a:p/>
           <a:p>
             <a:r>
               <a:rPr lang="en-GB" dirty="0"/>
@@ -6508,12 +7503,10 @@
               <a:t>HR / Workforce Planning: Differences between forecast and actual demand inform improvements to workforce planning. Recurring staffing shortages lead to adjustments in scheduling, deployment or capacity arrangements, with staffing coverage used to evaluate their effectiveness.</a:t>
             </a:r>
           </a:p>
-          <a:p>
-            <a:endParaRPr lang="en-GB" dirty="0"/>
-          </a:p>
-          <a:p>
-            <a:r>
-              <a:rPr lang="en-GB" b="1" dirty="0"/>
+          <a:p/>
+          <a:p>
+            <a:r>
+              <a:rPr lang="en-GB" dirty="0" b="1"/>
               <a:t>3. Examine shared accountability.</a:t>
             </a:r>
           </a:p>
@@ -6523,12 +7516,10 @@
               <a:t>Ask: "If Customer Service employees are meeting their performance commitments but system outages continue to delay customer resolution, who must take responsibility for the performance gap?" Guide participants to distinguish employee accountability from the organisational responsibility for system reliability.</a:t>
             </a:r>
           </a:p>
-          <a:p>
-            <a:endParaRPr lang="en-GB" dirty="0"/>
-          </a:p>
-          <a:p>
-            <a:r>
-              <a:rPr lang="en-GB" b="1" dirty="0"/>
+          <a:p/>
+          <a:p>
+            <a:r>
+              <a:rPr lang="en-GB" dirty="0" b="1"/>
               <a:t>4. Connect management action to improvement.</a:t>
             </a:r>
           </a:p>
@@ -6538,12 +7529,10 @@
               <a:t>Ask: "What should happen when performance reviews repeatedly identify the same approval delays or staffing shortages?" Emphasise that performance management must lead to appropriate decisions, assigned responsibilities and follow-through.</a:t>
             </a:r>
           </a:p>
-          <a:p>
-            <a:endParaRPr lang="en-GB" dirty="0"/>
-          </a:p>
-          <a:p>
-            <a:r>
-              <a:rPr lang="en-GB" b="1" dirty="0"/>
+          <a:p/>
+          <a:p>
+            <a:r>
+              <a:rPr lang="en-GB" dirty="0" b="1"/>
               <a:t>5. Interpret the worked example (the five rows on the slide).</a:t>
             </a:r>
           </a:p>
@@ -6589,12 +7578,10 @@
               <a:t>Say: "Together, these disciplines ensure that the contributions established in the S2R® Contribution Map™ are actively managed towards the enterprise result."</a:t>
             </a:r>
           </a:p>
-          <a:p>
-            <a:endParaRPr lang="en-GB" dirty="0"/>
-          </a:p>
-          <a:p>
-            <a:r>
-              <a:rPr lang="en-GB" b="1" dirty="0"/>
+          <a:p/>
+          <a:p>
+            <a:r>
+              <a:rPr lang="en-GB" dirty="0" b="1"/>
               <a:t>6. Consolidate the learning.</a:t>
             </a:r>
           </a:p>
@@ -6602,6 +7589,19 @@
             <a:r>
               <a:rPr lang="en-GB" dirty="0"/>
               <a:t>Say: "The Contribution Map establishes the contributions, performance measures and enabling conditions required for enterprise results. FACES establishes the management disciplines through which those contributions are aligned, evaluated, acted upon and continuously strengthened."</a:t>
+            </a:r>
+          </a:p>
+          <a:p/>
+          <a:p>
+            <a:r>
+              <a:rPr lang="en-GB" dirty="0" b="1"/>
+              <a:t>7. Close Section 4 and bridge to Section 5.</a:t>
+            </a:r>
+          </a:p>
+          <a:p>
+            <a:r>
+              <a:rPr lang="en-GB" dirty="0"/>
+              <a:t>Say: "One Key Result shows how mapped contributions and FACES together make people and organisational performance manageable. Your group now builds its own Contribution Map, applies FACES to it and sets the WARD check-up for its Key Result."</a:t>
             </a:r>
           </a:p>
         </p:txBody>
@@ -8104,7 +9104,7 @@
         <p:spPr>
           <a:xfrm>
             <a:off x="8354568" y="2514600"/>
-            <a:ext cx="3057144" cy="923544"/>
+            <a:ext cx="3057144" cy="1325880"/>
           </a:xfrm>
           <a:prstGeom prst="rect">
             <a:avLst/>
@@ -8569,7 +9569,7 @@
         <p:spPr>
           <a:xfrm>
             <a:off x="7434072" y="1691640"/>
-            <a:ext cx="4069080" cy="502920"/>
+            <a:ext cx="4069080" cy="868680"/>
           </a:xfrm>
           <a:prstGeom prst="rect">
             <a:avLst/>
@@ -8608,7 +9608,7 @@
         <p:spPr>
           <a:xfrm>
             <a:off x="7434072" y="2606040"/>
-            <a:ext cx="4069080" cy="457200"/>
+            <a:ext cx="4069080" cy="777240"/>
           </a:xfrm>
           <a:prstGeom prst="rect">
             <a:avLst/>
@@ -9428,7 +10428,7 @@
               <a:buNone/>
             </a:pPr>
             <a:r>
-              <a:rPr lang="en-US" sz="3600" b="1" dirty="0">
+              <a:rPr lang="en-US" sz="3400" b="1" dirty="0">
                 <a:solidFill>
                   <a:srgbClr val="1A5C2C"/>
                 </a:solidFill>
@@ -9836,7 +10836,7 @@
         <p:spPr>
           <a:xfrm>
             <a:off x="7434072" y="1691640"/>
-            <a:ext cx="4069080" cy="502920"/>
+            <a:ext cx="4069080" cy="868680"/>
           </a:xfrm>
           <a:prstGeom prst="rect">
             <a:avLst/>
@@ -11370,7 +12370,7 @@
               <a:buNone/>
             </a:pPr>
             <a:r>
-              <a:rPr lang="en-US" sz="3600" b="1" dirty="0">
+              <a:rPr lang="en-US" sz="3400" b="1" dirty="0">
                 <a:solidFill>
                   <a:srgbClr val="1A5C2C"/>
                 </a:solidFill>
@@ -12459,7 +13459,7 @@
         <p:spPr>
           <a:xfrm>
             <a:off x="548640" y="1504094"/>
-            <a:ext cx="2095500" cy="266700"/>
+            <a:ext cx="2095500" cy="457200"/>
           </a:xfrm>
           <a:prstGeom prst="rect">
             <a:avLst/>
@@ -12519,7 +13519,7 @@
         <p:spPr>
           <a:xfrm>
             <a:off x="2891790" y="1504094"/>
-            <a:ext cx="4381500" cy="266700"/>
+            <a:ext cx="4381500" cy="457200"/>
           </a:xfrm>
           <a:prstGeom prst="rect">
             <a:avLst/>
@@ -12579,7 +13579,7 @@
         <p:spPr>
           <a:xfrm>
             <a:off x="7520940" y="1504094"/>
-            <a:ext cx="4381500" cy="266700"/>
+            <a:ext cx="4381500" cy="457200"/>
           </a:xfrm>
           <a:prstGeom prst="rect">
             <a:avLst/>
@@ -12686,7 +13686,7 @@
         <p:spPr>
           <a:xfrm>
             <a:off x="548639" y="2194559"/>
-            <a:ext cx="2719999" cy="777240"/>
+            <a:ext cx="2514600" cy="777240"/>
           </a:xfrm>
           <a:prstGeom prst="rect">
             <a:avLst/>
@@ -12989,7 +13989,7 @@
         <p:spPr>
           <a:xfrm>
             <a:off x="548639" y="3154680"/>
-            <a:ext cx="2719999" cy="777240"/>
+            <a:ext cx="2514600" cy="777240"/>
           </a:xfrm>
           <a:prstGeom prst="rect">
             <a:avLst/>
@@ -13218,7 +14218,7 @@
         <p:spPr>
           <a:xfrm>
             <a:off x="548639" y="4114800"/>
-            <a:ext cx="2719999" cy="777240"/>
+            <a:ext cx="2514600" cy="777240"/>
           </a:xfrm>
           <a:prstGeom prst="rect">
             <a:avLst/>
@@ -13447,7 +14447,7 @@
         <p:spPr>
           <a:xfrm>
             <a:off x="548639" y="5074920"/>
-            <a:ext cx="2719999" cy="777240"/>
+            <a:ext cx="2514600" cy="777240"/>
           </a:xfrm>
           <a:prstGeom prst="rect">
             <a:avLst/>
@@ -14162,7 +15162,7 @@
               <a:buNone/>
             </a:pPr>
             <a:r>
-              <a:rPr lang="en-US" sz="3600" b="1" dirty="0">
+              <a:rPr lang="en-US" sz="2800" b="1" dirty="0">
                 <a:solidFill>
                   <a:srgbClr val="1A5C2C"/>
                 </a:solidFill>
@@ -14507,7 +15507,7 @@
         <p:spPr>
           <a:xfrm>
             <a:off x="7434072" y="1691640"/>
-            <a:ext cx="4069080" cy="502920"/>
+            <a:ext cx="4069080" cy="868680"/>
           </a:xfrm>
           <a:prstGeom prst="rect">
             <a:avLst/>
@@ -14649,6 +15649,1227 @@
 </file>
 
 <file path=ppt/slides/slide21.xml><?xml version="1.0" encoding="utf-8"?>
+<p:sld xmlns:a="http://schemas.openxmlformats.org/drawingml/2006/main" xmlns:p="http://schemas.openxmlformats.org/presentationml/2006/main" xmlns:r="http://schemas.openxmlformats.org/officeDocument/2006/relationships">
+  <p:cSld>
+    <p:spTree>
+      <p:nvGrpSpPr>
+        <p:cNvPr id="1" name=""/>
+        <p:cNvGrpSpPr/>
+        <p:nvPr/>
+      </p:nvGrpSpPr>
+      <p:grpSpPr/>
+      <p:sp>
+        <p:nvSpPr>
+          <p:cNvPr id="2" name="Text 0"/>
+          <p:cNvSpPr txBox="1"/>
+          <p:nvPr/>
+        </p:nvSpPr>
+        <p:spPr>
+          <a:xfrm>
+            <a:off x="548640" y="411480"/>
+            <a:ext cx="11064240" cy="868680"/>
+          </a:xfrm>
+          <a:prstGeom prst="rect">
+            <a:avLst/>
+          </a:prstGeom>
+          <a:noFill/>
+          <a:ln/>
+        </p:spPr>
+        <p:txBody>
+          <a:bodyPr wrap="square" lIns="0" tIns="0" rIns="0" bIns="0" rtlCol="0" anchor="ctr"/>
+          <a:lstStyle/>
+          <a:p>
+            <a:pPr marL="0" indent="0">
+              <a:buNone/>
+            </a:pPr>
+            <a:r>
+              <a:rPr lang="en-US" sz="3600" b="1" dirty="0">
+                <a:solidFill>
+                  <a:srgbClr val="1A5C2C"/>
+                </a:solidFill>
+                <a:latin typeface="Cambria" pitchFamily="34" charset="0"/>
+                <a:ea typeface="Cambria" pitchFamily="34" charset="-122"/>
+                <a:cs typeface="Cambria" pitchFamily="34" charset="-120"/>
+              </a:rPr>
+              <a:t>2.3a · Performance scorecard: three categories</a:t>
+            </a:r>
+            <a:endParaRPr lang="en-US" sz="3600" dirty="0"/>
+          </a:p>
+        </p:txBody>
+      </p:sp>
+      <p:sp>
+        <p:nvSpPr>
+          <p:cNvPr id="3" name="Shape 1"/>
+          <p:cNvSpPr/>
+          <p:nvPr/>
+        </p:nvSpPr>
+        <p:spPr>
+          <a:xfrm>
+            <a:off x="548640" y="1508760"/>
+            <a:ext cx="3514344" cy="3931920"/>
+          </a:xfrm>
+          <a:prstGeom prst="roundRect">
+            <a:avLst>
+              <a:gd name="adj" fmla="val 2602"/>
+            </a:avLst>
+          </a:prstGeom>
+          <a:solidFill>
+            <a:srgbClr val="EEF4EF"/>
+          </a:solidFill>
+          <a:ln w="12700">
+            <a:solidFill>
+              <a:srgbClr val="EEF4EF"/>
+            </a:solidFill>
+            <a:prstDash val="solid"/>
+          </a:ln>
+        </p:spPr>
+        <p:txBody>
+          <a:bodyPr/>
+          <a:lstStyle/>
+          <a:p>
+            <a:endParaRPr lang="en-ZA"/>
+          </a:p>
+        </p:txBody>
+      </p:sp>
+      <p:sp>
+        <p:nvSpPr>
+          <p:cNvPr id="4" name="Shape 2"/>
+          <p:cNvSpPr/>
+          <p:nvPr/>
+        </p:nvSpPr>
+        <p:spPr>
+          <a:xfrm>
+            <a:off x="777240" y="1737360"/>
+            <a:ext cx="640080" cy="640080"/>
+          </a:xfrm>
+          <a:prstGeom prst="ellipse">
+            <a:avLst/>
+          </a:prstGeom>
+          <a:solidFill>
+            <a:srgbClr val="1A5C2C"/>
+          </a:solidFill>
+          <a:ln w="12700">
+            <a:solidFill>
+              <a:srgbClr val="1A5C2C"/>
+            </a:solidFill>
+            <a:prstDash val="solid"/>
+          </a:ln>
+        </p:spPr>
+        <p:txBody>
+          <a:bodyPr/>
+          <a:lstStyle/>
+          <a:p>
+            <a:endParaRPr lang="en-ZA"/>
+          </a:p>
+        </p:txBody>
+      </p:sp>
+      <p:pic>
+        <p:nvPicPr>
+          <p:cNvPr id="5" name="Image 0" descr="preencoded.png"/>
+          <p:cNvPicPr>
+            <a:picLocks noChangeAspect="1"/>
+          </p:cNvPicPr>
+          <p:nvPr/>
+        </p:nvPicPr>
+        <p:blipFill>
+          <a:blip r:embed="rId2"/>
+          <a:stretch>
+            <a:fillRect/>
+          </a:stretch>
+        </p:blipFill>
+        <p:spPr>
+          <a:xfrm>
+            <a:off x="937260" y="1897380"/>
+            <a:ext cx="320040" cy="320040"/>
+          </a:xfrm>
+          <a:prstGeom prst="rect">
+            <a:avLst/>
+          </a:prstGeom>
+        </p:spPr>
+      </p:pic>
+      <p:sp>
+        <p:nvSpPr>
+          <p:cNvPr id="6" name="Text 3"/>
+          <p:cNvSpPr txBox="1"/>
+          <p:nvPr/>
+        </p:nvSpPr>
+        <p:spPr>
+          <a:xfrm>
+            <a:off x="777240" y="2514600"/>
+            <a:ext cx="3057144" cy="507492"/>
+          </a:xfrm>
+          <a:prstGeom prst="rect">
+            <a:avLst/>
+          </a:prstGeom>
+          <a:noFill/>
+          <a:ln/>
+        </p:spPr>
+        <p:txBody>
+          <a:bodyPr wrap="square" lIns="0" tIns="0" rIns="0" bIns="0" rtlCol="0" anchor="t"/>
+          <a:lstStyle/>
+          <a:p>
+            <a:pPr marL="0" indent="0">
+              <a:buNone/>
+            </a:pPr>
+            <a:r>
+              <a:rPr lang="en-US" sz="2600" b="1" dirty="0">
+                <a:solidFill>
+                  <a:srgbClr val="1A5C2C"/>
+                </a:solidFill>
+                <a:latin typeface="Cambria" pitchFamily="34" charset="0"/>
+                <a:ea typeface="Cambria" pitchFamily="34" charset="-122"/>
+                <a:cs typeface="Cambria" pitchFamily="34" charset="-120"/>
+              </a:rPr>
+              <a:t>Strategy</a:t>
+            </a:r>
+            <a:endParaRPr lang="en-US" sz="2600" dirty="0"/>
+          </a:p>
+        </p:txBody>
+      </p:sp>
+      <p:sp>
+        <p:nvSpPr>
+          <p:cNvPr id="7" name="Text 4"/>
+          <p:cNvSpPr txBox="1"/>
+          <p:nvPr/>
+        </p:nvSpPr>
+        <p:spPr>
+          <a:xfrm>
+            <a:off x="777240" y="3159252"/>
+            <a:ext cx="3057144" cy="2144268"/>
+          </a:xfrm>
+          <a:prstGeom prst="rect">
+            <a:avLst/>
+          </a:prstGeom>
+          <a:noFill/>
+          <a:ln/>
+        </p:spPr>
+        <p:txBody>
+          <a:bodyPr wrap="square" lIns="0" tIns="0" rIns="0" bIns="0" rtlCol="0" anchor="t"/>
+          <a:lstStyle/>
+          <a:p>
+            <a:pPr marL="0" indent="0">
+              <a:buNone/>
+            </a:pPr>
+            <a:r>
+              <a:rPr lang="en-US" sz="2400" dirty="0">
+                <a:solidFill>
+                  <a:srgbClr val="1F2A22"/>
+                </a:solidFill>
+                <a:latin typeface="Calibri" pitchFamily="34" charset="0"/>
+                <a:ea typeface="Calibri" pitchFamily="34" charset="-122"/>
+                <a:cs typeface="Calibri" pitchFamily="34" charset="-120"/>
+              </a:rPr>
+              <a:t>OKRs: progress on the multi-year strategy. 30–50% at senior levels.</a:t>
+            </a:r>
+            <a:endParaRPr lang="en-US" sz="2400" dirty="0"/>
+          </a:p>
+        </p:txBody>
+      </p:sp>
+      <p:sp>
+        <p:nvSpPr>
+          <p:cNvPr id="8" name="Shape 5"/>
+          <p:cNvSpPr/>
+          <p:nvPr/>
+        </p:nvSpPr>
+        <p:spPr>
+          <a:xfrm>
+            <a:off x="4337304" y="1508760"/>
+            <a:ext cx="3514344" cy="3931920"/>
+          </a:xfrm>
+          <a:prstGeom prst="roundRect">
+            <a:avLst>
+              <a:gd name="adj" fmla="val 2602"/>
+            </a:avLst>
+          </a:prstGeom>
+          <a:solidFill>
+            <a:srgbClr val="EEF4EF"/>
+          </a:solidFill>
+          <a:ln w="12700">
+            <a:solidFill>
+              <a:srgbClr val="EEF4EF"/>
+            </a:solidFill>
+            <a:prstDash val="solid"/>
+          </a:ln>
+        </p:spPr>
+        <p:txBody>
+          <a:bodyPr/>
+          <a:lstStyle/>
+          <a:p>
+            <a:endParaRPr lang="en-ZA"/>
+          </a:p>
+        </p:txBody>
+      </p:sp>
+      <p:sp>
+        <p:nvSpPr>
+          <p:cNvPr id="9" name="Shape 6"/>
+          <p:cNvSpPr/>
+          <p:nvPr/>
+        </p:nvSpPr>
+        <p:spPr>
+          <a:xfrm>
+            <a:off x="4565904" y="1737360"/>
+            <a:ext cx="640080" cy="640080"/>
+          </a:xfrm>
+          <a:prstGeom prst="ellipse">
+            <a:avLst/>
+          </a:prstGeom>
+          <a:solidFill>
+            <a:srgbClr val="1A5C2C"/>
+          </a:solidFill>
+          <a:ln w="12700">
+            <a:solidFill>
+              <a:srgbClr val="1A5C2C"/>
+            </a:solidFill>
+            <a:prstDash val="solid"/>
+          </a:ln>
+        </p:spPr>
+        <p:txBody>
+          <a:bodyPr/>
+          <a:lstStyle/>
+          <a:p>
+            <a:endParaRPr lang="en-ZA"/>
+          </a:p>
+        </p:txBody>
+      </p:sp>
+      <p:pic>
+        <p:nvPicPr>
+          <p:cNvPr id="10" name="Image 1" descr="preencoded.png"/>
+          <p:cNvPicPr>
+            <a:picLocks noChangeAspect="1"/>
+          </p:cNvPicPr>
+          <p:nvPr/>
+        </p:nvPicPr>
+        <p:blipFill>
+          <a:blip r:embed="rId3"/>
+          <a:stretch>
+            <a:fillRect/>
+          </a:stretch>
+        </p:blipFill>
+        <p:spPr>
+          <a:xfrm>
+            <a:off x="4725924" y="1897380"/>
+            <a:ext cx="320040" cy="320040"/>
+          </a:xfrm>
+          <a:prstGeom prst="rect">
+            <a:avLst/>
+          </a:prstGeom>
+        </p:spPr>
+      </p:pic>
+      <p:sp>
+        <p:nvSpPr>
+          <p:cNvPr id="11" name="Text 7"/>
+          <p:cNvSpPr txBox="1"/>
+          <p:nvPr/>
+        </p:nvSpPr>
+        <p:spPr>
+          <a:xfrm>
+            <a:off x="4565904" y="2514600"/>
+            <a:ext cx="3057144" cy="507492"/>
+          </a:xfrm>
+          <a:prstGeom prst="rect">
+            <a:avLst/>
+          </a:prstGeom>
+          <a:noFill/>
+          <a:ln/>
+        </p:spPr>
+        <p:txBody>
+          <a:bodyPr wrap="square" lIns="0" tIns="0" rIns="0" bIns="0" rtlCol="0" anchor="t"/>
+          <a:lstStyle/>
+          <a:p>
+            <a:pPr marL="0" indent="0">
+              <a:buNone/>
+            </a:pPr>
+            <a:r>
+              <a:rPr lang="en-US" sz="2600" b="1" dirty="0">
+                <a:solidFill>
+                  <a:srgbClr val="1A5C2C"/>
+                </a:solidFill>
+                <a:latin typeface="Cambria" pitchFamily="34" charset="0"/>
+                <a:ea typeface="Cambria" pitchFamily="34" charset="-122"/>
+                <a:cs typeface="Cambria" pitchFamily="34" charset="-120"/>
+              </a:rPr>
+              <a:t>Operational</a:t>
+            </a:r>
+            <a:endParaRPr lang="en-US" sz="2600" dirty="0"/>
+          </a:p>
+        </p:txBody>
+      </p:sp>
+      <p:sp>
+        <p:nvSpPr>
+          <p:cNvPr id="12" name="Text 8"/>
+          <p:cNvSpPr txBox="1"/>
+          <p:nvPr/>
+        </p:nvSpPr>
+        <p:spPr>
+          <a:xfrm>
+            <a:off x="4565904" y="3159252"/>
+            <a:ext cx="3057144" cy="2144268"/>
+          </a:xfrm>
+          <a:prstGeom prst="rect">
+            <a:avLst/>
+          </a:prstGeom>
+          <a:noFill/>
+          <a:ln/>
+        </p:spPr>
+        <p:txBody>
+          <a:bodyPr wrap="square" lIns="0" tIns="0" rIns="0" bIns="0" rtlCol="0" anchor="t"/>
+          <a:lstStyle/>
+          <a:p>
+            <a:pPr marL="0" indent="0">
+              <a:buNone/>
+            </a:pPr>
+            <a:r>
+              <a:rPr lang="en-US" sz="2400" dirty="0">
+                <a:solidFill>
+                  <a:srgbClr val="1F2A22"/>
+                </a:solidFill>
+                <a:latin typeface="Calibri" pitchFamily="34" charset="0"/>
+                <a:ea typeface="Calibri" pitchFamily="34" charset="-122"/>
+                <a:cs typeface="Calibri" pitchFamily="34" charset="-120"/>
+              </a:rPr>
+              <a:t>KPIs: the operational engine at standard. 30–50% at most levels.</a:t>
+            </a:r>
+            <a:endParaRPr lang="en-US" sz="2400" dirty="0"/>
+          </a:p>
+        </p:txBody>
+      </p:sp>
+      <p:sp>
+        <p:nvSpPr>
+          <p:cNvPr id="13" name="Shape 9"/>
+          <p:cNvSpPr/>
+          <p:nvPr/>
+        </p:nvSpPr>
+        <p:spPr>
+          <a:xfrm>
+            <a:off x="8125968" y="1508760"/>
+            <a:ext cx="3514344" cy="3931920"/>
+          </a:xfrm>
+          <a:prstGeom prst="roundRect">
+            <a:avLst>
+              <a:gd name="adj" fmla="val 2602"/>
+            </a:avLst>
+          </a:prstGeom>
+          <a:solidFill>
+            <a:srgbClr val="EEF4EF"/>
+          </a:solidFill>
+          <a:ln w="12700">
+            <a:solidFill>
+              <a:srgbClr val="EEF4EF"/>
+            </a:solidFill>
+            <a:prstDash val="solid"/>
+          </a:ln>
+        </p:spPr>
+        <p:txBody>
+          <a:bodyPr/>
+          <a:lstStyle/>
+          <a:p>
+            <a:endParaRPr lang="en-ZA"/>
+          </a:p>
+        </p:txBody>
+      </p:sp>
+      <p:sp>
+        <p:nvSpPr>
+          <p:cNvPr id="14" name="Shape 10"/>
+          <p:cNvSpPr/>
+          <p:nvPr/>
+        </p:nvSpPr>
+        <p:spPr>
+          <a:xfrm>
+            <a:off x="8354568" y="1737360"/>
+            <a:ext cx="640080" cy="640080"/>
+          </a:xfrm>
+          <a:prstGeom prst="ellipse">
+            <a:avLst/>
+          </a:prstGeom>
+          <a:solidFill>
+            <a:srgbClr val="1A5C2C"/>
+          </a:solidFill>
+          <a:ln w="12700">
+            <a:solidFill>
+              <a:srgbClr val="1A5C2C"/>
+            </a:solidFill>
+            <a:prstDash val="solid"/>
+          </a:ln>
+        </p:spPr>
+        <p:txBody>
+          <a:bodyPr/>
+          <a:lstStyle/>
+          <a:p>
+            <a:endParaRPr lang="en-ZA"/>
+          </a:p>
+        </p:txBody>
+      </p:sp>
+      <p:pic>
+        <p:nvPicPr>
+          <p:cNvPr id="15" name="Image 2" descr="preencoded.png"/>
+          <p:cNvPicPr>
+            <a:picLocks noChangeAspect="1"/>
+          </p:cNvPicPr>
+          <p:nvPr/>
+        </p:nvPicPr>
+        <p:blipFill>
+          <a:blip r:embed="rId4"/>
+          <a:stretch>
+            <a:fillRect/>
+          </a:stretch>
+        </p:blipFill>
+        <p:spPr>
+          <a:xfrm>
+            <a:off x="8514588" y="1897380"/>
+            <a:ext cx="320040" cy="320040"/>
+          </a:xfrm>
+          <a:prstGeom prst="rect">
+            <a:avLst/>
+          </a:prstGeom>
+        </p:spPr>
+      </p:pic>
+      <p:sp>
+        <p:nvSpPr>
+          <p:cNvPr id="16" name="Text 11"/>
+          <p:cNvSpPr txBox="1"/>
+          <p:nvPr/>
+        </p:nvSpPr>
+        <p:spPr>
+          <a:xfrm>
+            <a:off x="8354568" y="2514600"/>
+            <a:ext cx="3057144" cy="507492"/>
+          </a:xfrm>
+          <a:prstGeom prst="rect">
+            <a:avLst/>
+          </a:prstGeom>
+          <a:noFill/>
+          <a:ln/>
+        </p:spPr>
+        <p:txBody>
+          <a:bodyPr wrap="square" lIns="0" tIns="0" rIns="0" bIns="0" rtlCol="0" anchor="t"/>
+          <a:lstStyle/>
+          <a:p>
+            <a:pPr marL="0" indent="0">
+              <a:buNone/>
+            </a:pPr>
+            <a:r>
+              <a:rPr lang="en-US" sz="2600" b="1" dirty="0">
+                <a:solidFill>
+                  <a:srgbClr val="1A5C2C"/>
+                </a:solidFill>
+                <a:latin typeface="Cambria" pitchFamily="34" charset="0"/>
+                <a:ea typeface="Cambria" pitchFamily="34" charset="-122"/>
+                <a:cs typeface="Cambria" pitchFamily="34" charset="-120"/>
+              </a:rPr>
+              <a:t>Behavioural</a:t>
+            </a:r>
+            <a:endParaRPr lang="en-US" sz="2600" dirty="0"/>
+          </a:p>
+        </p:txBody>
+      </p:sp>
+      <p:sp>
+        <p:nvSpPr>
+          <p:cNvPr id="17" name="Text 12"/>
+          <p:cNvSpPr txBox="1"/>
+          <p:nvPr/>
+        </p:nvSpPr>
+        <p:spPr>
+          <a:xfrm>
+            <a:off x="8354568" y="3159252"/>
+            <a:ext cx="3057144" cy="2144268"/>
+          </a:xfrm>
+          <a:prstGeom prst="rect">
+            <a:avLst/>
+          </a:prstGeom>
+          <a:noFill/>
+          <a:ln/>
+        </p:spPr>
+        <p:txBody>
+          <a:bodyPr wrap="square" lIns="0" tIns="0" rIns="0" bIns="0" rtlCol="0" anchor="t"/>
+          <a:lstStyle/>
+          <a:p>
+            <a:pPr marL="0" indent="0">
+              <a:buNone/>
+            </a:pPr>
+            <a:r>
+              <a:rPr lang="en-US" sz="2400" dirty="0">
+                <a:solidFill>
+                  <a:srgbClr val="1F2A22"/>
+                </a:solidFill>
+                <a:latin typeface="Calibri" pitchFamily="34" charset="0"/>
+                <a:ea typeface="Calibri" pitchFamily="34" charset="-122"/>
+                <a:cs typeface="Calibri" pitchFamily="34" charset="-120"/>
+              </a:rPr>
+              <a:t>Values and behaviours: how results are achieved. 20–40%.</a:t>
+            </a:r>
+            <a:endParaRPr lang="en-US" sz="2400" dirty="0"/>
+          </a:p>
+        </p:txBody>
+      </p:sp>
+      <p:sp>
+        <p:nvSpPr>
+          <p:cNvPr id="18" name="Shape 13"/>
+          <p:cNvSpPr/>
+          <p:nvPr/>
+        </p:nvSpPr>
+        <p:spPr>
+          <a:xfrm>
+            <a:off x="548640" y="5623560"/>
+            <a:ext cx="11091672" cy="777240"/>
+          </a:xfrm>
+          <a:prstGeom prst="roundRect">
+            <a:avLst>
+              <a:gd name="adj" fmla="val 11765"/>
+            </a:avLst>
+          </a:prstGeom>
+          <a:solidFill>
+            <a:srgbClr val="0F3B1C"/>
+          </a:solidFill>
+          <a:ln w="12700">
+            <a:solidFill>
+              <a:srgbClr val="0F3B1C"/>
+            </a:solidFill>
+            <a:prstDash val="solid"/>
+          </a:ln>
+        </p:spPr>
+        <p:txBody>
+          <a:bodyPr/>
+          <a:lstStyle/>
+          <a:p>
+            <a:endParaRPr lang="en-ZA"/>
+          </a:p>
+        </p:txBody>
+      </p:sp>
+      <p:sp>
+        <p:nvSpPr>
+          <p:cNvPr id="19" name="Text 14"/>
+          <p:cNvSpPr txBox="1"/>
+          <p:nvPr/>
+        </p:nvSpPr>
+        <p:spPr>
+          <a:xfrm>
+            <a:off x="822960" y="5623560"/>
+            <a:ext cx="10607040" cy="777240"/>
+          </a:xfrm>
+          <a:prstGeom prst="rect">
+            <a:avLst/>
+          </a:prstGeom>
+          <a:noFill/>
+          <a:ln/>
+        </p:spPr>
+        <p:txBody>
+          <a:bodyPr wrap="square" lIns="0" tIns="0" rIns="0" bIns="0" rtlCol="0" anchor="ctr"/>
+          <a:lstStyle/>
+          <a:p>
+            <a:pPr marL="0" indent="0">
+              <a:buNone/>
+            </a:pPr>
+            <a:r>
+              <a:rPr lang="en-US" sz="2400" i="1" dirty="0">
+                <a:solidFill>
+                  <a:srgbClr val="FFFFFF"/>
+                </a:solidFill>
+                <a:latin typeface="Calibri" pitchFamily="34" charset="0"/>
+                <a:ea typeface="Calibri" pitchFamily="34" charset="-122"/>
+                <a:cs typeface="Calibri" pitchFamily="34" charset="-120"/>
+              </a:rPr>
+              <a:t>How results are achieved matters as much as what results are achieved.</a:t>
+            </a:r>
+            <a:endParaRPr lang="en-US" sz="2400" dirty="0"/>
+          </a:p>
+        </p:txBody>
+      </p:sp>
+    </p:spTree>
+  </p:cSld>
+  <p:clrMapOvr>
+    <a:masterClrMapping/>
+  </p:clrMapOvr>
+</p:sld>
+</file>
+
+<file path=ppt/slides/slide22.xml><?xml version="1.0" encoding="utf-8"?>
+<p:sld xmlns:a="http://schemas.openxmlformats.org/drawingml/2006/main" xmlns:p="http://schemas.openxmlformats.org/presentationml/2006/main" xmlns:r="http://schemas.openxmlformats.org/officeDocument/2006/relationships">
+  <p:cSld>
+    <p:spTree>
+      <p:nvGrpSpPr>
+        <p:cNvPr id="1" name=""/>
+        <p:cNvGrpSpPr/>
+        <p:nvPr/>
+      </p:nvGrpSpPr>
+      <p:grpSpPr/>
+      <p:sp>
+        <p:nvSpPr>
+          <p:cNvPr id="2" name="Text 0"/>
+          <p:cNvSpPr txBox="1"/>
+          <p:nvPr/>
+        </p:nvSpPr>
+        <p:spPr>
+          <a:xfrm>
+            <a:off x="548640" y="411480"/>
+            <a:ext cx="11064240" cy="868680"/>
+          </a:xfrm>
+          <a:prstGeom prst="rect">
+            <a:avLst/>
+          </a:prstGeom>
+          <a:noFill/>
+          <a:ln/>
+        </p:spPr>
+        <p:txBody>
+          <a:bodyPr wrap="square" lIns="0" tIns="0" rIns="0" bIns="0" rtlCol="0" anchor="ctr"/>
+          <a:lstStyle/>
+          <a:p>
+            <a:pPr marL="0" indent="0">
+              <a:buNone/>
+            </a:pPr>
+            <a:r>
+              <a:rPr lang="en-US" sz="3400" b="1" dirty="0">
+                <a:solidFill>
+                  <a:srgbClr val="1A5C2C"/>
+                </a:solidFill>
+                <a:latin typeface="Cambria" pitchFamily="34" charset="0"/>
+                <a:ea typeface="Cambria" pitchFamily="34" charset="-122"/>
+                <a:cs typeface="Cambria" pitchFamily="34" charset="-120"/>
+              </a:rPr>
+              <a:t>2.3b · Developing a performance scorecard</a:t>
+            </a:r>
+            <a:endParaRPr lang="en-US" sz="3600" dirty="0"/>
+          </a:p>
+        </p:txBody>
+      </p:sp>
+      <p:sp>
+        <p:nvSpPr>
+          <p:cNvPr id="3" name="Shape 1"/>
+          <p:cNvSpPr/>
+          <p:nvPr/>
+        </p:nvSpPr>
+        <p:spPr>
+          <a:xfrm>
+            <a:off x="548640" y="1677924"/>
+            <a:ext cx="640080" cy="640080"/>
+          </a:xfrm>
+          <a:prstGeom prst="ellipse">
+            <a:avLst/>
+          </a:prstGeom>
+          <a:solidFill>
+            <a:srgbClr val="1A5C2C"/>
+          </a:solidFill>
+          <a:ln w="12700">
+            <a:solidFill>
+              <a:srgbClr val="1A5C2C"/>
+            </a:solidFill>
+            <a:prstDash val="solid"/>
+          </a:ln>
+        </p:spPr>
+        <p:txBody>
+          <a:bodyPr/>
+          <a:lstStyle/>
+          <a:p>
+            <a:endParaRPr lang="en-ZA"/>
+          </a:p>
+        </p:txBody>
+      </p:sp>
+      <p:pic>
+        <p:nvPicPr>
+          <p:cNvPr id="4" name="Image 0" descr="preencoded.png"/>
+          <p:cNvPicPr>
+            <a:picLocks noChangeAspect="1"/>
+          </p:cNvPicPr>
+          <p:nvPr/>
+        </p:nvPicPr>
+        <p:blipFill>
+          <a:blip r:embed="rId2"/>
+          <a:stretch>
+            <a:fillRect/>
+          </a:stretch>
+        </p:blipFill>
+        <p:spPr>
+          <a:xfrm>
+            <a:off x="708660" y="1837944"/>
+            <a:ext cx="320040" cy="320040"/>
+          </a:xfrm>
+          <a:prstGeom prst="rect">
+            <a:avLst/>
+          </a:prstGeom>
+        </p:spPr>
+      </p:pic>
+      <p:sp>
+        <p:nvSpPr>
+          <p:cNvPr id="5" name="Text 2"/>
+          <p:cNvSpPr txBox="1"/>
+          <p:nvPr/>
+        </p:nvSpPr>
+        <p:spPr>
+          <a:xfrm>
+            <a:off x="1508760" y="1508760"/>
+            <a:ext cx="10131552" cy="978408"/>
+          </a:xfrm>
+          <a:prstGeom prst="rect">
+            <a:avLst/>
+          </a:prstGeom>
+          <a:noFill/>
+          <a:ln/>
+        </p:spPr>
+        <p:txBody>
+          <a:bodyPr wrap="square" lIns="0" tIns="0" rIns="0" bIns="0" rtlCol="0" anchor="ctr"/>
+          <a:lstStyle/>
+          <a:p>
+            <a:pPr marL="0" indent="0">
+              <a:buNone/>
+            </a:pPr>
+            <a:r>
+              <a:rPr lang="en-US" sz="2600" b="1" dirty="0">
+                <a:solidFill>
+                  <a:srgbClr val="1A5C2C"/>
+                </a:solidFill>
+                <a:latin typeface="Cambria" pitchFamily="34" charset="0"/>
+                <a:ea typeface="Cambria" pitchFamily="34" charset="-122"/>
+                <a:cs typeface="Cambria" pitchFamily="34" charset="-120"/>
+              </a:rPr>
+              <a:t>1  </a:t>
+            </a:r>
+            <a:r>
+              <a:rPr lang="en-US" sz="2600" dirty="0">
+                <a:solidFill>
+                  <a:srgbClr val="1F2A22"/>
+                </a:solidFill>
+                <a:latin typeface="Calibri" pitchFamily="34" charset="0"/>
+                <a:ea typeface="Calibri" pitchFamily="34" charset="-122"/>
+                <a:cs typeface="Calibri" pitchFamily="34" charset="-120"/>
+              </a:rPr>
+              <a:t>Start from the enterprise Key Results</a:t>
+            </a:r>
+            <a:endParaRPr lang="en-US" sz="2600" dirty="0"/>
+          </a:p>
+        </p:txBody>
+      </p:sp>
+      <p:sp>
+        <p:nvSpPr>
+          <p:cNvPr id="6" name="Shape 3"/>
+          <p:cNvSpPr/>
+          <p:nvPr/>
+        </p:nvSpPr>
+        <p:spPr>
+          <a:xfrm>
+            <a:off x="548640" y="2656332"/>
+            <a:ext cx="640080" cy="640080"/>
+          </a:xfrm>
+          <a:prstGeom prst="ellipse">
+            <a:avLst/>
+          </a:prstGeom>
+          <a:solidFill>
+            <a:srgbClr val="1A5C2C"/>
+          </a:solidFill>
+          <a:ln w="12700">
+            <a:solidFill>
+              <a:srgbClr val="1A5C2C"/>
+            </a:solidFill>
+            <a:prstDash val="solid"/>
+          </a:ln>
+        </p:spPr>
+        <p:txBody>
+          <a:bodyPr/>
+          <a:lstStyle/>
+          <a:p>
+            <a:endParaRPr lang="en-ZA"/>
+          </a:p>
+        </p:txBody>
+      </p:sp>
+      <p:pic>
+        <p:nvPicPr>
+          <p:cNvPr id="7" name="Image 1" descr="preencoded.png"/>
+          <p:cNvPicPr>
+            <a:picLocks noChangeAspect="1"/>
+          </p:cNvPicPr>
+          <p:nvPr/>
+        </p:nvPicPr>
+        <p:blipFill>
+          <a:blip r:embed="rId6"/>
+          <a:stretch>
+            <a:fillRect/>
+          </a:stretch>
+        </p:blipFill>
+        <p:spPr>
+          <a:xfrm>
+            <a:off x="708660" y="2816352"/>
+            <a:ext cx="320040" cy="320040"/>
+          </a:xfrm>
+          <a:prstGeom prst="rect">
+            <a:avLst/>
+          </a:prstGeom>
+        </p:spPr>
+      </p:pic>
+      <p:sp>
+        <p:nvSpPr>
+          <p:cNvPr id="8" name="Text 4"/>
+          <p:cNvSpPr txBox="1"/>
+          <p:nvPr/>
+        </p:nvSpPr>
+        <p:spPr>
+          <a:xfrm>
+            <a:off x="1508760" y="2487168"/>
+            <a:ext cx="10131552" cy="978408"/>
+          </a:xfrm>
+          <a:prstGeom prst="rect">
+            <a:avLst/>
+          </a:prstGeom>
+          <a:noFill/>
+          <a:ln/>
+        </p:spPr>
+        <p:txBody>
+          <a:bodyPr wrap="square" lIns="0" tIns="0" rIns="0" bIns="0" rtlCol="0" anchor="ctr"/>
+          <a:lstStyle/>
+          <a:p>
+            <a:pPr marL="0" indent="0">
+              <a:buNone/>
+            </a:pPr>
+            <a:r>
+              <a:rPr lang="en-US" sz="2600" b="1" dirty="0">
+                <a:solidFill>
+                  <a:srgbClr val="1A5C2C"/>
+                </a:solidFill>
+                <a:latin typeface="Cambria" pitchFamily="34" charset="0"/>
+                <a:ea typeface="Cambria" pitchFamily="34" charset="-122"/>
+                <a:cs typeface="Cambria" pitchFamily="34" charset="-120"/>
+              </a:rPr>
+              <a:t>2  </a:t>
+            </a:r>
+            <a:r>
+              <a:rPr lang="en-US" sz="2600" dirty="0">
+                <a:solidFill>
+                  <a:srgbClr val="1F2A22"/>
+                </a:solidFill>
+                <a:latin typeface="Calibri" pitchFamily="34" charset="0"/>
+                <a:ea typeface="Calibri" pitchFamily="34" charset="-122"/>
+                <a:cs typeface="Calibri" pitchFamily="34" charset="-120"/>
+              </a:rPr>
+              <a:t>Add the Operational KPIs</a:t>
+            </a:r>
+            <a:endParaRPr lang="en-US" sz="2600" dirty="0"/>
+          </a:p>
+        </p:txBody>
+      </p:sp>
+      <p:sp>
+        <p:nvSpPr>
+          <p:cNvPr id="9" name="Shape 5"/>
+          <p:cNvSpPr/>
+          <p:nvPr/>
+        </p:nvSpPr>
+        <p:spPr>
+          <a:xfrm>
+            <a:off x="548640" y="3634740"/>
+            <a:ext cx="640080" cy="640080"/>
+          </a:xfrm>
+          <a:prstGeom prst="ellipse">
+            <a:avLst/>
+          </a:prstGeom>
+          <a:solidFill>
+            <a:srgbClr val="1A5C2C"/>
+          </a:solidFill>
+          <a:ln w="12700">
+            <a:solidFill>
+              <a:srgbClr val="1A5C2C"/>
+            </a:solidFill>
+            <a:prstDash val="solid"/>
+          </a:ln>
+        </p:spPr>
+        <p:txBody>
+          <a:bodyPr/>
+          <a:lstStyle/>
+          <a:p>
+            <a:endParaRPr lang="en-ZA"/>
+          </a:p>
+        </p:txBody>
+      </p:sp>
+      <p:pic>
+        <p:nvPicPr>
+          <p:cNvPr id="10" name="Image 2" descr="preencoded.png"/>
+          <p:cNvPicPr>
+            <a:picLocks noChangeAspect="1"/>
+          </p:cNvPicPr>
+          <p:nvPr/>
+        </p:nvPicPr>
+        <p:blipFill>
+          <a:blip r:embed="rId5"/>
+          <a:stretch>
+            <a:fillRect/>
+          </a:stretch>
+        </p:blipFill>
+        <p:spPr>
+          <a:xfrm>
+            <a:off x="708660" y="3794760"/>
+            <a:ext cx="320040" cy="320040"/>
+          </a:xfrm>
+          <a:prstGeom prst="rect">
+            <a:avLst/>
+          </a:prstGeom>
+        </p:spPr>
+      </p:pic>
+      <p:sp>
+        <p:nvSpPr>
+          <p:cNvPr id="11" name="Text 6"/>
+          <p:cNvSpPr txBox="1"/>
+          <p:nvPr/>
+        </p:nvSpPr>
+        <p:spPr>
+          <a:xfrm>
+            <a:off x="1508760" y="3465576"/>
+            <a:ext cx="10131552" cy="978408"/>
+          </a:xfrm>
+          <a:prstGeom prst="rect">
+            <a:avLst/>
+          </a:prstGeom>
+          <a:noFill/>
+          <a:ln/>
+        </p:spPr>
+        <p:txBody>
+          <a:bodyPr wrap="square" lIns="0" tIns="0" rIns="0" bIns="0" rtlCol="0" anchor="ctr"/>
+          <a:lstStyle/>
+          <a:p>
+            <a:pPr marL="0" indent="0">
+              <a:buNone/>
+            </a:pPr>
+            <a:r>
+              <a:rPr lang="en-US" sz="2600" b="1" dirty="0">
+                <a:solidFill>
+                  <a:srgbClr val="1A5C2C"/>
+                </a:solidFill>
+                <a:latin typeface="Cambria" pitchFamily="34" charset="0"/>
+                <a:ea typeface="Cambria" pitchFamily="34" charset="-122"/>
+                <a:cs typeface="Cambria" pitchFamily="34" charset="-120"/>
+              </a:rPr>
+              <a:t>3  </a:t>
+            </a:r>
+            <a:r>
+              <a:rPr lang="en-US" sz="2600" dirty="0">
+                <a:solidFill>
+                  <a:srgbClr val="1F2A22"/>
+                </a:solidFill>
+                <a:latin typeface="Calibri" pitchFamily="34" charset="0"/>
+                <a:ea typeface="Calibri" pitchFamily="34" charset="-122"/>
+                <a:cs typeface="Calibri" pitchFamily="34" charset="-120"/>
+              </a:rPr>
+              <a:t>Add the Behavioural measures</a:t>
+            </a:r>
+            <a:endParaRPr lang="en-US" sz="2600" dirty="0"/>
+          </a:p>
+        </p:txBody>
+      </p:sp>
+      <p:sp>
+        <p:nvSpPr>
+          <p:cNvPr id="12" name="Shape 7"/>
+          <p:cNvSpPr/>
+          <p:nvPr/>
+        </p:nvSpPr>
+        <p:spPr>
+          <a:xfrm>
+            <a:off x="548640" y="4613148"/>
+            <a:ext cx="640080" cy="640080"/>
+          </a:xfrm>
+          <a:prstGeom prst="ellipse">
+            <a:avLst/>
+          </a:prstGeom>
+          <a:solidFill>
+            <a:srgbClr val="1A5C2C"/>
+          </a:solidFill>
+          <a:ln w="12700">
+            <a:solidFill>
+              <a:srgbClr val="1A5C2C"/>
+            </a:solidFill>
+            <a:prstDash val="solid"/>
+          </a:ln>
+        </p:spPr>
+        <p:txBody>
+          <a:bodyPr/>
+          <a:lstStyle/>
+          <a:p>
+            <a:endParaRPr lang="en-ZA"/>
+          </a:p>
+        </p:txBody>
+      </p:sp>
+      <p:pic>
+        <p:nvPicPr>
+          <p:cNvPr id="13" name="Image 3" descr="preencoded.png"/>
+          <p:cNvPicPr>
+            <a:picLocks noChangeAspect="1"/>
+          </p:cNvPicPr>
+          <p:nvPr/>
+        </p:nvPicPr>
+        <p:blipFill>
+          <a:blip r:embed="rId4"/>
+          <a:stretch>
+            <a:fillRect/>
+          </a:stretch>
+        </p:blipFill>
+        <p:spPr>
+          <a:xfrm>
+            <a:off x="708660" y="4773168"/>
+            <a:ext cx="320040" cy="320040"/>
+          </a:xfrm>
+          <a:prstGeom prst="rect">
+            <a:avLst/>
+          </a:prstGeom>
+        </p:spPr>
+      </p:pic>
+      <p:sp>
+        <p:nvSpPr>
+          <p:cNvPr id="14" name="Text 8"/>
+          <p:cNvSpPr txBox="1"/>
+          <p:nvPr/>
+        </p:nvSpPr>
+        <p:spPr>
+          <a:xfrm>
+            <a:off x="1508760" y="4443984"/>
+            <a:ext cx="10131552" cy="978408"/>
+          </a:xfrm>
+          <a:prstGeom prst="rect">
+            <a:avLst/>
+          </a:prstGeom>
+          <a:noFill/>
+          <a:ln/>
+        </p:spPr>
+        <p:txBody>
+          <a:bodyPr wrap="square" lIns="0" tIns="0" rIns="0" bIns="0" rtlCol="0" anchor="ctr"/>
+          <a:lstStyle/>
+          <a:p>
+            <a:pPr marL="0" indent="0">
+              <a:buNone/>
+            </a:pPr>
+            <a:r>
+              <a:rPr lang="en-US" sz="2600" b="1" dirty="0">
+                <a:solidFill>
+                  <a:srgbClr val="1A5C2C"/>
+                </a:solidFill>
+                <a:latin typeface="Cambria" pitchFamily="34" charset="0"/>
+                <a:ea typeface="Cambria" pitchFamily="34" charset="-122"/>
+                <a:cs typeface="Cambria" pitchFamily="34" charset="-120"/>
+              </a:rPr>
+              <a:t>4  </a:t>
+            </a:r>
+            <a:r>
+              <a:rPr lang="en-US" sz="2600" dirty="0">
+                <a:solidFill>
+                  <a:srgbClr val="1F2A22"/>
+                </a:solidFill>
+                <a:latin typeface="Calibri" pitchFamily="34" charset="0"/>
+                <a:ea typeface="Calibri" pitchFamily="34" charset="-122"/>
+                <a:cs typeface="Calibri" pitchFamily="34" charset="-120"/>
+              </a:rPr>
+              <a:t>Weight the three categories to 100%</a:t>
+            </a:r>
+            <a:endParaRPr lang="en-US" sz="2600" dirty="0"/>
+          </a:p>
+        </p:txBody>
+      </p:sp>
+      <p:sp>
+        <p:nvSpPr>
+          <p:cNvPr id="15" name="Shape 9"/>
+          <p:cNvSpPr/>
+          <p:nvPr/>
+        </p:nvSpPr>
+        <p:spPr>
+          <a:xfrm>
+            <a:off x="548640" y="5591556"/>
+            <a:ext cx="640080" cy="640080"/>
+          </a:xfrm>
+          <a:prstGeom prst="ellipse">
+            <a:avLst/>
+          </a:prstGeom>
+          <a:solidFill>
+            <a:srgbClr val="1A5C2C"/>
+          </a:solidFill>
+          <a:ln w="12700">
+            <a:solidFill>
+              <a:srgbClr val="1A5C2C"/>
+            </a:solidFill>
+            <a:prstDash val="solid"/>
+          </a:ln>
+        </p:spPr>
+        <p:txBody>
+          <a:bodyPr/>
+          <a:lstStyle/>
+          <a:p>
+            <a:endParaRPr lang="en-ZA"/>
+          </a:p>
+        </p:txBody>
+      </p:sp>
+      <p:pic>
+        <p:nvPicPr>
+          <p:cNvPr id="16" name="Image 4" descr="preencoded.png"/>
+          <p:cNvPicPr>
+            <a:picLocks noChangeAspect="1"/>
+          </p:cNvPicPr>
+          <p:nvPr/>
+        </p:nvPicPr>
+        <p:blipFill>
+          <a:blip r:embed="rId3"/>
+          <a:stretch>
+            <a:fillRect/>
+          </a:stretch>
+        </p:blipFill>
+        <p:spPr>
+          <a:xfrm>
+            <a:off x="708660" y="5751576"/>
+            <a:ext cx="320040" cy="320040"/>
+          </a:xfrm>
+          <a:prstGeom prst="rect">
+            <a:avLst/>
+          </a:prstGeom>
+        </p:spPr>
+      </p:pic>
+      <p:sp>
+        <p:nvSpPr>
+          <p:cNvPr id="17" name="Text 10"/>
+          <p:cNvSpPr txBox="1"/>
+          <p:nvPr/>
+        </p:nvSpPr>
+        <p:spPr>
+          <a:xfrm>
+            <a:off x="1508760" y="5422392"/>
+            <a:ext cx="10131552" cy="978408"/>
+          </a:xfrm>
+          <a:prstGeom prst="rect">
+            <a:avLst/>
+          </a:prstGeom>
+          <a:noFill/>
+          <a:ln/>
+        </p:spPr>
+        <p:txBody>
+          <a:bodyPr wrap="square" lIns="0" tIns="0" rIns="0" bIns="0" rtlCol="0" anchor="ctr"/>
+          <a:lstStyle/>
+          <a:p>
+            <a:pPr marL="0" indent="0">
+              <a:buNone/>
+            </a:pPr>
+            <a:r>
+              <a:rPr lang="en-US" sz="2600" b="1" dirty="0">
+                <a:solidFill>
+                  <a:srgbClr val="1A5C2C"/>
+                </a:solidFill>
+                <a:latin typeface="Cambria" pitchFamily="34" charset="0"/>
+                <a:ea typeface="Cambria" pitchFamily="34" charset="-122"/>
+                <a:cs typeface="Cambria" pitchFamily="34" charset="-120"/>
+              </a:rPr>
+              <a:t>5  </a:t>
+            </a:r>
+            <a:r>
+              <a:rPr lang="en-US" sz="2600" dirty="0">
+                <a:solidFill>
+                  <a:srgbClr val="1F2A22"/>
+                </a:solidFill>
+                <a:latin typeface="Calibri" pitchFamily="34" charset="0"/>
+                <a:ea typeface="Calibri" pitchFamily="34" charset="-122"/>
+                <a:cs typeface="Calibri" pitchFamily="34" charset="-120"/>
+              </a:rPr>
+              <a:t>Make it transparent to the role holder</a:t>
+            </a:r>
+            <a:endParaRPr lang="en-US" sz="2600" dirty="0"/>
+          </a:p>
+        </p:txBody>
+      </p:sp>
+    </p:spTree>
+  </p:cSld>
+  <p:clrMapOvr>
+    <a:masterClrMapping/>
+  </p:clrMapOvr>
+</p:sld>
+</file>
+
+<file path=ppt/slides/slide23.xml><?xml version="1.0" encoding="utf-8"?>
 <p:sld xmlns:a="http://schemas.openxmlformats.org/drawingml/2006/main" xmlns:r="http://schemas.openxmlformats.org/officeDocument/2006/relationships" xmlns:p="http://schemas.openxmlformats.org/presentationml/2006/main">
   <p:cSld name="Slide 15">
     <p:bg>
@@ -15066,7 +17287,7 @@
 </p:sld>
 </file>
 
-<file path=ppt/slides/slide22.xml><?xml version="1.0" encoding="utf-8"?>
+<file path=ppt/slides/slide24.xml><?xml version="1.0" encoding="utf-8"?>
 <p:sld xmlns:a="http://schemas.openxmlformats.org/drawingml/2006/main" xmlns:r="http://schemas.openxmlformats.org/officeDocument/2006/relationships" xmlns:p="http://schemas.openxmlformats.org/presentationml/2006/main">
   <p:cSld name="Slide 16">
     <p:bg>
@@ -15224,7 +17445,7 @@
 </p:sld>
 </file>
 
-<file path=ppt/slides/slide23.xml><?xml version="1.0" encoding="utf-8"?>
+<file path=ppt/slides/slide25.xml><?xml version="1.0" encoding="utf-8"?>
 <p:sld xmlns:a="http://schemas.openxmlformats.org/drawingml/2006/main" xmlns:p="http://schemas.openxmlformats.org/presentationml/2006/main" xmlns:r="http://schemas.openxmlformats.org/officeDocument/2006/relationships">
   <p:cSld>
     <p:bg>
@@ -16349,7 +18570,7 @@
 </p:sld>
 </file>
 
-<file path=ppt/slides/slide24.xml><?xml version="1.0" encoding="utf-8"?>
+<file path=ppt/slides/slide26.xml><?xml version="1.0" encoding="utf-8"?>
 <p:sld xmlns:a="http://schemas.openxmlformats.org/drawingml/2006/main" xmlns:r="http://schemas.openxmlformats.org/officeDocument/2006/relationships" xmlns:p="http://schemas.openxmlformats.org/presentationml/2006/main">
   <p:cSld name="Slide 19">
     <p:bg>
@@ -16838,587 +19059,6 @@
                 <a:cs typeface="Calibri" pitchFamily="34" charset="-120"/>
               </a:rPr>
               <a:t>From Individual to Team Performance</a:t>
-            </a:r>
-            <a:endParaRPr lang="en-US" sz="2400" dirty="0"/>
-          </a:p>
-        </p:txBody>
-      </p:sp>
-    </p:spTree>
-  </p:cSld>
-  <p:clrMapOvr>
-    <a:masterClrMapping/>
-  </p:clrMapOvr>
-</p:sld>
-</file>
-
-<file path=ppt/slides/slide25.xml><?xml version="1.0" encoding="utf-8"?>
-<p:sld xmlns:a="http://schemas.openxmlformats.org/drawingml/2006/main" xmlns:p="http://schemas.openxmlformats.org/presentationml/2006/main" xmlns:r="http://schemas.openxmlformats.org/officeDocument/2006/relationships">
-  <p:cSld>
-    <p:bg>
-      <p:bgPr>
-        <a:solidFill>
-          <a:srgbClr val="FFFFFF"/>
-        </a:solidFill>
-        <a:effectLst/>
-      </p:bgPr>
-    </p:bg>
-    <p:spTree>
-      <p:nvGrpSpPr>
-        <p:cNvPr id="1" name=""/>
-        <p:cNvGrpSpPr/>
-        <p:nvPr/>
-      </p:nvGrpSpPr>
-      <p:grpSpPr/>
-      <p:sp>
-        <p:nvSpPr>
-          <p:cNvPr id="2" name="Text 0"/>
-          <p:cNvSpPr txBox="1"/>
-          <p:nvPr/>
-        </p:nvSpPr>
-        <p:spPr>
-          <a:xfrm>
-            <a:off x="548640" y="411480"/>
-            <a:ext cx="11064240" cy="868680"/>
-          </a:xfrm>
-          <a:prstGeom prst="rect">
-            <a:avLst/>
-          </a:prstGeom>
-          <a:noFill/>
-          <a:ln/>
-        </p:spPr>
-        <p:txBody>
-          <a:bodyPr wrap="square" lIns="0" tIns="0" rIns="0" bIns="0" rtlCol="0" anchor="ctr"/>
-          <a:lstStyle/>
-          <a:p>
-            <a:pPr marL="0" marR="0" lvl="0" indent="0" algn="l" defTabSz="914400" rtl="0" eaLnBrk="1" fontAlgn="auto" latinLnBrk="0" hangingPunct="1">
-              <a:lnSpc>
-                <a:spcPct val="100000"/>
-              </a:lnSpc>
-              <a:spcBef>
-                <a:spcPts val="0"/>
-              </a:spcBef>
-              <a:spcAft>
-                <a:spcPts val="0"/>
-              </a:spcAft>
-              <a:buClrTx/>
-              <a:buSzTx/>
-              <a:buFontTx/>
-              <a:buNone/>
-              <a:tabLst/>
-              <a:defRPr/>
-            </a:pPr>
-            <a:r>
-              <a:rPr kumimoji="0" lang="en-US" sz="3600" b="1" i="0" u="none" strike="noStrike" kern="1200" cap="none" spc="0" normalizeH="0" baseline="0" noProof="0" dirty="0">
-                <a:ln>
-                  <a:noFill/>
-                </a:ln>
-                <a:solidFill>
-                  <a:srgbClr val="1A5C2C"/>
-                </a:solidFill>
-                <a:effectLst/>
-                <a:uLnTx/>
-                <a:uFillTx/>
-                <a:latin typeface="Cambria" pitchFamily="34" charset="0"/>
-                <a:ea typeface="Cambria" pitchFamily="34" charset="-122"/>
-                <a:cs typeface="Cambria" pitchFamily="34" charset="-120"/>
-              </a:rPr>
-              <a:t>Section 3 Reflections</a:t>
-            </a:r>
-            <a:endParaRPr kumimoji="0" lang="en-US" sz="3600" b="0" i="0" u="none" strike="noStrike" kern="1200" cap="none" spc="0" normalizeH="0" baseline="0" noProof="0" dirty="0">
-              <a:ln>
-                <a:noFill/>
-              </a:ln>
-              <a:solidFill>
-                <a:prstClr val="black"/>
-              </a:solidFill>
-              <a:effectLst/>
-              <a:uLnTx/>
-              <a:uFillTx/>
-              <a:latin typeface="Calibri" panose="020F0502020204030204"/>
-              <a:ea typeface="+mn-ea"/>
-              <a:cs typeface="+mn-cs"/>
-            </a:endParaRPr>
-          </a:p>
-        </p:txBody>
-      </p:sp>
-      <p:pic>
-        <p:nvPicPr>
-          <p:cNvPr id="3" name="Reflection 3.2" descr="ref_3.2.png"/>
-          <p:cNvPicPr>
-            <a:picLocks noChangeAspect="1"/>
-          </p:cNvPicPr>
-          <p:nvPr/>
-        </p:nvPicPr>
-        <p:blipFill>
-          <a:blip r:embed="rId4"/>
-          <a:stretch>
-            <a:fillRect/>
-          </a:stretch>
-        </p:blipFill>
-        <p:spPr>
-          <a:xfrm>
-            <a:off x="1691640" y="1463040"/>
-            <a:ext cx="10058400" cy="1066363"/>
-          </a:xfrm>
-          <a:prstGeom prst="rect">
-            <a:avLst/>
-          </a:prstGeom>
-        </p:spPr>
-      </p:pic>
-      <p:sp>
-        <p:nvSpPr>
-          <p:cNvPr id="4" name="Part 3.2"/>
-          <p:cNvSpPr/>
-          <p:nvPr/>
-        </p:nvSpPr>
-        <p:spPr>
-          <a:xfrm>
-            <a:off x="548640" y="1561881"/>
-            <a:ext cx="868680" cy="868680"/>
-          </a:xfrm>
-          <a:prstGeom prst="ellipse">
-            <a:avLst/>
-          </a:prstGeom>
-          <a:solidFill>
-            <a:srgbClr val="C6A24C"/>
-          </a:solidFill>
-          <a:ln>
-            <a:solidFill>
-              <a:srgbClr val="C6A24C"/>
-            </a:solidFill>
-          </a:ln>
-          <a:effectLst/>
-        </p:spPr>
-        <p:txBody>
-          <a:bodyPr wrap="none" lIns="0" tIns="0" rIns="0" bIns="0" rtlCol="0" anchor="ctr"/>
-          <a:lstStyle/>
-          <a:p>
-            <a:pPr algn="ctr"/>
-            <a:r>
-              <a:rPr lang="en-GB" sz="2400" b="1">
-                <a:solidFill>
-                  <a:srgbClr val="FFFFFF"/>
-                </a:solidFill>
-                <a:latin typeface="Calibri"/>
-              </a:rPr>
-              <a:t>3.2</a:t>
-            </a:r>
-          </a:p>
-        </p:txBody>
-      </p:sp>
-    </p:spTree>
-  </p:cSld>
-  <p:clrMapOvr>
-    <a:masterClrMapping/>
-  </p:clrMapOvr>
-</p:sld>
-</file>
-
-<file path=ppt/slides/slide26.xml><?xml version="1.0" encoding="utf-8"?>
-<p:sld xmlns:a="http://schemas.openxmlformats.org/drawingml/2006/main" xmlns:r="http://schemas.openxmlformats.org/officeDocument/2006/relationships" xmlns:p="http://schemas.openxmlformats.org/presentationml/2006/main">
-  <p:cSld name="Slide 20">
-    <p:bg>
-      <p:bgPr>
-        <a:solidFill>
-          <a:srgbClr val="1A5C2C"/>
-        </a:solidFill>
-        <a:effectLst/>
-      </p:bgPr>
-    </p:bg>
-    <p:spTree>
-      <p:nvGrpSpPr>
-        <p:cNvPr id="1" name=""/>
-        <p:cNvGrpSpPr/>
-        <p:nvPr/>
-      </p:nvGrpSpPr>
-      <p:grpSpPr>
-        <a:xfrm>
-          <a:off x="0" y="0"/>
-          <a:ext cx="0" cy="0"/>
-          <a:chOff x="0" y="0"/>
-          <a:chExt cx="0" cy="0"/>
-        </a:xfrm>
-      </p:grpSpPr>
-      <p:sp>
-        <p:nvSpPr>
-          <p:cNvPr id="2" name="Text 0"/>
-          <p:cNvSpPr txBox="1"/>
-          <p:nvPr/>
-        </p:nvSpPr>
-        <p:spPr>
-          <a:xfrm>
-            <a:off x="457200" y="822960"/>
-            <a:ext cx="2103120" cy="2194560"/>
-          </a:xfrm>
-          <a:prstGeom prst="rect">
-            <a:avLst/>
-          </a:prstGeom>
-          <a:noFill/>
-          <a:ln/>
-        </p:spPr>
-        <p:txBody>
-          <a:bodyPr wrap="square" lIns="0" tIns="0" rIns="0" bIns="0" rtlCol="0" anchor="t"/>
-          <a:lstStyle/>
-          <a:p>
-            <a:pPr marL="0" indent="0">
-              <a:buNone/>
-            </a:pPr>
-            <a:r>
-              <a:rPr lang="en-US" sz="15000" b="1" dirty="0">
-                <a:solidFill>
-                  <a:srgbClr val="C6A24C"/>
-                </a:solidFill>
-                <a:latin typeface="Cambria" pitchFamily="34" charset="0"/>
-                <a:ea typeface="Cambria" pitchFamily="34" charset="-122"/>
-                <a:cs typeface="Cambria" pitchFamily="34" charset="-120"/>
-              </a:rPr>
-              <a:t>4</a:t>
-            </a:r>
-            <a:endParaRPr lang="en-US" sz="15000" dirty="0"/>
-          </a:p>
-        </p:txBody>
-      </p:sp>
-      <p:sp>
-        <p:nvSpPr>
-          <p:cNvPr id="3" name="Text 1"/>
-          <p:cNvSpPr txBox="1"/>
-          <p:nvPr/>
-        </p:nvSpPr>
-        <p:spPr>
-          <a:xfrm>
-            <a:off x="2743200" y="914400"/>
-            <a:ext cx="8229600" cy="457200"/>
-          </a:xfrm>
-          <a:prstGeom prst="rect">
-            <a:avLst/>
-          </a:prstGeom>
-          <a:noFill/>
-          <a:ln/>
-        </p:spPr>
-        <p:txBody>
-          <a:bodyPr wrap="square" lIns="0" tIns="0" rIns="0" bIns="0" rtlCol="0" anchor="t"/>
-          <a:lstStyle/>
-          <a:p>
-            <a:pPr marL="0" indent="0">
-              <a:buNone/>
-            </a:pPr>
-            <a:r>
-              <a:rPr lang="en-US" sz="2400" b="1" dirty="0">
-                <a:solidFill>
-                  <a:srgbClr val="E6D3A0"/>
-                </a:solidFill>
-                <a:latin typeface="Calibri" pitchFamily="34" charset="0"/>
-                <a:ea typeface="Calibri" pitchFamily="34" charset="-122"/>
-                <a:cs typeface="Calibri" pitchFamily="34" charset="-120"/>
-              </a:rPr>
-              <a:t>Section 4</a:t>
-            </a:r>
-            <a:endParaRPr lang="en-US" sz="2400" dirty="0"/>
-          </a:p>
-        </p:txBody>
-      </p:sp>
-      <p:sp>
-        <p:nvSpPr>
-          <p:cNvPr id="4" name="Text 2"/>
-          <p:cNvSpPr txBox="1"/>
-          <p:nvPr/>
-        </p:nvSpPr>
-        <p:spPr>
-          <a:xfrm>
-            <a:off x="2743200" y="1371600"/>
-            <a:ext cx="8961120" cy="868680"/>
-          </a:xfrm>
-          <a:prstGeom prst="rect">
-            <a:avLst/>
-          </a:prstGeom>
-          <a:noFill/>
-          <a:ln/>
-        </p:spPr>
-        <p:txBody>
-          <a:bodyPr wrap="square" lIns="0" tIns="0" rIns="0" bIns="0" rtlCol="0" anchor="t"/>
-          <a:lstStyle/>
-          <a:p>
-            <a:pPr marL="0" indent="0">
-              <a:buNone/>
-            </a:pPr>
-            <a:r>
-              <a:rPr lang="en-US" sz="4400" b="1" dirty="0">
-                <a:solidFill>
-                  <a:srgbClr val="FFFFFF"/>
-                </a:solidFill>
-                <a:latin typeface="Cambria" pitchFamily="34" charset="0"/>
-                <a:ea typeface="Cambria" pitchFamily="34" charset="-122"/>
-                <a:cs typeface="Cambria" pitchFamily="34" charset="-120"/>
-              </a:rPr>
-              <a:t>Integration — Collective</a:t>
-            </a:r>
-            <a:endParaRPr lang="en-US" sz="4400" dirty="0"/>
-          </a:p>
-        </p:txBody>
-      </p:sp>
-      <p:sp>
-        <p:nvSpPr>
-          <p:cNvPr id="5" name="Text 3"/>
-          <p:cNvSpPr txBox="1"/>
-          <p:nvPr/>
-        </p:nvSpPr>
-        <p:spPr>
-          <a:xfrm>
-            <a:off x="2743200" y="2240280"/>
-            <a:ext cx="8961120" cy="868680"/>
-          </a:xfrm>
-          <a:prstGeom prst="rect">
-            <a:avLst/>
-          </a:prstGeom>
-          <a:noFill/>
-          <a:ln/>
-        </p:spPr>
-        <p:txBody>
-          <a:bodyPr wrap="square" lIns="0" tIns="0" rIns="0" bIns="0" rtlCol="0" anchor="t"/>
-          <a:lstStyle/>
-          <a:p>
-            <a:pPr marL="0" indent="0">
-              <a:buNone/>
-            </a:pPr>
-            <a:r>
-              <a:rPr lang="en-US" sz="2600" i="1" dirty="0">
-                <a:solidFill>
-                  <a:srgbClr val="DDE8DF"/>
-                </a:solidFill>
-                <a:latin typeface="Calibri" pitchFamily="34" charset="0"/>
-                <a:ea typeface="Calibri" pitchFamily="34" charset="-122"/>
-                <a:cs typeface="Calibri" pitchFamily="34" charset="-120"/>
-              </a:rPr>
-              <a:t>Integration of Human and Organisational Performance</a:t>
-            </a:r>
-            <a:endParaRPr lang="en-US" sz="2600" dirty="0"/>
-          </a:p>
-        </p:txBody>
-      </p:sp>
-      <p:sp>
-        <p:nvSpPr>
-          <p:cNvPr id="6" name="Text 4"/>
-          <p:cNvSpPr txBox="1"/>
-          <p:nvPr/>
-        </p:nvSpPr>
-        <p:spPr>
-          <a:xfrm>
-            <a:off x="2743200" y="3246120"/>
-            <a:ext cx="8229600" cy="457200"/>
-          </a:xfrm>
-          <a:prstGeom prst="rect">
-            <a:avLst/>
-          </a:prstGeom>
-          <a:noFill/>
-          <a:ln/>
-        </p:spPr>
-        <p:txBody>
-          <a:bodyPr wrap="square" lIns="0" tIns="0" rIns="0" bIns="0" rtlCol="0" anchor="t"/>
-          <a:lstStyle/>
-          <a:p>
-            <a:pPr marL="0" indent="0">
-              <a:buNone/>
-            </a:pPr>
-            <a:r>
-              <a:rPr lang="en-US" sz="2400" b="1" dirty="0">
-                <a:solidFill>
-                  <a:srgbClr val="C6A24C"/>
-                </a:solidFill>
-                <a:latin typeface="Calibri" pitchFamily="34" charset="0"/>
-                <a:ea typeface="Calibri" pitchFamily="34" charset="-122"/>
-                <a:cs typeface="Calibri" pitchFamily="34" charset="-120"/>
-              </a:rPr>
-              <a:t>Section learning outcomes</a:t>
-            </a:r>
-            <a:endParaRPr lang="en-US" sz="2400" dirty="0"/>
-          </a:p>
-        </p:txBody>
-      </p:sp>
-      <p:sp>
-        <p:nvSpPr>
-          <p:cNvPr id="7" name="Shape 5"/>
-          <p:cNvSpPr/>
-          <p:nvPr/>
-        </p:nvSpPr>
-        <p:spPr>
-          <a:xfrm>
-            <a:off x="2743200" y="3822192"/>
-            <a:ext cx="384048" cy="384048"/>
-          </a:xfrm>
-          <a:prstGeom prst="ellipse">
-            <a:avLst/>
-          </a:prstGeom>
-          <a:solidFill>
-            <a:srgbClr val="C6A24C"/>
-          </a:solidFill>
-          <a:ln w="12700">
-            <a:solidFill>
-              <a:srgbClr val="C6A24C"/>
-            </a:solidFill>
-            <a:prstDash val="solid"/>
-          </a:ln>
-        </p:spPr>
-        <p:txBody>
-          <a:bodyPr/>
-          <a:lstStyle/>
-          <a:p>
-            <a:endParaRPr lang="en-ZA"/>
-          </a:p>
-        </p:txBody>
-      </p:sp>
-      <p:pic>
-        <p:nvPicPr>
-          <p:cNvPr id="8" name="Image 0" descr="preencoded.png"/>
-          <p:cNvPicPr>
-            <a:picLocks noChangeAspect="1"/>
-          </p:cNvPicPr>
-          <p:nvPr/>
-        </p:nvPicPr>
-        <p:blipFill>
-          <a:blip r:embed="rId3"/>
-          <a:stretch>
-            <a:fillRect/>
-          </a:stretch>
-        </p:blipFill>
-        <p:spPr>
-          <a:xfrm>
-            <a:off x="2839212" y="3918204"/>
-            <a:ext cx="192024" cy="192024"/>
-          </a:xfrm>
-          <a:prstGeom prst="rect">
-            <a:avLst/>
-          </a:prstGeom>
-        </p:spPr>
-      </p:pic>
-      <p:sp>
-        <p:nvSpPr>
-          <p:cNvPr id="9" name="Text 6"/>
-          <p:cNvSpPr txBox="1"/>
-          <p:nvPr/>
-        </p:nvSpPr>
-        <p:spPr>
-          <a:xfrm>
-            <a:off x="3291840" y="3749040"/>
-            <a:ext cx="8412480" cy="1097280"/>
-          </a:xfrm>
-          <a:prstGeom prst="rect">
-            <a:avLst/>
-          </a:prstGeom>
-          <a:noFill/>
-          <a:ln/>
-        </p:spPr>
-        <p:txBody>
-          <a:bodyPr wrap="square" lIns="0" tIns="0" rIns="0" bIns="0" rtlCol="0" anchor="t"/>
-          <a:lstStyle/>
-          <a:p>
-            <a:pPr marL="0" indent="0">
-              <a:buNone/>
-            </a:pPr>
-            <a:r>
-              <a:rPr lang="en-US" sz="2400" dirty="0">
-                <a:solidFill>
-                  <a:srgbClr val="FFFFFF"/>
-                </a:solidFill>
-                <a:latin typeface="Calibri" pitchFamily="34" charset="0"/>
-                <a:ea typeface="Calibri" pitchFamily="34" charset="-122"/>
-                <a:cs typeface="Calibri" pitchFamily="34" charset="-120"/>
-              </a:rPr>
-              <a:t>Map the functional, human and organisational contributions required for enterprise results.</a:t>
-            </a:r>
-            <a:endParaRPr lang="en-US" sz="2400" dirty="0"/>
-          </a:p>
-        </p:txBody>
-      </p:sp>
-      <p:sp>
-        <p:nvSpPr>
-          <p:cNvPr id="10" name="Shape 7"/>
-          <p:cNvSpPr/>
-          <p:nvPr/>
-        </p:nvSpPr>
-        <p:spPr>
-          <a:xfrm>
-            <a:off x="2743200" y="5010912"/>
-            <a:ext cx="384048" cy="384048"/>
-          </a:xfrm>
-          <a:prstGeom prst="ellipse">
-            <a:avLst/>
-          </a:prstGeom>
-          <a:solidFill>
-            <a:srgbClr val="C6A24C"/>
-          </a:solidFill>
-          <a:ln w="12700">
-            <a:solidFill>
-              <a:srgbClr val="C6A24C"/>
-            </a:solidFill>
-            <a:prstDash val="solid"/>
-          </a:ln>
-        </p:spPr>
-        <p:txBody>
-          <a:bodyPr/>
-          <a:lstStyle/>
-          <a:p>
-            <a:endParaRPr lang="en-ZA"/>
-          </a:p>
-        </p:txBody>
-      </p:sp>
-      <p:pic>
-        <p:nvPicPr>
-          <p:cNvPr id="11" name="Image 1" descr="preencoded.png"/>
-          <p:cNvPicPr>
-            <a:picLocks noChangeAspect="1"/>
-          </p:cNvPicPr>
-          <p:nvPr/>
-        </p:nvPicPr>
-        <p:blipFill>
-          <a:blip r:embed="rId3"/>
-          <a:stretch>
-            <a:fillRect/>
-          </a:stretch>
-        </p:blipFill>
-        <p:spPr>
-          <a:xfrm>
-            <a:off x="2839212" y="5106924"/>
-            <a:ext cx="192024" cy="192024"/>
-          </a:xfrm>
-          <a:prstGeom prst="rect">
-            <a:avLst/>
-          </a:prstGeom>
-        </p:spPr>
-      </p:pic>
-      <p:sp>
-        <p:nvSpPr>
-          <p:cNvPr id="12" name="Text 8"/>
-          <p:cNvSpPr txBox="1"/>
-          <p:nvPr/>
-        </p:nvSpPr>
-        <p:spPr>
-          <a:xfrm>
-            <a:off x="3291840" y="4937760"/>
-            <a:ext cx="8412480" cy="1097280"/>
-          </a:xfrm>
-          <a:prstGeom prst="rect">
-            <a:avLst/>
-          </a:prstGeom>
-          <a:noFill/>
-          <a:ln/>
-        </p:spPr>
-        <p:txBody>
-          <a:bodyPr wrap="square" lIns="0" tIns="0" rIns="0" bIns="0" rtlCol="0" anchor="t"/>
-          <a:lstStyle/>
-          <a:p>
-            <a:pPr marL="0" indent="0">
-              <a:buNone/>
-            </a:pPr>
-            <a:r>
-              <a:rPr lang="en-US" sz="2400" dirty="0">
-                <a:solidFill>
-                  <a:srgbClr val="FFFFFF"/>
-                </a:solidFill>
-                <a:latin typeface="Calibri" pitchFamily="34" charset="0"/>
-                <a:ea typeface="Calibri" pitchFamily="34" charset="-122"/>
-                <a:cs typeface="Calibri" pitchFamily="34" charset="-120"/>
-              </a:rPr>
-              <a:t>Coordinate cross-functional contributions and enabling conditions towards shared results.</a:t>
             </a:r>
             <a:endParaRPr lang="en-US" sz="2400" dirty="0"/>
           </a:p>
@@ -17471,271 +19111,60 @@
           <a:bodyPr wrap="square" lIns="0" tIns="0" rIns="0" bIns="0" rtlCol="0" anchor="ctr"/>
           <a:lstStyle/>
           <a:p>
-            <a:pPr marL="0" indent="0">
+            <a:pPr marL="0" marR="0" lvl="0" indent="0" algn="l" defTabSz="914400" rtl="0" eaLnBrk="1" fontAlgn="auto" latinLnBrk="0" hangingPunct="1">
+              <a:lnSpc>
+                <a:spcPct val="100000"/>
+              </a:lnSpc>
+              <a:spcBef>
+                <a:spcPts val="0"/>
+              </a:spcBef>
+              <a:spcAft>
+                <a:spcPts val="0"/>
+              </a:spcAft>
+              <a:buClrTx/>
+              <a:buSzTx/>
+              <a:buFontTx/>
               <a:buNone/>
+              <a:tabLst/>
+              <a:defRPr/>
             </a:pPr>
             <a:r>
-              <a:rPr lang="en-US" sz="3600" b="1" dirty="0">
+              <a:rPr kumimoji="0" lang="en-US" sz="3600" b="1" i="0" u="none" strike="noStrike" kern="1200" cap="none" spc="0" normalizeH="0" baseline="0" noProof="0" dirty="0">
+                <a:ln>
+                  <a:noFill/>
+                </a:ln>
                 <a:solidFill>
                   <a:srgbClr val="1A5C2C"/>
                 </a:solidFill>
+                <a:effectLst/>
+                <a:uLnTx/>
+                <a:uFillTx/>
                 <a:latin typeface="Cambria" pitchFamily="34" charset="0"/>
                 <a:ea typeface="Cambria" pitchFamily="34" charset="-122"/>
                 <a:cs typeface="Cambria" pitchFamily="34" charset="-120"/>
               </a:rPr>
-              <a:t>4.1 · Mapping the contributions: customer service</a:t>
-            </a:r>
-            <a:endParaRPr lang="en-US" sz="3600" dirty="0"/>
-          </a:p>
-        </p:txBody>
-      </p:sp>
-      <p:sp>
-        <p:nvSpPr>
-          <p:cNvPr id="3" name="Shape 1"/>
-          <p:cNvSpPr/>
-          <p:nvPr/>
-        </p:nvSpPr>
-        <p:spPr>
-          <a:xfrm>
-            <a:off x="548640" y="1677924"/>
-            <a:ext cx="640080" cy="640080"/>
-          </a:xfrm>
-          <a:prstGeom prst="ellipse">
-            <a:avLst/>
-          </a:prstGeom>
-          <a:solidFill>
-            <a:srgbClr val="1A5C2C"/>
-          </a:solidFill>
-          <a:ln w="12700">
-            <a:solidFill>
-              <a:srgbClr val="1A5C2C"/>
-            </a:solidFill>
-            <a:prstDash val="solid"/>
-          </a:ln>
-        </p:spPr>
-        <p:txBody>
-          <a:bodyPr/>
-          <a:lstStyle/>
-          <a:p>
-            <a:endParaRPr lang="en-ZA"/>
+              <a:t>Section 3 Reflections</a:t>
+            </a:r>
+            <a:endParaRPr kumimoji="0" lang="en-US" sz="3600" b="0" i="0" u="none" strike="noStrike" kern="1200" cap="none" spc="0" normalizeH="0" baseline="0" noProof="0" dirty="0">
+              <a:ln>
+                <a:noFill/>
+              </a:ln>
+              <a:solidFill>
+                <a:prstClr val="black"/>
+              </a:solidFill>
+              <a:effectLst/>
+              <a:uLnTx/>
+              <a:uFillTx/>
+              <a:latin typeface="Calibri" panose="020F0502020204030204"/>
+              <a:ea typeface="+mn-ea"/>
+              <a:cs typeface="+mn-cs"/>
+            </a:endParaRPr>
           </a:p>
         </p:txBody>
       </p:sp>
       <p:pic>
         <p:nvPicPr>
-          <p:cNvPr id="4" name="Image 0" descr="preencoded.png"/>
-          <p:cNvPicPr>
-            <a:picLocks noChangeAspect="1"/>
-          </p:cNvPicPr>
-          <p:nvPr/>
-        </p:nvPicPr>
-        <p:blipFill>
-          <a:blip r:embed="rId2"/>
-          <a:stretch>
-            <a:fillRect/>
-          </a:stretch>
-        </p:blipFill>
-        <p:spPr>
-          <a:xfrm>
-            <a:off x="708660" y="1837944"/>
-            <a:ext cx="320040" cy="320040"/>
-          </a:xfrm>
-          <a:prstGeom prst="rect">
-            <a:avLst/>
-          </a:prstGeom>
-        </p:spPr>
-      </p:pic>
-      <p:sp>
-        <p:nvSpPr>
-          <p:cNvPr id="5" name="Text 2"/>
-          <p:cNvSpPr txBox="1"/>
-          <p:nvPr/>
-        </p:nvSpPr>
-        <p:spPr>
-          <a:xfrm>
-            <a:off x="1508760" y="1508760"/>
-            <a:ext cx="10131552" cy="978408"/>
-          </a:xfrm>
-          <a:prstGeom prst="rect">
-            <a:avLst/>
-          </a:prstGeom>
-          <a:noFill/>
-          <a:ln/>
-        </p:spPr>
-        <p:txBody>
-          <a:bodyPr wrap="square" lIns="0" tIns="0" rIns="0" bIns="0" rtlCol="0" anchor="ctr"/>
-          <a:lstStyle/>
-          <a:p>
-            <a:pPr marL="0" indent="0">
-              <a:buNone/>
-            </a:pPr>
-            <a:r>
-              <a:rPr lang="en-US" sz="2600" b="1" dirty="0">
-                <a:solidFill>
-                  <a:srgbClr val="1A5C2C"/>
-                </a:solidFill>
-                <a:latin typeface="Cambria" pitchFamily="34" charset="0"/>
-                <a:ea typeface="Cambria" pitchFamily="34" charset="-122"/>
-                <a:cs typeface="Cambria" pitchFamily="34" charset="-120"/>
-              </a:rPr>
-              <a:t>Customer Service  </a:t>
-            </a:r>
-            <a:r>
-              <a:rPr lang="en-US" sz="2600" dirty="0">
-                <a:solidFill>
-                  <a:srgbClr val="1F2A22"/>
-                </a:solidFill>
-                <a:latin typeface="Calibri" pitchFamily="34" charset="0"/>
-                <a:ea typeface="Calibri" pitchFamily="34" charset="-122"/>
-                <a:cs typeface="Calibri" pitchFamily="34" charset="-120"/>
-              </a:rPr>
-              <a:t>resolve enquiries within 48 hours</a:t>
-            </a:r>
-            <a:endParaRPr lang="en-US" sz="2600" dirty="0"/>
-          </a:p>
-        </p:txBody>
-      </p:sp>
-      <p:sp>
-        <p:nvSpPr>
-          <p:cNvPr id="6" name="Shape 3"/>
-          <p:cNvSpPr/>
-          <p:nvPr/>
-        </p:nvSpPr>
-        <p:spPr>
-          <a:xfrm>
-            <a:off x="548640" y="2656332"/>
-            <a:ext cx="640080" cy="640080"/>
-          </a:xfrm>
-          <a:prstGeom prst="ellipse">
-            <a:avLst/>
-          </a:prstGeom>
-          <a:solidFill>
-            <a:srgbClr val="1A5C2C"/>
-          </a:solidFill>
-          <a:ln w="12700">
-            <a:solidFill>
-              <a:srgbClr val="1A5C2C"/>
-            </a:solidFill>
-            <a:prstDash val="solid"/>
-          </a:ln>
-        </p:spPr>
-        <p:txBody>
-          <a:bodyPr/>
-          <a:lstStyle/>
-          <a:p>
-            <a:endParaRPr lang="en-ZA"/>
-          </a:p>
-        </p:txBody>
-      </p:sp>
-      <p:pic>
-        <p:nvPicPr>
-          <p:cNvPr id="7" name="Image 1" descr="preencoded.png"/>
-          <p:cNvPicPr>
-            <a:picLocks noChangeAspect="1"/>
-          </p:cNvPicPr>
-          <p:nvPr/>
-        </p:nvPicPr>
-        <p:blipFill>
-          <a:blip r:embed="rId3"/>
-          <a:stretch>
-            <a:fillRect/>
-          </a:stretch>
-        </p:blipFill>
-        <p:spPr>
-          <a:xfrm>
-            <a:off x="708660" y="2816352"/>
-            <a:ext cx="320040" cy="320040"/>
-          </a:xfrm>
-          <a:prstGeom prst="rect">
-            <a:avLst/>
-          </a:prstGeom>
-        </p:spPr>
-      </p:pic>
-      <p:sp>
-        <p:nvSpPr>
-          <p:cNvPr id="8" name="Text 4"/>
-          <p:cNvSpPr txBox="1"/>
-          <p:nvPr/>
-        </p:nvSpPr>
-        <p:spPr>
-          <a:xfrm>
-            <a:off x="1508760" y="2487168"/>
-            <a:ext cx="10131552" cy="978408"/>
-          </a:xfrm>
-          <a:prstGeom prst="rect">
-            <a:avLst/>
-          </a:prstGeom>
-          <a:noFill/>
-          <a:ln/>
-        </p:spPr>
-        <p:txBody>
-          <a:bodyPr wrap="square" lIns="0" tIns="0" rIns="0" bIns="0" rtlCol="0" anchor="ctr"/>
-          <a:lstStyle/>
-          <a:p>
-            <a:pPr marL="0" indent="0">
-              <a:buNone/>
-            </a:pPr>
-            <a:r>
-              <a:rPr lang="en-US" sz="2600" b="1" dirty="0">
-                <a:solidFill>
-                  <a:srgbClr val="1A5C2C"/>
-                </a:solidFill>
-                <a:latin typeface="Cambria" pitchFamily="34" charset="0"/>
-                <a:ea typeface="Cambria" pitchFamily="34" charset="-122"/>
-                <a:cs typeface="Cambria" pitchFamily="34" charset="-120"/>
-              </a:rPr>
-              <a:t>IT  </a:t>
-            </a:r>
-            <a:r>
-              <a:rPr lang="en-US" sz="2600" dirty="0">
-                <a:solidFill>
-                  <a:srgbClr val="1F2A22"/>
-                </a:solidFill>
-                <a:latin typeface="Calibri" pitchFamily="34" charset="0"/>
-                <a:ea typeface="Calibri" pitchFamily="34" charset="-122"/>
-                <a:cs typeface="Calibri" pitchFamily="34" charset="-120"/>
-              </a:rPr>
-              <a:t>reliable customer management systems</a:t>
-            </a:r>
-            <a:endParaRPr lang="en-US" sz="2600" dirty="0"/>
-          </a:p>
-        </p:txBody>
-      </p:sp>
-      <p:sp>
-        <p:nvSpPr>
-          <p:cNvPr id="9" name="Shape 5"/>
-          <p:cNvSpPr/>
-          <p:nvPr/>
-        </p:nvSpPr>
-        <p:spPr>
-          <a:xfrm>
-            <a:off x="548640" y="3634740"/>
-            <a:ext cx="640080" cy="640080"/>
-          </a:xfrm>
-          <a:prstGeom prst="ellipse">
-            <a:avLst/>
-          </a:prstGeom>
-          <a:solidFill>
-            <a:srgbClr val="1A5C2C"/>
-          </a:solidFill>
-          <a:ln w="12700">
-            <a:solidFill>
-              <a:srgbClr val="1A5C2C"/>
-            </a:solidFill>
-            <a:prstDash val="solid"/>
-          </a:ln>
-        </p:spPr>
-        <p:txBody>
-          <a:bodyPr/>
-          <a:lstStyle/>
-          <a:p>
-            <a:endParaRPr lang="en-ZA"/>
-          </a:p>
-        </p:txBody>
-      </p:sp>
-      <p:pic>
-        <p:nvPicPr>
-          <p:cNvPr id="10" name="Image 2" descr="preencoded.png"/>
+          <p:cNvPr id="3" name="Reflection 3.2" descr="ref_3.2.png"/>
           <p:cNvPicPr>
             <a:picLocks noChangeAspect="1"/>
           </p:cNvPicPr>
@@ -17749,8 +19178,8 @@
         </p:blipFill>
         <p:spPr>
           <a:xfrm>
-            <a:off x="708660" y="3794760"/>
-            <a:ext cx="320040" cy="320040"/>
+            <a:off x="1691640" y="1463040"/>
+            <a:ext cx="10058400" cy="1066363"/>
           </a:xfrm>
           <a:prstGeom prst="rect">
             <a:avLst/>
@@ -17759,230 +19188,42 @@
       </p:pic>
       <p:sp>
         <p:nvSpPr>
-          <p:cNvPr id="11" name="Text 6"/>
-          <p:cNvSpPr txBox="1"/>
-          <p:nvPr/>
-        </p:nvSpPr>
-        <p:spPr>
-          <a:xfrm>
-            <a:off x="1508760" y="3465576"/>
-            <a:ext cx="10131552" cy="978408"/>
-          </a:xfrm>
-          <a:prstGeom prst="rect">
-            <a:avLst/>
-          </a:prstGeom>
-          <a:noFill/>
-          <a:ln/>
-        </p:spPr>
-        <p:txBody>
-          <a:bodyPr wrap="square" lIns="0" tIns="0" rIns="0" bIns="0" rtlCol="0" anchor="ctr"/>
-          <a:lstStyle/>
-          <a:p>
-            <a:pPr marL="0" indent="0">
-              <a:buNone/>
-            </a:pPr>
-            <a:r>
-              <a:rPr lang="en-US" sz="2600" b="1" dirty="0">
-                <a:solidFill>
-                  <a:srgbClr val="1A5C2C"/>
-                </a:solidFill>
-                <a:latin typeface="Cambria" pitchFamily="34" charset="0"/>
-                <a:ea typeface="Cambria" pitchFamily="34" charset="-122"/>
-                <a:cs typeface="Cambria" pitchFamily="34" charset="-120"/>
-              </a:rPr>
-              <a:t>Operations  </a:t>
-            </a:r>
-            <a:r>
-              <a:rPr lang="en-US" sz="2600" dirty="0">
-                <a:solidFill>
-                  <a:srgbClr val="1F2A22"/>
-                </a:solidFill>
-                <a:latin typeface="Calibri" pitchFamily="34" charset="0"/>
-                <a:ea typeface="Calibri" pitchFamily="34" charset="-122"/>
-                <a:cs typeface="Calibri" pitchFamily="34" charset="-120"/>
-              </a:rPr>
-              <a:t>processing and approvals in time</a:t>
-            </a:r>
-            <a:endParaRPr lang="en-US" sz="2600" dirty="0"/>
-          </a:p>
-        </p:txBody>
-      </p:sp>
-      <p:sp>
-        <p:nvSpPr>
-          <p:cNvPr id="12" name="Shape 7"/>
+          <p:cNvPr id="4" name="Part 3.2"/>
           <p:cNvSpPr/>
           <p:nvPr/>
         </p:nvSpPr>
         <p:spPr>
           <a:xfrm>
-            <a:off x="548640" y="4613148"/>
-            <a:ext cx="640080" cy="640080"/>
+            <a:off x="548640" y="1561881"/>
+            <a:ext cx="868680" cy="868680"/>
           </a:xfrm>
           <a:prstGeom prst="ellipse">
             <a:avLst/>
           </a:prstGeom>
           <a:solidFill>
-            <a:srgbClr val="1A5C2C"/>
+            <a:srgbClr val="C6A24C"/>
           </a:solidFill>
-          <a:ln w="12700">
+          <a:ln>
             <a:solidFill>
-              <a:srgbClr val="1A5C2C"/>
+              <a:srgbClr val="C6A24C"/>
             </a:solidFill>
-            <a:prstDash val="solid"/>
           </a:ln>
-        </p:spPr>
-        <p:txBody>
-          <a:bodyPr/>
-          <a:lstStyle/>
-          <a:p>
-            <a:endParaRPr lang="en-ZA"/>
-          </a:p>
-        </p:txBody>
-      </p:sp>
-      <p:pic>
-        <p:nvPicPr>
-          <p:cNvPr id="13" name="Image 3" descr="preencoded.png"/>
-          <p:cNvPicPr>
-            <a:picLocks noChangeAspect="1"/>
-          </p:cNvPicPr>
-          <p:nvPr/>
-        </p:nvPicPr>
-        <p:blipFill>
-          <a:blip r:embed="rId5"/>
-          <a:stretch>
-            <a:fillRect/>
-          </a:stretch>
-        </p:blipFill>
-        <p:spPr>
-          <a:xfrm>
-            <a:off x="708660" y="4773168"/>
-            <a:ext cx="320040" cy="320040"/>
-          </a:xfrm>
-          <a:prstGeom prst="rect">
-            <a:avLst/>
-          </a:prstGeom>
-        </p:spPr>
-      </p:pic>
-      <p:sp>
-        <p:nvSpPr>
-          <p:cNvPr id="14" name="Text 8"/>
-          <p:cNvSpPr txBox="1"/>
-          <p:nvPr/>
-        </p:nvSpPr>
-        <p:spPr>
-          <a:xfrm>
-            <a:off x="1508760" y="4443984"/>
-            <a:ext cx="10131552" cy="978408"/>
-          </a:xfrm>
-          <a:prstGeom prst="rect">
-            <a:avLst/>
-          </a:prstGeom>
-          <a:noFill/>
-          <a:ln/>
-        </p:spPr>
-        <p:txBody>
-          <a:bodyPr wrap="square" lIns="0" tIns="0" rIns="0" bIns="0" rtlCol="0" anchor="ctr"/>
-          <a:lstStyle/>
-          <a:p>
-            <a:pPr marL="0" indent="0">
-              <a:buNone/>
-            </a:pPr>
-            <a:r>
-              <a:rPr lang="en-US" sz="2600" b="1" dirty="0">
-                <a:solidFill>
-                  <a:srgbClr val="1A5C2C"/>
-                </a:solidFill>
-                <a:latin typeface="Cambria" pitchFamily="34" charset="0"/>
-                <a:ea typeface="Cambria" pitchFamily="34" charset="-122"/>
-                <a:cs typeface="Cambria" pitchFamily="34" charset="-120"/>
-              </a:rPr>
-              <a:t>Workforce Planning  </a:t>
-            </a:r>
-            <a:r>
-              <a:rPr lang="en-US" sz="2600" dirty="0">
-                <a:solidFill>
-                  <a:srgbClr val="1F2A22"/>
-                </a:solidFill>
-                <a:latin typeface="Calibri" pitchFamily="34" charset="0"/>
-                <a:ea typeface="Calibri" pitchFamily="34" charset="-122"/>
-                <a:cs typeface="Calibri" pitchFamily="34" charset="-120"/>
-              </a:rPr>
-              <a:t>enough staffing capacity</a:t>
-            </a:r>
-            <a:endParaRPr lang="en-US" sz="2600" dirty="0"/>
-          </a:p>
-        </p:txBody>
-      </p:sp>
-      <p:sp>
-        <p:nvSpPr>
-          <p:cNvPr id="18" name="Shape 13"/>
-          <p:cNvSpPr/>
-          <p:nvPr/>
-        </p:nvSpPr>
-        <p:spPr>
-          <a:xfrm>
-            <a:off x="548640" y="5623560"/>
-            <a:ext cx="11091672" cy="777240"/>
-          </a:xfrm>
-          <a:prstGeom prst="roundRect">
-            <a:avLst>
-              <a:gd name="adj" fmla="val 11765"/>
-            </a:avLst>
-          </a:prstGeom>
-          <a:solidFill>
-            <a:srgbClr val="0F3B1C"/>
-          </a:solidFill>
-          <a:ln w="12700">
-            <a:solidFill>
-              <a:srgbClr val="0F3B1C"/>
-            </a:solidFill>
-            <a:prstDash val="solid"/>
-          </a:ln>
-        </p:spPr>
-        <p:txBody>
-          <a:bodyPr/>
-          <a:lstStyle/>
-          <a:p>
-            <a:endParaRPr lang="en-ZA"/>
-          </a:p>
-        </p:txBody>
-      </p:sp>
-      <p:sp>
-        <p:nvSpPr>
-          <p:cNvPr id="19" name="Text 14"/>
-          <p:cNvSpPr txBox="1"/>
-          <p:nvPr/>
-        </p:nvSpPr>
-        <p:spPr>
-          <a:xfrm>
-            <a:off x="822960" y="5623560"/>
-            <a:ext cx="10607040" cy="777240"/>
-          </a:xfrm>
-          <a:prstGeom prst="rect">
-            <a:avLst/>
-          </a:prstGeom>
-          <a:noFill/>
-          <a:ln/>
-        </p:spPr>
-        <p:txBody>
-          <a:bodyPr wrap="square" lIns="0" tIns="0" rIns="0" bIns="0" rtlCol="0" anchor="ctr"/>
-          <a:lstStyle/>
-          <a:p>
-            <a:pPr marL="0" indent="0">
-              <a:buNone/>
-            </a:pPr>
-            <a:r>
-              <a:rPr lang="en-US" sz="2400" i="1" dirty="0">
+          <a:effectLst/>
+        </p:spPr>
+        <p:txBody>
+          <a:bodyPr wrap="none" lIns="0" tIns="0" rIns="0" bIns="0" rtlCol="0" anchor="ctr"/>
+          <a:lstStyle/>
+          <a:p>
+            <a:pPr algn="ctr"/>
+            <a:r>
+              <a:rPr lang="en-GB" sz="2400" b="1">
                 <a:solidFill>
                   <a:srgbClr val="FFFFFF"/>
                 </a:solidFill>
-                <a:latin typeface="Calibri" pitchFamily="34" charset="0"/>
-                <a:ea typeface="Calibri" pitchFamily="34" charset="-122"/>
-                <a:cs typeface="Calibri" pitchFamily="34" charset="-120"/>
-              </a:rPr>
-              <a:t>Key Result: 48-hour resolution from 65% to 90% by year-end</a:t>
-            </a:r>
-            <a:endParaRPr lang="en-US" sz="2400" dirty="0"/>
+                <a:latin typeface="Calibri"/>
+              </a:rPr>
+              <a:t>3.2</a:t>
+            </a:r>
           </a:p>
         </p:txBody>
       </p:sp>
@@ -17995,12 +19236,12 @@
 </file>
 
 <file path=ppt/slides/slide28.xml><?xml version="1.0" encoding="utf-8"?>
-<p:sld xmlns:a="http://schemas.openxmlformats.org/drawingml/2006/main" xmlns:p="http://schemas.openxmlformats.org/presentationml/2006/main" xmlns:r="http://schemas.openxmlformats.org/officeDocument/2006/relationships">
-  <p:cSld>
+<p:sld xmlns:a="http://schemas.openxmlformats.org/drawingml/2006/main" xmlns:r="http://schemas.openxmlformats.org/officeDocument/2006/relationships" xmlns:p="http://schemas.openxmlformats.org/presentationml/2006/main">
+  <p:cSld name="Slide 20">
     <p:bg>
       <p:bgPr>
         <a:solidFill>
-          <a:srgbClr val="FFFFFF"/>
+          <a:srgbClr val="1A5C2C"/>
         </a:solidFill>
         <a:effectLst/>
       </p:bgPr>
@@ -18011,7 +19252,14 @@
         <p:cNvGrpSpPr/>
         <p:nvPr/>
       </p:nvGrpSpPr>
-      <p:grpSpPr/>
+      <p:grpSpPr>
+        <a:xfrm>
+          <a:off x="0" y="0"/>
+          <a:ext cx="0" cy="0"/>
+          <a:chOff x="0" y="0"/>
+          <a:chExt cx="0" cy="0"/>
+        </a:xfrm>
+      </p:grpSpPr>
       <p:sp>
         <p:nvSpPr>
           <p:cNvPr id="2" name="Text 0"/>
@@ -18020,8 +19268,8 @@
         </p:nvSpPr>
         <p:spPr>
           <a:xfrm>
-            <a:off x="548640" y="411480"/>
-            <a:ext cx="11064240" cy="868680"/>
+            <a:off x="457200" y="822960"/>
+            <a:ext cx="2103120" cy="2194560"/>
           </a:xfrm>
           <a:prstGeom prst="rect">
             <a:avLst/>
@@ -18030,49 +19278,203 @@
           <a:ln/>
         </p:spPr>
         <p:txBody>
-          <a:bodyPr wrap="square" lIns="0" tIns="0" rIns="0" bIns="0" rtlCol="0" anchor="ctr"/>
+          <a:bodyPr wrap="square" lIns="0" tIns="0" rIns="0" bIns="0" rtlCol="0" anchor="t"/>
           <a:lstStyle/>
           <a:p>
             <a:pPr marL="0" indent="0">
               <a:buNone/>
             </a:pPr>
             <a:r>
-              <a:rPr lang="en-US" sz="3600" b="1" dirty="0">
-                <a:solidFill>
-                  <a:srgbClr val="1A5C2C"/>
+              <a:rPr lang="en-US" sz="15000" b="1" dirty="0">
+                <a:solidFill>
+                  <a:srgbClr val="C6A24C"/>
                 </a:solidFill>
                 <a:latin typeface="Cambria" pitchFamily="34" charset="0"/>
                 <a:ea typeface="Cambria" pitchFamily="34" charset="-122"/>
                 <a:cs typeface="Cambria" pitchFamily="34" charset="-120"/>
               </a:rPr>
-              <a:t>4.1 · Interpreting the Contribution Map</a:t>
-            </a:r>
-            <a:endParaRPr lang="en-US" sz="3600" dirty="0"/>
-          </a:p>
-        </p:txBody>
-      </p:sp>
-      <p:sp>
-        <p:nvSpPr>
-          <p:cNvPr id="3" name="Shape 1"/>
+              <a:t>4</a:t>
+            </a:r>
+            <a:endParaRPr lang="en-US" sz="15000" dirty="0"/>
+          </a:p>
+        </p:txBody>
+      </p:sp>
+      <p:sp>
+        <p:nvSpPr>
+          <p:cNvPr id="3" name="Text 1"/>
+          <p:cNvSpPr txBox="1"/>
+          <p:nvPr/>
+        </p:nvSpPr>
+        <p:spPr>
+          <a:xfrm>
+            <a:off x="2743200" y="914400"/>
+            <a:ext cx="8229600" cy="457200"/>
+          </a:xfrm>
+          <a:prstGeom prst="rect">
+            <a:avLst/>
+          </a:prstGeom>
+          <a:noFill/>
+          <a:ln/>
+        </p:spPr>
+        <p:txBody>
+          <a:bodyPr wrap="square" lIns="0" tIns="0" rIns="0" bIns="0" rtlCol="0" anchor="t"/>
+          <a:lstStyle/>
+          <a:p>
+            <a:pPr marL="0" indent="0">
+              <a:buNone/>
+            </a:pPr>
+            <a:r>
+              <a:rPr lang="en-US" sz="2400" b="1" dirty="0">
+                <a:solidFill>
+                  <a:srgbClr val="E6D3A0"/>
+                </a:solidFill>
+                <a:latin typeface="Calibri" pitchFamily="34" charset="0"/>
+                <a:ea typeface="Calibri" pitchFamily="34" charset="-122"/>
+                <a:cs typeface="Calibri" pitchFamily="34" charset="-120"/>
+              </a:rPr>
+              <a:t>Section 4</a:t>
+            </a:r>
+            <a:endParaRPr lang="en-US" sz="2400" dirty="0"/>
+          </a:p>
+        </p:txBody>
+      </p:sp>
+      <p:sp>
+        <p:nvSpPr>
+          <p:cNvPr id="4" name="Text 2"/>
+          <p:cNvSpPr txBox="1"/>
+          <p:nvPr/>
+        </p:nvSpPr>
+        <p:spPr>
+          <a:xfrm>
+            <a:off x="2743200" y="1371600"/>
+            <a:ext cx="8961120" cy="868680"/>
+          </a:xfrm>
+          <a:prstGeom prst="rect">
+            <a:avLst/>
+          </a:prstGeom>
+          <a:noFill/>
+          <a:ln/>
+        </p:spPr>
+        <p:txBody>
+          <a:bodyPr wrap="square" lIns="0" tIns="0" rIns="0" bIns="0" rtlCol="0" anchor="t"/>
+          <a:lstStyle/>
+          <a:p>
+            <a:pPr marL="0" indent="0">
+              <a:buNone/>
+            </a:pPr>
+            <a:r>
+              <a:rPr lang="en-US" sz="4400" b="1" dirty="0">
+                <a:solidFill>
+                  <a:srgbClr val="FFFFFF"/>
+                </a:solidFill>
+                <a:latin typeface="Cambria" pitchFamily="34" charset="0"/>
+                <a:ea typeface="Cambria" pitchFamily="34" charset="-122"/>
+                <a:cs typeface="Cambria" pitchFamily="34" charset="-120"/>
+              </a:rPr>
+              <a:t>Integration — Collective</a:t>
+            </a:r>
+            <a:endParaRPr lang="en-US" sz="4400" dirty="0"/>
+          </a:p>
+        </p:txBody>
+      </p:sp>
+      <p:sp>
+        <p:nvSpPr>
+          <p:cNvPr id="5" name="Text 3"/>
+          <p:cNvSpPr txBox="1"/>
+          <p:nvPr/>
+        </p:nvSpPr>
+        <p:spPr>
+          <a:xfrm>
+            <a:off x="2743200" y="2240280"/>
+            <a:ext cx="8961120" cy="868680"/>
+          </a:xfrm>
+          <a:prstGeom prst="rect">
+            <a:avLst/>
+          </a:prstGeom>
+          <a:noFill/>
+          <a:ln/>
+        </p:spPr>
+        <p:txBody>
+          <a:bodyPr wrap="square" lIns="0" tIns="0" rIns="0" bIns="0" rtlCol="0" anchor="t"/>
+          <a:lstStyle/>
+          <a:p>
+            <a:pPr marL="0" indent="0">
+              <a:buNone/>
+            </a:pPr>
+            <a:r>
+              <a:rPr lang="en-US" sz="2600" i="1" dirty="0">
+                <a:solidFill>
+                  <a:srgbClr val="DDE8DF"/>
+                </a:solidFill>
+                <a:latin typeface="Calibri" pitchFamily="34" charset="0"/>
+                <a:ea typeface="Calibri" pitchFamily="34" charset="-122"/>
+                <a:cs typeface="Calibri" pitchFamily="34" charset="-120"/>
+              </a:rPr>
+              <a:t>Integration of Human and Organisational Performance</a:t>
+            </a:r>
+            <a:endParaRPr lang="en-US" sz="2600" dirty="0"/>
+          </a:p>
+        </p:txBody>
+      </p:sp>
+      <p:sp>
+        <p:nvSpPr>
+          <p:cNvPr id="6" name="Text 4"/>
+          <p:cNvSpPr txBox="1"/>
+          <p:nvPr/>
+        </p:nvSpPr>
+        <p:spPr>
+          <a:xfrm>
+            <a:off x="2743200" y="3246120"/>
+            <a:ext cx="8229600" cy="457200"/>
+          </a:xfrm>
+          <a:prstGeom prst="rect">
+            <a:avLst/>
+          </a:prstGeom>
+          <a:noFill/>
+          <a:ln/>
+        </p:spPr>
+        <p:txBody>
+          <a:bodyPr wrap="square" lIns="0" tIns="0" rIns="0" bIns="0" rtlCol="0" anchor="t"/>
+          <a:lstStyle/>
+          <a:p>
+            <a:pPr marL="0" indent="0">
+              <a:buNone/>
+            </a:pPr>
+            <a:r>
+              <a:rPr lang="en-US" sz="2400" b="1" dirty="0">
+                <a:solidFill>
+                  <a:srgbClr val="C6A24C"/>
+                </a:solidFill>
+                <a:latin typeface="Calibri" pitchFamily="34" charset="0"/>
+                <a:ea typeface="Calibri" pitchFamily="34" charset="-122"/>
+                <a:cs typeface="Calibri" pitchFamily="34" charset="-120"/>
+              </a:rPr>
+              <a:t>Section learning outcomes</a:t>
+            </a:r>
+            <a:endParaRPr lang="en-US" sz="2400" dirty="0"/>
+          </a:p>
+        </p:txBody>
+      </p:sp>
+      <p:sp>
+        <p:nvSpPr>
+          <p:cNvPr id="7" name="Shape 5"/>
           <p:cNvSpPr/>
           <p:nvPr/>
         </p:nvSpPr>
         <p:spPr>
           <a:xfrm>
-            <a:off x="548640" y="1508760"/>
-            <a:ext cx="3514344" cy="4846320"/>
-          </a:xfrm>
-          <a:prstGeom prst="roundRect">
-            <a:avLst>
-              <a:gd name="adj" fmla="val 2602"/>
-            </a:avLst>
+            <a:off x="2743200" y="3822192"/>
+            <a:ext cx="384048" cy="384048"/>
+          </a:xfrm>
+          <a:prstGeom prst="ellipse">
+            <a:avLst/>
           </a:prstGeom>
           <a:solidFill>
-            <a:srgbClr val="EEF4EF"/>
+            <a:srgbClr val="C6A24C"/>
           </a:solidFill>
           <a:ln w="12700">
             <a:solidFill>
-              <a:srgbClr val="EEF4EF"/>
+              <a:srgbClr val="C6A24C"/>
             </a:solidFill>
             <a:prstDash val="solid"/>
           </a:ln>
@@ -18085,209 +19487,9 @@
           </a:p>
         </p:txBody>
       </p:sp>
-      <p:sp>
-        <p:nvSpPr>
-          <p:cNvPr id="4" name="Shape 2"/>
-          <p:cNvSpPr/>
-          <p:nvPr/>
-        </p:nvSpPr>
-        <p:spPr>
-          <a:xfrm>
-            <a:off x="777240" y="1737360"/>
-            <a:ext cx="640080" cy="640080"/>
-          </a:xfrm>
-          <a:prstGeom prst="ellipse">
-            <a:avLst/>
-          </a:prstGeom>
-          <a:solidFill>
-            <a:srgbClr val="1A5C2C"/>
-          </a:solidFill>
-          <a:ln w="12700">
-            <a:solidFill>
-              <a:srgbClr val="1A5C2C"/>
-            </a:solidFill>
-            <a:prstDash val="solid"/>
-          </a:ln>
-        </p:spPr>
-        <p:txBody>
-          <a:bodyPr/>
-          <a:lstStyle/>
-          <a:p>
-            <a:endParaRPr lang="en-ZA"/>
-          </a:p>
-        </p:txBody>
-      </p:sp>
       <p:pic>
         <p:nvPicPr>
-          <p:cNvPr id="5" name="Image 0" descr="preencoded.png"/>
-          <p:cNvPicPr>
-            <a:picLocks noChangeAspect="1"/>
-          </p:cNvPicPr>
-          <p:nvPr/>
-        </p:nvPicPr>
-        <p:blipFill>
-          <a:blip r:embed="rId2"/>
-          <a:stretch>
-            <a:fillRect/>
-          </a:stretch>
-        </p:blipFill>
-        <p:spPr>
-          <a:xfrm>
-            <a:off x="937260" y="1897380"/>
-            <a:ext cx="320040" cy="320040"/>
-          </a:xfrm>
-          <a:prstGeom prst="rect">
-            <a:avLst/>
-          </a:prstGeom>
-        </p:spPr>
-      </p:pic>
-      <p:sp>
-        <p:nvSpPr>
-          <p:cNvPr id="6" name="Text 3"/>
-          <p:cNvSpPr txBox="1"/>
-          <p:nvPr/>
-        </p:nvSpPr>
-        <p:spPr>
-          <a:xfrm>
-            <a:off x="777240" y="2514600"/>
-            <a:ext cx="3057144" cy="923544"/>
-          </a:xfrm>
-          <a:prstGeom prst="rect">
-            <a:avLst/>
-          </a:prstGeom>
-          <a:noFill/>
-          <a:ln/>
-        </p:spPr>
-        <p:txBody>
-          <a:bodyPr wrap="square" lIns="0" tIns="0" rIns="0" bIns="0" rtlCol="0" anchor="t"/>
-          <a:lstStyle/>
-          <a:p>
-            <a:pPr marL="0" indent="0">
-              <a:buNone/>
-            </a:pPr>
-            <a:r>
-              <a:rPr lang="en-US" sz="2600" b="1" dirty="0">
-                <a:solidFill>
-                  <a:srgbClr val="1A5C2C"/>
-                </a:solidFill>
-                <a:latin typeface="Cambria" pitchFamily="34" charset="0"/>
-                <a:ea typeface="Cambria" pitchFamily="34" charset="-122"/>
-                <a:cs typeface="Cambria" pitchFamily="34" charset="-120"/>
-              </a:rPr>
-              <a:t>1 · Function</a:t>
-            </a:r>
-            <a:endParaRPr lang="en-US" sz="2600" dirty="0"/>
-          </a:p>
-        </p:txBody>
-      </p:sp>
-      <p:sp>
-        <p:nvSpPr>
-          <p:cNvPr id="7" name="Text 4"/>
-          <p:cNvSpPr txBox="1"/>
-          <p:nvPr/>
-        </p:nvSpPr>
-        <p:spPr>
-          <a:xfrm>
-            <a:off x="777240" y="3575304"/>
-            <a:ext cx="3057144" cy="2642616"/>
-          </a:xfrm>
-          <a:prstGeom prst="rect">
-            <a:avLst/>
-          </a:prstGeom>
-          <a:noFill/>
-          <a:ln/>
-        </p:spPr>
-        <p:txBody>
-          <a:bodyPr wrap="square" lIns="0" tIns="0" rIns="0" bIns="0" rtlCol="0" anchor="t"/>
-          <a:lstStyle/>
-          <a:p>
-            <a:pPr marL="0" indent="0">
-              <a:buNone/>
-            </a:pPr>
-            <a:r>
-              <a:rPr lang="en-US" sz="2400" dirty="0">
-                <a:solidFill>
-                  <a:srgbClr val="1F2A22"/>
-                </a:solidFill>
-                <a:latin typeface="Calibri" pitchFamily="34" charset="0"/>
-                <a:ea typeface="Calibri" pitchFamily="34" charset="-122"/>
-                <a:cs typeface="Calibri" pitchFamily="34" charset="-120"/>
-              </a:rPr>
-              <a:t>What must the function deliver?</a:t>
-            </a:r>
-            <a:endParaRPr lang="en-US" sz="2400" dirty="0"/>
-          </a:p>
-        </p:txBody>
-      </p:sp>
-      <p:sp>
-        <p:nvSpPr>
-          <p:cNvPr id="8" name="Shape 5"/>
-          <p:cNvSpPr/>
-          <p:nvPr/>
-        </p:nvSpPr>
-        <p:spPr>
-          <a:xfrm>
-            <a:off x="4337304" y="1508760"/>
-            <a:ext cx="3514344" cy="4846320"/>
-          </a:xfrm>
-          <a:prstGeom prst="roundRect">
-            <a:avLst>
-              <a:gd name="adj" fmla="val 2602"/>
-            </a:avLst>
-          </a:prstGeom>
-          <a:solidFill>
-            <a:srgbClr val="EEF4EF"/>
-          </a:solidFill>
-          <a:ln w="12700">
-            <a:solidFill>
-              <a:srgbClr val="EEF4EF"/>
-            </a:solidFill>
-            <a:prstDash val="solid"/>
-          </a:ln>
-        </p:spPr>
-        <p:txBody>
-          <a:bodyPr/>
-          <a:lstStyle/>
-          <a:p>
-            <a:endParaRPr lang="en-ZA"/>
-          </a:p>
-        </p:txBody>
-      </p:sp>
-      <p:sp>
-        <p:nvSpPr>
-          <p:cNvPr id="9" name="Shape 6"/>
-          <p:cNvSpPr/>
-          <p:nvPr/>
-        </p:nvSpPr>
-        <p:spPr>
-          <a:xfrm>
-            <a:off x="4565904" y="1737360"/>
-            <a:ext cx="640080" cy="640080"/>
-          </a:xfrm>
-          <a:prstGeom prst="ellipse">
-            <a:avLst/>
-          </a:prstGeom>
-          <a:solidFill>
-            <a:srgbClr val="1A5C2C"/>
-          </a:solidFill>
-          <a:ln w="12700">
-            <a:solidFill>
-              <a:srgbClr val="1A5C2C"/>
-            </a:solidFill>
-            <a:prstDash val="solid"/>
-          </a:ln>
-        </p:spPr>
-        <p:txBody>
-          <a:bodyPr/>
-          <a:lstStyle/>
-          <a:p>
-            <a:endParaRPr lang="en-ZA"/>
-          </a:p>
-        </p:txBody>
-      </p:sp>
-      <p:pic>
-        <p:nvPicPr>
-          <p:cNvPr id="10" name="Image 1" descr="preencoded.png"/>
+          <p:cNvPr id="8" name="Image 0" descr="preencoded.png"/>
           <p:cNvPicPr>
             <a:picLocks noChangeAspect="1"/>
           </p:cNvPicPr>
@@ -18301,8 +19503,8 @@
         </p:blipFill>
         <p:spPr>
           <a:xfrm>
-            <a:off x="4725924" y="1897380"/>
-            <a:ext cx="320040" cy="320040"/>
+            <a:off x="2839212" y="3918204"/>
+            <a:ext cx="192024" cy="192024"/>
           </a:xfrm>
           <a:prstGeom prst="rect">
             <a:avLst/>
@@ -18311,14 +19513,14 @@
       </p:pic>
       <p:sp>
         <p:nvSpPr>
-          <p:cNvPr id="11" name="Text 7"/>
+          <p:cNvPr id="9" name="Text 6"/>
           <p:cNvSpPr txBox="1"/>
           <p:nvPr/>
         </p:nvSpPr>
         <p:spPr>
           <a:xfrm>
-            <a:off x="4565904" y="2514600"/>
-            <a:ext cx="3057144" cy="923544"/>
+            <a:off x="3291840" y="3749040"/>
+            <a:ext cx="8412480" cy="1097280"/>
           </a:xfrm>
           <a:prstGeom prst="rect">
             <a:avLst/>
@@ -18334,54 +19536,15 @@
               <a:buNone/>
             </a:pPr>
             <a:r>
-              <a:rPr lang="en-US" sz="2600" b="1" dirty="0">
-                <a:solidFill>
-                  <a:srgbClr val="1A5C2C"/>
-                </a:solidFill>
-                <a:latin typeface="Cambria" pitchFamily="34" charset="0"/>
-                <a:ea typeface="Cambria" pitchFamily="34" charset="-122"/>
-                <a:cs typeface="Cambria" pitchFamily="34" charset="-120"/>
-              </a:rPr>
-              <a:t>2 · People performance</a:t>
-            </a:r>
-            <a:endParaRPr lang="en-US" sz="2600" dirty="0"/>
-          </a:p>
-        </p:txBody>
-      </p:sp>
-      <p:sp>
-        <p:nvSpPr>
-          <p:cNvPr id="12" name="Text 8"/>
-          <p:cNvSpPr txBox="1"/>
-          <p:nvPr/>
-        </p:nvSpPr>
-        <p:spPr>
-          <a:xfrm>
-            <a:off x="4565904" y="3575304"/>
-            <a:ext cx="3057144" cy="2642616"/>
-          </a:xfrm>
-          <a:prstGeom prst="rect">
-            <a:avLst/>
-          </a:prstGeom>
-          <a:noFill/>
-          <a:ln/>
-        </p:spPr>
-        <p:txBody>
-          <a:bodyPr wrap="square" lIns="0" tIns="0" rIns="0" bIns="0" rtlCol="0" anchor="t"/>
-          <a:lstStyle/>
-          <a:p>
-            <a:pPr marL="0" indent="0">
-              <a:buNone/>
-            </a:pPr>
-            <a:r>
               <a:rPr lang="en-US" sz="2400" dirty="0">
                 <a:solidFill>
-                  <a:srgbClr val="1F2A22"/>
+                  <a:srgbClr val="FFFFFF"/>
                 </a:solidFill>
                 <a:latin typeface="Calibri" pitchFamily="34" charset="0"/>
                 <a:ea typeface="Calibri" pitchFamily="34" charset="-122"/>
                 <a:cs typeface="Calibri" pitchFamily="34" charset="-120"/>
               </a:rPr>
-              <a:t>What must individuals and teams deliver?</a:t>
+              <a:t>Map the functional, human and organisational contributions required for enterprise results.</a:t>
             </a:r>
             <a:endParaRPr lang="en-US" sz="2400" dirty="0"/>
           </a:p>
@@ -18389,26 +19552,24 @@
       </p:sp>
       <p:sp>
         <p:nvSpPr>
-          <p:cNvPr id="13" name="Shape 9"/>
+          <p:cNvPr id="10" name="Shape 7"/>
           <p:cNvSpPr/>
           <p:nvPr/>
         </p:nvSpPr>
         <p:spPr>
           <a:xfrm>
-            <a:off x="8125968" y="1508760"/>
-            <a:ext cx="3514344" cy="4846320"/>
-          </a:xfrm>
-          <a:prstGeom prst="roundRect">
-            <a:avLst>
-              <a:gd name="adj" fmla="val 2602"/>
-            </a:avLst>
+            <a:off x="2743200" y="5010912"/>
+            <a:ext cx="384048" cy="384048"/>
+          </a:xfrm>
+          <a:prstGeom prst="ellipse">
+            <a:avLst/>
           </a:prstGeom>
           <a:solidFill>
-            <a:srgbClr val="EEF4EF"/>
+            <a:srgbClr val="C6A24C"/>
           </a:solidFill>
           <a:ln w="12700">
             <a:solidFill>
-              <a:srgbClr val="EEF4EF"/>
+              <a:srgbClr val="C6A24C"/>
             </a:solidFill>
             <a:prstDash val="solid"/>
           </a:ln>
@@ -18421,56 +19582,24 @@
           </a:p>
         </p:txBody>
       </p:sp>
-      <p:sp>
-        <p:nvSpPr>
-          <p:cNvPr id="14" name="Shape 10"/>
-          <p:cNvSpPr/>
-          <p:nvPr/>
-        </p:nvSpPr>
-        <p:spPr>
-          <a:xfrm>
-            <a:off x="8354568" y="1737360"/>
-            <a:ext cx="640080" cy="640080"/>
-          </a:xfrm>
-          <a:prstGeom prst="ellipse">
-            <a:avLst/>
-          </a:prstGeom>
-          <a:solidFill>
-            <a:srgbClr val="1A5C2C"/>
-          </a:solidFill>
-          <a:ln w="12700">
-            <a:solidFill>
-              <a:srgbClr val="1A5C2C"/>
-            </a:solidFill>
-            <a:prstDash val="solid"/>
-          </a:ln>
-        </p:spPr>
-        <p:txBody>
-          <a:bodyPr/>
-          <a:lstStyle/>
-          <a:p>
-            <a:endParaRPr lang="en-ZA"/>
-          </a:p>
-        </p:txBody>
-      </p:sp>
       <p:pic>
         <p:nvPicPr>
-          <p:cNvPr id="15" name="Image 2" descr="preencoded.png"/>
+          <p:cNvPr id="11" name="Image 1" descr="preencoded.png"/>
           <p:cNvPicPr>
             <a:picLocks noChangeAspect="1"/>
           </p:cNvPicPr>
           <p:nvPr/>
         </p:nvPicPr>
         <p:blipFill>
-          <a:blip r:embed="rId4"/>
+          <a:blip r:embed="rId3"/>
           <a:stretch>
             <a:fillRect/>
           </a:stretch>
         </p:blipFill>
         <p:spPr>
           <a:xfrm>
-            <a:off x="8514588" y="1897380"/>
-            <a:ext cx="320040" cy="320040"/>
+            <a:off x="2839212" y="5106924"/>
+            <a:ext cx="192024" cy="192024"/>
           </a:xfrm>
           <a:prstGeom prst="rect">
             <a:avLst/>
@@ -18479,14 +19608,14 @@
       </p:pic>
       <p:sp>
         <p:nvSpPr>
-          <p:cNvPr id="16" name="Text 11"/>
+          <p:cNvPr id="12" name="Text 8"/>
           <p:cNvSpPr txBox="1"/>
           <p:nvPr/>
         </p:nvSpPr>
         <p:spPr>
           <a:xfrm>
-            <a:off x="8354568" y="2514600"/>
-            <a:ext cx="3057144" cy="923544"/>
+            <a:off x="3291840" y="4937760"/>
+            <a:ext cx="8412480" cy="1097280"/>
           </a:xfrm>
           <a:prstGeom prst="rect">
             <a:avLst/>
@@ -18502,54 +19631,15 @@
               <a:buNone/>
             </a:pPr>
             <a:r>
-              <a:rPr lang="en-US" sz="2600" b="1" dirty="0">
-                <a:solidFill>
-                  <a:srgbClr val="1A5C2C"/>
-                </a:solidFill>
-                <a:latin typeface="Cambria" pitchFamily="34" charset="0"/>
-                <a:ea typeface="Cambria" pitchFamily="34" charset="-122"/>
-                <a:cs typeface="Cambria" pitchFamily="34" charset="-120"/>
-              </a:rPr>
-              <a:t>3 · Organisational performance</a:t>
-            </a:r>
-            <a:endParaRPr lang="en-US" sz="2600" dirty="0"/>
-          </a:p>
-        </p:txBody>
-      </p:sp>
-      <p:sp>
-        <p:nvSpPr>
-          <p:cNvPr id="17" name="Text 12"/>
-          <p:cNvSpPr txBox="1"/>
-          <p:nvPr/>
-        </p:nvSpPr>
-        <p:spPr>
-          <a:xfrm>
-            <a:off x="8354568" y="3931920"/>
-            <a:ext cx="3057144" cy="1317538"/>
-          </a:xfrm>
-          <a:prstGeom prst="rect">
-            <a:avLst/>
-          </a:prstGeom>
-          <a:noFill/>
-          <a:ln/>
-        </p:spPr>
-        <p:txBody>
-          <a:bodyPr wrap="square" lIns="0" tIns="0" rIns="0" bIns="0" rtlCol="0" anchor="t"/>
-          <a:lstStyle/>
-          <a:p>
-            <a:pPr marL="0" indent="0">
-              <a:buNone/>
-            </a:pPr>
-            <a:r>
               <a:rPr lang="en-US" sz="2400" dirty="0">
                 <a:solidFill>
-                  <a:srgbClr val="1F2A22"/>
+                  <a:srgbClr val="FFFFFF"/>
                 </a:solidFill>
                 <a:latin typeface="Calibri" pitchFamily="34" charset="0"/>
                 <a:ea typeface="Calibri" pitchFamily="34" charset="-122"/>
                 <a:cs typeface="Calibri" pitchFamily="34" charset="-120"/>
               </a:rPr>
-              <a:t>What conditions must the organisation provide?</a:t>
+              <a:t>Coordinate cross-functional contributions and enabling conditions towards shared results.</a:t>
             </a:r>
             <a:endParaRPr lang="en-US" sz="2400" dirty="0"/>
           </a:p>
@@ -18614,7 +19704,7 @@
                 <a:ea typeface="Cambria" pitchFamily="34" charset="-122"/>
                 <a:cs typeface="Cambria" pitchFamily="34" charset="-120"/>
               </a:rPr>
-              <a:t>4.2 · Managing the contributions through FACES</a:t>
+              <a:t>4.1 · Mapping the contributions: customer service</a:t>
             </a:r>
             <a:endParaRPr lang="en-US" sz="3600" dirty="0"/>
           </a:p>
@@ -18709,7 +19799,7 @@
                 <a:ea typeface="Cambria" pitchFamily="34" charset="-122"/>
                 <a:cs typeface="Cambria" pitchFamily="34" charset="-120"/>
               </a:rPr>
-              <a:t>F  </a:t>
+              <a:t>Customer Service  </a:t>
             </a:r>
             <a:r>
               <a:rPr lang="en-US" sz="2600" dirty="0">
@@ -18720,7 +19810,7 @@
                 <a:ea typeface="Calibri" pitchFamily="34" charset="-122"/>
                 <a:cs typeface="Calibri" pitchFamily="34" charset="-120"/>
               </a:rPr>
-              <a:t>Foster: commitments and obstacles discussed openly</a:t>
+              <a:t>resolve enquiries within 48 hours</a:t>
             </a:r>
             <a:endParaRPr lang="en-US" sz="2600" dirty="0"/>
           </a:p>
@@ -18815,7 +19905,7 @@
                 <a:ea typeface="Cambria" pitchFamily="34" charset="-122"/>
                 <a:cs typeface="Cambria" pitchFamily="34" charset="-120"/>
               </a:rPr>
-              <a:t>A  </a:t>
+              <a:t>IT  </a:t>
             </a:r>
             <a:r>
               <a:rPr lang="en-US" sz="2600" dirty="0">
@@ -18826,7 +19916,7 @@
                 <a:ea typeface="Calibri" pitchFamily="34" charset="-122"/>
                 <a:cs typeface="Calibri" pitchFamily="34" charset="-120"/>
               </a:rPr>
-              <a:t>Align: tied to the enterprise Key Result</a:t>
+              <a:t>reliable customer management systems</a:t>
             </a:r>
             <a:endParaRPr lang="en-US" sz="2600" dirty="0"/>
           </a:p>
@@ -18921,7 +20011,7 @@
                 <a:ea typeface="Cambria" pitchFamily="34" charset="-122"/>
                 <a:cs typeface="Cambria" pitchFamily="34" charset="-120"/>
               </a:rPr>
-              <a:t>C  </a:t>
+              <a:t>Operations  </a:t>
             </a:r>
             <a:r>
               <a:rPr lang="en-US" sz="2600" dirty="0">
@@ -18932,7 +20022,7 @@
                 <a:ea typeface="Calibri" pitchFamily="34" charset="-122"/>
                 <a:cs typeface="Calibri" pitchFamily="34" charset="-120"/>
               </a:rPr>
-              <a:t>Transparency: people and constraints visible</a:t>
+              <a:t>processing and approvals in time</a:t>
             </a:r>
             <a:endParaRPr lang="en-US" sz="2600" dirty="0"/>
           </a:p>
@@ -19027,7 +20117,7 @@
                 <a:ea typeface="Cambria" pitchFamily="34" charset="-122"/>
                 <a:cs typeface="Cambria" pitchFamily="34" charset="-120"/>
               </a:rPr>
-              <a:t>E  </a:t>
+              <a:t>Workforce Planning  </a:t>
             </a:r>
             <a:r>
               <a:rPr lang="en-US" sz="2600" dirty="0">
@@ -19038,7 +20128,7 @@
                 <a:ea typeface="Calibri" pitchFamily="34" charset="-122"/>
                 <a:cs typeface="Calibri" pitchFamily="34" charset="-120"/>
               </a:rPr>
-              <a:t>Accountability: owners with the authority</a:t>
+              <a:t>enough staffing capacity</a:t>
             </a:r>
             <a:endParaRPr lang="en-US" sz="2600" dirty="0"/>
           </a:p>
@@ -19046,24 +20136,26 @@
       </p:sp>
       <p:sp>
         <p:nvSpPr>
-          <p:cNvPr id="15" name="Shape 9"/>
+          <p:cNvPr id="18" name="Shape 13"/>
           <p:cNvSpPr/>
           <p:nvPr/>
         </p:nvSpPr>
         <p:spPr>
           <a:xfrm>
-            <a:off x="548640" y="5591556"/>
-            <a:ext cx="640080" cy="640080"/>
-          </a:xfrm>
-          <a:prstGeom prst="ellipse">
-            <a:avLst/>
+            <a:off x="548640" y="5623560"/>
+            <a:ext cx="11091672" cy="777240"/>
+          </a:xfrm>
+          <a:prstGeom prst="roundRect">
+            <a:avLst>
+              <a:gd name="adj" fmla="val 11765"/>
+            </a:avLst>
           </a:prstGeom>
           <a:solidFill>
-            <a:srgbClr val="1A5C2C"/>
+            <a:srgbClr val="0F3B1C"/>
           </a:solidFill>
           <a:ln w="12700">
             <a:solidFill>
-              <a:srgbClr val="1A5C2C"/>
+              <a:srgbClr val="0F3B1C"/>
             </a:solidFill>
             <a:prstDash val="solid"/>
           </a:ln>
@@ -19076,40 +20168,16 @@
           </a:p>
         </p:txBody>
       </p:sp>
-      <p:pic>
-        <p:nvPicPr>
-          <p:cNvPr id="16" name="Image 4" descr="preencoded.png"/>
-          <p:cNvPicPr>
-            <a:picLocks noChangeAspect="1"/>
-          </p:cNvPicPr>
-          <p:nvPr/>
-        </p:nvPicPr>
-        <p:blipFill>
-          <a:blip r:embed="rId6"/>
-          <a:stretch>
-            <a:fillRect/>
-          </a:stretch>
-        </p:blipFill>
-        <p:spPr>
-          <a:xfrm>
-            <a:off x="708660" y="5751576"/>
-            <a:ext cx="320040" cy="320040"/>
-          </a:xfrm>
-          <a:prstGeom prst="rect">
-            <a:avLst/>
-          </a:prstGeom>
-        </p:spPr>
-      </p:pic>
-      <p:sp>
-        <p:nvSpPr>
-          <p:cNvPr id="17" name="Text 10"/>
+      <p:sp>
+        <p:nvSpPr>
+          <p:cNvPr id="19" name="Text 14"/>
           <p:cNvSpPr txBox="1"/>
           <p:nvPr/>
         </p:nvSpPr>
         <p:spPr>
           <a:xfrm>
-            <a:off x="1508760" y="5422392"/>
-            <a:ext cx="10131552" cy="978408"/>
+            <a:off x="822960" y="5623560"/>
+            <a:ext cx="10607040" cy="777240"/>
           </a:xfrm>
           <a:prstGeom prst="rect">
             <a:avLst/>
@@ -19125,28 +20193,17 @@
               <a:buNone/>
             </a:pPr>
             <a:r>
-              <a:rPr lang="en-US" sz="2600" b="1" dirty="0">
-                <a:solidFill>
-                  <a:srgbClr val="1A5C2C"/>
-                </a:solidFill>
-                <a:latin typeface="Cambria" pitchFamily="34" charset="0"/>
-                <a:ea typeface="Cambria" pitchFamily="34" charset="-122"/>
-                <a:cs typeface="Cambria" pitchFamily="34" charset="-120"/>
-              </a:rPr>
-              <a:t>S  </a:t>
-            </a:r>
-            <a:r>
-              <a:rPr lang="en-US" sz="2600" dirty="0">
-                <a:solidFill>
-                  <a:srgbClr val="1F2A22"/>
+              <a:rPr lang="en-US" sz="2400" i="1" dirty="0">
+                <a:solidFill>
+                  <a:srgbClr val="FFFFFF"/>
                 </a:solidFill>
                 <a:latin typeface="Calibri" pitchFamily="34" charset="0"/>
                 <a:ea typeface="Calibri" pitchFamily="34" charset="-122"/>
                 <a:cs typeface="Calibri" pitchFamily="34" charset="-120"/>
               </a:rPr>
-              <a:t>Development: capability and conditions improve</a:t>
-            </a:r>
-            <a:endParaRPr lang="en-US" sz="2600" dirty="0"/>
+              <a:t>Key Result: 48-hour resolution from 65% to 90% by year-end</a:t>
+            </a:r>
+            <a:endParaRPr lang="en-US" sz="2400" dirty="0"/>
           </a:p>
         </p:txBody>
       </p:sp>
@@ -19761,6 +20818,1170 @@
 </file>
 
 <file path=ppt/slides/slide30.xml><?xml version="1.0" encoding="utf-8"?>
+<p:sld xmlns:a="http://schemas.openxmlformats.org/drawingml/2006/main" xmlns:p="http://schemas.openxmlformats.org/presentationml/2006/main" xmlns:r="http://schemas.openxmlformats.org/officeDocument/2006/relationships">
+  <p:cSld>
+    <p:bg>
+      <p:bgPr>
+        <a:solidFill>
+          <a:srgbClr val="FFFFFF"/>
+        </a:solidFill>
+        <a:effectLst/>
+      </p:bgPr>
+    </p:bg>
+    <p:spTree>
+      <p:nvGrpSpPr>
+        <p:cNvPr id="1" name=""/>
+        <p:cNvGrpSpPr/>
+        <p:nvPr/>
+      </p:nvGrpSpPr>
+      <p:grpSpPr/>
+      <p:sp>
+        <p:nvSpPr>
+          <p:cNvPr id="2" name="Text 0"/>
+          <p:cNvSpPr txBox="1"/>
+          <p:nvPr/>
+        </p:nvSpPr>
+        <p:spPr>
+          <a:xfrm>
+            <a:off x="548640" y="411480"/>
+            <a:ext cx="11064240" cy="868680"/>
+          </a:xfrm>
+          <a:prstGeom prst="rect">
+            <a:avLst/>
+          </a:prstGeom>
+          <a:noFill/>
+          <a:ln/>
+        </p:spPr>
+        <p:txBody>
+          <a:bodyPr wrap="square" lIns="0" tIns="0" rIns="0" bIns="0" rtlCol="0" anchor="ctr"/>
+          <a:lstStyle/>
+          <a:p>
+            <a:pPr marL="0" indent="0">
+              <a:buNone/>
+            </a:pPr>
+            <a:r>
+              <a:rPr lang="en-US" sz="3600" b="1" dirty="0">
+                <a:solidFill>
+                  <a:srgbClr val="1A5C2C"/>
+                </a:solidFill>
+                <a:latin typeface="Cambria" pitchFamily="34" charset="0"/>
+                <a:ea typeface="Cambria" pitchFamily="34" charset="-122"/>
+                <a:cs typeface="Cambria" pitchFamily="34" charset="-120"/>
+              </a:rPr>
+              <a:t>4.1 · Interpreting the Contribution Map</a:t>
+            </a:r>
+            <a:endParaRPr lang="en-US" sz="3600" dirty="0"/>
+          </a:p>
+        </p:txBody>
+      </p:sp>
+      <p:sp>
+        <p:nvSpPr>
+          <p:cNvPr id="3" name="Shape 1"/>
+          <p:cNvSpPr/>
+          <p:nvPr/>
+        </p:nvSpPr>
+        <p:spPr>
+          <a:xfrm>
+            <a:off x="548640" y="1508760"/>
+            <a:ext cx="3514344" cy="4846320"/>
+          </a:xfrm>
+          <a:prstGeom prst="roundRect">
+            <a:avLst>
+              <a:gd name="adj" fmla="val 2602"/>
+            </a:avLst>
+          </a:prstGeom>
+          <a:solidFill>
+            <a:srgbClr val="EEF4EF"/>
+          </a:solidFill>
+          <a:ln w="12700">
+            <a:solidFill>
+              <a:srgbClr val="EEF4EF"/>
+            </a:solidFill>
+            <a:prstDash val="solid"/>
+          </a:ln>
+        </p:spPr>
+        <p:txBody>
+          <a:bodyPr/>
+          <a:lstStyle/>
+          <a:p>
+            <a:endParaRPr lang="en-ZA"/>
+          </a:p>
+        </p:txBody>
+      </p:sp>
+      <p:sp>
+        <p:nvSpPr>
+          <p:cNvPr id="4" name="Shape 2"/>
+          <p:cNvSpPr/>
+          <p:nvPr/>
+        </p:nvSpPr>
+        <p:spPr>
+          <a:xfrm>
+            <a:off x="777240" y="1737360"/>
+            <a:ext cx="640080" cy="640080"/>
+          </a:xfrm>
+          <a:prstGeom prst="ellipse">
+            <a:avLst/>
+          </a:prstGeom>
+          <a:solidFill>
+            <a:srgbClr val="1A5C2C"/>
+          </a:solidFill>
+          <a:ln w="12700">
+            <a:solidFill>
+              <a:srgbClr val="1A5C2C"/>
+            </a:solidFill>
+            <a:prstDash val="solid"/>
+          </a:ln>
+        </p:spPr>
+        <p:txBody>
+          <a:bodyPr/>
+          <a:lstStyle/>
+          <a:p>
+            <a:endParaRPr lang="en-ZA"/>
+          </a:p>
+        </p:txBody>
+      </p:sp>
+      <p:pic>
+        <p:nvPicPr>
+          <p:cNvPr id="5" name="Image 0" descr="preencoded.png"/>
+          <p:cNvPicPr>
+            <a:picLocks noChangeAspect="1"/>
+          </p:cNvPicPr>
+          <p:nvPr/>
+        </p:nvPicPr>
+        <p:blipFill>
+          <a:blip r:embed="rId2"/>
+          <a:stretch>
+            <a:fillRect/>
+          </a:stretch>
+        </p:blipFill>
+        <p:spPr>
+          <a:xfrm>
+            <a:off x="937260" y="1897380"/>
+            <a:ext cx="320040" cy="320040"/>
+          </a:xfrm>
+          <a:prstGeom prst="rect">
+            <a:avLst/>
+          </a:prstGeom>
+        </p:spPr>
+      </p:pic>
+      <p:sp>
+        <p:nvSpPr>
+          <p:cNvPr id="6" name="Text 3"/>
+          <p:cNvSpPr txBox="1"/>
+          <p:nvPr/>
+        </p:nvSpPr>
+        <p:spPr>
+          <a:xfrm>
+            <a:off x="777240" y="2514600"/>
+            <a:ext cx="3057144" cy="923544"/>
+          </a:xfrm>
+          <a:prstGeom prst="rect">
+            <a:avLst/>
+          </a:prstGeom>
+          <a:noFill/>
+          <a:ln/>
+        </p:spPr>
+        <p:txBody>
+          <a:bodyPr wrap="square" lIns="0" tIns="0" rIns="0" bIns="0" rtlCol="0" anchor="t"/>
+          <a:lstStyle/>
+          <a:p>
+            <a:pPr marL="0" indent="0">
+              <a:buNone/>
+            </a:pPr>
+            <a:r>
+              <a:rPr lang="en-US" sz="2600" b="1" dirty="0">
+                <a:solidFill>
+                  <a:srgbClr val="1A5C2C"/>
+                </a:solidFill>
+                <a:latin typeface="Cambria" pitchFamily="34" charset="0"/>
+                <a:ea typeface="Cambria" pitchFamily="34" charset="-122"/>
+                <a:cs typeface="Cambria" pitchFamily="34" charset="-120"/>
+              </a:rPr>
+              <a:t>1 · Function</a:t>
+            </a:r>
+            <a:endParaRPr lang="en-US" sz="2600" dirty="0"/>
+          </a:p>
+        </p:txBody>
+      </p:sp>
+      <p:sp>
+        <p:nvSpPr>
+          <p:cNvPr id="7" name="Text 4"/>
+          <p:cNvSpPr txBox="1"/>
+          <p:nvPr/>
+        </p:nvSpPr>
+        <p:spPr>
+          <a:xfrm>
+            <a:off x="777240" y="3575304"/>
+            <a:ext cx="3057144" cy="2642616"/>
+          </a:xfrm>
+          <a:prstGeom prst="rect">
+            <a:avLst/>
+          </a:prstGeom>
+          <a:noFill/>
+          <a:ln/>
+        </p:spPr>
+        <p:txBody>
+          <a:bodyPr wrap="square" lIns="0" tIns="0" rIns="0" bIns="0" rtlCol="0" anchor="t"/>
+          <a:lstStyle/>
+          <a:p>
+            <a:pPr marL="0" indent="0">
+              <a:buNone/>
+            </a:pPr>
+            <a:r>
+              <a:rPr lang="en-US" sz="2400" dirty="0">
+                <a:solidFill>
+                  <a:srgbClr val="1F2A22"/>
+                </a:solidFill>
+                <a:latin typeface="Calibri" pitchFamily="34" charset="0"/>
+                <a:ea typeface="Calibri" pitchFamily="34" charset="-122"/>
+                <a:cs typeface="Calibri" pitchFamily="34" charset="-120"/>
+              </a:rPr>
+              <a:t>What must the function deliver?</a:t>
+            </a:r>
+            <a:endParaRPr lang="en-US" sz="2400" dirty="0"/>
+          </a:p>
+        </p:txBody>
+      </p:sp>
+      <p:sp>
+        <p:nvSpPr>
+          <p:cNvPr id="8" name="Shape 5"/>
+          <p:cNvSpPr/>
+          <p:nvPr/>
+        </p:nvSpPr>
+        <p:spPr>
+          <a:xfrm>
+            <a:off x="4337304" y="1508760"/>
+            <a:ext cx="3514344" cy="4846320"/>
+          </a:xfrm>
+          <a:prstGeom prst="roundRect">
+            <a:avLst>
+              <a:gd name="adj" fmla="val 2602"/>
+            </a:avLst>
+          </a:prstGeom>
+          <a:solidFill>
+            <a:srgbClr val="EEF4EF"/>
+          </a:solidFill>
+          <a:ln w="12700">
+            <a:solidFill>
+              <a:srgbClr val="EEF4EF"/>
+            </a:solidFill>
+            <a:prstDash val="solid"/>
+          </a:ln>
+        </p:spPr>
+        <p:txBody>
+          <a:bodyPr/>
+          <a:lstStyle/>
+          <a:p>
+            <a:endParaRPr lang="en-ZA"/>
+          </a:p>
+        </p:txBody>
+      </p:sp>
+      <p:sp>
+        <p:nvSpPr>
+          <p:cNvPr id="9" name="Shape 6"/>
+          <p:cNvSpPr/>
+          <p:nvPr/>
+        </p:nvSpPr>
+        <p:spPr>
+          <a:xfrm>
+            <a:off x="4565904" y="1737360"/>
+            <a:ext cx="640080" cy="640080"/>
+          </a:xfrm>
+          <a:prstGeom prst="ellipse">
+            <a:avLst/>
+          </a:prstGeom>
+          <a:solidFill>
+            <a:srgbClr val="1A5C2C"/>
+          </a:solidFill>
+          <a:ln w="12700">
+            <a:solidFill>
+              <a:srgbClr val="1A5C2C"/>
+            </a:solidFill>
+            <a:prstDash val="solid"/>
+          </a:ln>
+        </p:spPr>
+        <p:txBody>
+          <a:bodyPr/>
+          <a:lstStyle/>
+          <a:p>
+            <a:endParaRPr lang="en-ZA"/>
+          </a:p>
+        </p:txBody>
+      </p:sp>
+      <p:pic>
+        <p:nvPicPr>
+          <p:cNvPr id="10" name="Image 1" descr="preencoded.png"/>
+          <p:cNvPicPr>
+            <a:picLocks noChangeAspect="1"/>
+          </p:cNvPicPr>
+          <p:nvPr/>
+        </p:nvPicPr>
+        <p:blipFill>
+          <a:blip r:embed="rId3"/>
+          <a:stretch>
+            <a:fillRect/>
+          </a:stretch>
+        </p:blipFill>
+        <p:spPr>
+          <a:xfrm>
+            <a:off x="4725924" y="1897380"/>
+            <a:ext cx="320040" cy="320040"/>
+          </a:xfrm>
+          <a:prstGeom prst="rect">
+            <a:avLst/>
+          </a:prstGeom>
+        </p:spPr>
+      </p:pic>
+      <p:sp>
+        <p:nvSpPr>
+          <p:cNvPr id="11" name="Text 7"/>
+          <p:cNvSpPr txBox="1"/>
+          <p:nvPr/>
+        </p:nvSpPr>
+        <p:spPr>
+          <a:xfrm>
+            <a:off x="4565904" y="2514600"/>
+            <a:ext cx="3057144" cy="923544"/>
+          </a:xfrm>
+          <a:prstGeom prst="rect">
+            <a:avLst/>
+          </a:prstGeom>
+          <a:noFill/>
+          <a:ln/>
+        </p:spPr>
+        <p:txBody>
+          <a:bodyPr wrap="square" lIns="0" tIns="0" rIns="0" bIns="0" rtlCol="0" anchor="t"/>
+          <a:lstStyle/>
+          <a:p>
+            <a:pPr marL="0" indent="0">
+              <a:buNone/>
+            </a:pPr>
+            <a:r>
+              <a:rPr lang="en-US" sz="2600" b="1" dirty="0">
+                <a:solidFill>
+                  <a:srgbClr val="1A5C2C"/>
+                </a:solidFill>
+                <a:latin typeface="Cambria" pitchFamily="34" charset="0"/>
+                <a:ea typeface="Cambria" pitchFamily="34" charset="-122"/>
+                <a:cs typeface="Cambria" pitchFamily="34" charset="-120"/>
+              </a:rPr>
+              <a:t>2 · People performance</a:t>
+            </a:r>
+            <a:endParaRPr lang="en-US" sz="2600" dirty="0"/>
+          </a:p>
+        </p:txBody>
+      </p:sp>
+      <p:sp>
+        <p:nvSpPr>
+          <p:cNvPr id="12" name="Text 8"/>
+          <p:cNvSpPr txBox="1"/>
+          <p:nvPr/>
+        </p:nvSpPr>
+        <p:spPr>
+          <a:xfrm>
+            <a:off x="4565904" y="3575304"/>
+            <a:ext cx="3057144" cy="2642616"/>
+          </a:xfrm>
+          <a:prstGeom prst="rect">
+            <a:avLst/>
+          </a:prstGeom>
+          <a:noFill/>
+          <a:ln/>
+        </p:spPr>
+        <p:txBody>
+          <a:bodyPr wrap="square" lIns="0" tIns="0" rIns="0" bIns="0" rtlCol="0" anchor="t"/>
+          <a:lstStyle/>
+          <a:p>
+            <a:pPr marL="0" indent="0">
+              <a:buNone/>
+            </a:pPr>
+            <a:r>
+              <a:rPr lang="en-US" sz="2400" dirty="0">
+                <a:solidFill>
+                  <a:srgbClr val="1F2A22"/>
+                </a:solidFill>
+                <a:latin typeface="Calibri" pitchFamily="34" charset="0"/>
+                <a:ea typeface="Calibri" pitchFamily="34" charset="-122"/>
+                <a:cs typeface="Calibri" pitchFamily="34" charset="-120"/>
+              </a:rPr>
+              <a:t>What must individuals and teams deliver?</a:t>
+            </a:r>
+            <a:endParaRPr lang="en-US" sz="2400" dirty="0"/>
+          </a:p>
+        </p:txBody>
+      </p:sp>
+      <p:sp>
+        <p:nvSpPr>
+          <p:cNvPr id="13" name="Shape 9"/>
+          <p:cNvSpPr/>
+          <p:nvPr/>
+        </p:nvSpPr>
+        <p:spPr>
+          <a:xfrm>
+            <a:off x="8125968" y="1508760"/>
+            <a:ext cx="3514344" cy="4846320"/>
+          </a:xfrm>
+          <a:prstGeom prst="roundRect">
+            <a:avLst>
+              <a:gd name="adj" fmla="val 2602"/>
+            </a:avLst>
+          </a:prstGeom>
+          <a:solidFill>
+            <a:srgbClr val="EEF4EF"/>
+          </a:solidFill>
+          <a:ln w="12700">
+            <a:solidFill>
+              <a:srgbClr val="EEF4EF"/>
+            </a:solidFill>
+            <a:prstDash val="solid"/>
+          </a:ln>
+        </p:spPr>
+        <p:txBody>
+          <a:bodyPr/>
+          <a:lstStyle/>
+          <a:p>
+            <a:endParaRPr lang="en-ZA"/>
+          </a:p>
+        </p:txBody>
+      </p:sp>
+      <p:sp>
+        <p:nvSpPr>
+          <p:cNvPr id="14" name="Shape 10"/>
+          <p:cNvSpPr/>
+          <p:nvPr/>
+        </p:nvSpPr>
+        <p:spPr>
+          <a:xfrm>
+            <a:off x="8354568" y="1737360"/>
+            <a:ext cx="640080" cy="640080"/>
+          </a:xfrm>
+          <a:prstGeom prst="ellipse">
+            <a:avLst/>
+          </a:prstGeom>
+          <a:solidFill>
+            <a:srgbClr val="1A5C2C"/>
+          </a:solidFill>
+          <a:ln w="12700">
+            <a:solidFill>
+              <a:srgbClr val="1A5C2C"/>
+            </a:solidFill>
+            <a:prstDash val="solid"/>
+          </a:ln>
+        </p:spPr>
+        <p:txBody>
+          <a:bodyPr/>
+          <a:lstStyle/>
+          <a:p>
+            <a:endParaRPr lang="en-ZA"/>
+          </a:p>
+        </p:txBody>
+      </p:sp>
+      <p:pic>
+        <p:nvPicPr>
+          <p:cNvPr id="15" name="Image 2" descr="preencoded.png"/>
+          <p:cNvPicPr>
+            <a:picLocks noChangeAspect="1"/>
+          </p:cNvPicPr>
+          <p:nvPr/>
+        </p:nvPicPr>
+        <p:blipFill>
+          <a:blip r:embed="rId4"/>
+          <a:stretch>
+            <a:fillRect/>
+          </a:stretch>
+        </p:blipFill>
+        <p:spPr>
+          <a:xfrm>
+            <a:off x="8514588" y="1897380"/>
+            <a:ext cx="320040" cy="320040"/>
+          </a:xfrm>
+          <a:prstGeom prst="rect">
+            <a:avLst/>
+          </a:prstGeom>
+        </p:spPr>
+      </p:pic>
+      <p:sp>
+        <p:nvSpPr>
+          <p:cNvPr id="16" name="Text 11"/>
+          <p:cNvSpPr txBox="1"/>
+          <p:nvPr/>
+        </p:nvSpPr>
+        <p:spPr>
+          <a:xfrm>
+            <a:off x="8354568" y="2514600"/>
+            <a:ext cx="3057144" cy="923544"/>
+          </a:xfrm>
+          <a:prstGeom prst="rect">
+            <a:avLst/>
+          </a:prstGeom>
+          <a:noFill/>
+          <a:ln/>
+        </p:spPr>
+        <p:txBody>
+          <a:bodyPr wrap="square" lIns="0" tIns="0" rIns="0" bIns="0" rtlCol="0" anchor="t"/>
+          <a:lstStyle/>
+          <a:p>
+            <a:pPr marL="0" indent="0">
+              <a:buNone/>
+            </a:pPr>
+            <a:r>
+              <a:rPr lang="en-US" sz="2600" b="1" dirty="0">
+                <a:solidFill>
+                  <a:srgbClr val="1A5C2C"/>
+                </a:solidFill>
+                <a:latin typeface="Cambria" pitchFamily="34" charset="0"/>
+                <a:ea typeface="Cambria" pitchFamily="34" charset="-122"/>
+                <a:cs typeface="Cambria" pitchFamily="34" charset="-120"/>
+              </a:rPr>
+              <a:t>3 · Organisational performance</a:t>
+            </a:r>
+            <a:endParaRPr lang="en-US" sz="2600" dirty="0"/>
+          </a:p>
+        </p:txBody>
+      </p:sp>
+      <p:sp>
+        <p:nvSpPr>
+          <p:cNvPr id="17" name="Text 12"/>
+          <p:cNvSpPr txBox="1"/>
+          <p:nvPr/>
+        </p:nvSpPr>
+        <p:spPr>
+          <a:xfrm>
+            <a:off x="8354568" y="3931920"/>
+            <a:ext cx="3057144" cy="1317538"/>
+          </a:xfrm>
+          <a:prstGeom prst="rect">
+            <a:avLst/>
+          </a:prstGeom>
+          <a:noFill/>
+          <a:ln/>
+        </p:spPr>
+        <p:txBody>
+          <a:bodyPr wrap="square" lIns="0" tIns="0" rIns="0" bIns="0" rtlCol="0" anchor="t"/>
+          <a:lstStyle/>
+          <a:p>
+            <a:pPr marL="0" indent="0">
+              <a:buNone/>
+            </a:pPr>
+            <a:r>
+              <a:rPr lang="en-US" sz="2400" dirty="0">
+                <a:solidFill>
+                  <a:srgbClr val="1F2A22"/>
+                </a:solidFill>
+                <a:latin typeface="Calibri" pitchFamily="34" charset="0"/>
+                <a:ea typeface="Calibri" pitchFamily="34" charset="-122"/>
+                <a:cs typeface="Calibri" pitchFamily="34" charset="-120"/>
+              </a:rPr>
+              <a:t>What conditions must the organisation provide?</a:t>
+            </a:r>
+            <a:endParaRPr lang="en-US" sz="2400" dirty="0"/>
+          </a:p>
+        </p:txBody>
+      </p:sp>
+    </p:spTree>
+  </p:cSld>
+  <p:clrMapOvr>
+    <a:masterClrMapping/>
+  </p:clrMapOvr>
+</p:sld>
+</file>
+
+<file path=ppt/slides/slide31.xml><?xml version="1.0" encoding="utf-8"?>
+<p:sld xmlns:a="http://schemas.openxmlformats.org/drawingml/2006/main" xmlns:p="http://schemas.openxmlformats.org/presentationml/2006/main" xmlns:r="http://schemas.openxmlformats.org/officeDocument/2006/relationships">
+  <p:cSld>
+    <p:bg>
+      <p:bgPr>
+        <a:solidFill>
+          <a:srgbClr val="FFFFFF"/>
+        </a:solidFill>
+        <a:effectLst/>
+      </p:bgPr>
+    </p:bg>
+    <p:spTree>
+      <p:nvGrpSpPr>
+        <p:cNvPr id="1" name=""/>
+        <p:cNvGrpSpPr/>
+        <p:nvPr/>
+      </p:nvGrpSpPr>
+      <p:grpSpPr/>
+      <p:sp>
+        <p:nvSpPr>
+          <p:cNvPr id="2" name="Text 0"/>
+          <p:cNvSpPr txBox="1"/>
+          <p:nvPr/>
+        </p:nvSpPr>
+        <p:spPr>
+          <a:xfrm>
+            <a:off x="548640" y="411480"/>
+            <a:ext cx="11064240" cy="868680"/>
+          </a:xfrm>
+          <a:prstGeom prst="rect">
+            <a:avLst/>
+          </a:prstGeom>
+          <a:noFill/>
+          <a:ln/>
+        </p:spPr>
+        <p:txBody>
+          <a:bodyPr wrap="square" lIns="0" tIns="0" rIns="0" bIns="0" rtlCol="0" anchor="ctr"/>
+          <a:lstStyle/>
+          <a:p>
+            <a:pPr marL="0" indent="0">
+              <a:buNone/>
+            </a:pPr>
+            <a:r>
+              <a:rPr lang="en-US" sz="3600" b="1" dirty="0">
+                <a:solidFill>
+                  <a:srgbClr val="1A5C2C"/>
+                </a:solidFill>
+                <a:latin typeface="Cambria" pitchFamily="34" charset="0"/>
+                <a:ea typeface="Cambria" pitchFamily="34" charset="-122"/>
+                <a:cs typeface="Cambria" pitchFamily="34" charset="-120"/>
+              </a:rPr>
+              <a:t>4.2 · Managing the contributions through FACES</a:t>
+            </a:r>
+            <a:endParaRPr lang="en-US" sz="3600" dirty="0"/>
+          </a:p>
+        </p:txBody>
+      </p:sp>
+      <p:sp>
+        <p:nvSpPr>
+          <p:cNvPr id="3" name="Shape 1"/>
+          <p:cNvSpPr/>
+          <p:nvPr/>
+        </p:nvSpPr>
+        <p:spPr>
+          <a:xfrm>
+            <a:off x="548640" y="1677924"/>
+            <a:ext cx="640080" cy="640080"/>
+          </a:xfrm>
+          <a:prstGeom prst="ellipse">
+            <a:avLst/>
+          </a:prstGeom>
+          <a:solidFill>
+            <a:srgbClr val="1A5C2C"/>
+          </a:solidFill>
+          <a:ln w="12700">
+            <a:solidFill>
+              <a:srgbClr val="1A5C2C"/>
+            </a:solidFill>
+            <a:prstDash val="solid"/>
+          </a:ln>
+        </p:spPr>
+        <p:txBody>
+          <a:bodyPr/>
+          <a:lstStyle/>
+          <a:p>
+            <a:endParaRPr lang="en-ZA"/>
+          </a:p>
+        </p:txBody>
+      </p:sp>
+      <p:pic>
+        <p:nvPicPr>
+          <p:cNvPr id="4" name="Image 0" descr="preencoded.png"/>
+          <p:cNvPicPr>
+            <a:picLocks noChangeAspect="1"/>
+          </p:cNvPicPr>
+          <p:nvPr/>
+        </p:nvPicPr>
+        <p:blipFill>
+          <a:blip r:embed="rId2"/>
+          <a:stretch>
+            <a:fillRect/>
+          </a:stretch>
+        </p:blipFill>
+        <p:spPr>
+          <a:xfrm>
+            <a:off x="708660" y="1837944"/>
+            <a:ext cx="320040" cy="320040"/>
+          </a:xfrm>
+          <a:prstGeom prst="rect">
+            <a:avLst/>
+          </a:prstGeom>
+        </p:spPr>
+      </p:pic>
+      <p:sp>
+        <p:nvSpPr>
+          <p:cNvPr id="5" name="Text 2"/>
+          <p:cNvSpPr txBox="1"/>
+          <p:nvPr/>
+        </p:nvSpPr>
+        <p:spPr>
+          <a:xfrm>
+            <a:off x="1508760" y="1508760"/>
+            <a:ext cx="10131552" cy="978408"/>
+          </a:xfrm>
+          <a:prstGeom prst="rect">
+            <a:avLst/>
+          </a:prstGeom>
+          <a:noFill/>
+          <a:ln/>
+        </p:spPr>
+        <p:txBody>
+          <a:bodyPr wrap="square" lIns="0" tIns="0" rIns="0" bIns="0" rtlCol="0" anchor="ctr"/>
+          <a:lstStyle/>
+          <a:p>
+            <a:pPr marL="0" indent="0">
+              <a:buNone/>
+            </a:pPr>
+            <a:r>
+              <a:rPr lang="en-US" sz="2600" b="1" dirty="0">
+                <a:solidFill>
+                  <a:srgbClr val="1A5C2C"/>
+                </a:solidFill>
+                <a:latin typeface="Cambria" pitchFamily="34" charset="0"/>
+                <a:ea typeface="Cambria" pitchFamily="34" charset="-122"/>
+                <a:cs typeface="Cambria" pitchFamily="34" charset="-120"/>
+              </a:rPr>
+              <a:t>F  </a:t>
+            </a:r>
+            <a:r>
+              <a:rPr lang="en-US" sz="2600" dirty="0">
+                <a:solidFill>
+                  <a:srgbClr val="1F2A22"/>
+                </a:solidFill>
+                <a:latin typeface="Calibri" pitchFamily="34" charset="0"/>
+                <a:ea typeface="Calibri" pitchFamily="34" charset="-122"/>
+                <a:cs typeface="Calibri" pitchFamily="34" charset="-120"/>
+              </a:rPr>
+              <a:t>Foster: commitments and obstacles discussed openly</a:t>
+            </a:r>
+            <a:endParaRPr lang="en-US" sz="2600" dirty="0"/>
+          </a:p>
+        </p:txBody>
+      </p:sp>
+      <p:sp>
+        <p:nvSpPr>
+          <p:cNvPr id="6" name="Shape 3"/>
+          <p:cNvSpPr/>
+          <p:nvPr/>
+        </p:nvSpPr>
+        <p:spPr>
+          <a:xfrm>
+            <a:off x="548640" y="2656332"/>
+            <a:ext cx="640080" cy="640080"/>
+          </a:xfrm>
+          <a:prstGeom prst="ellipse">
+            <a:avLst/>
+          </a:prstGeom>
+          <a:solidFill>
+            <a:srgbClr val="1A5C2C"/>
+          </a:solidFill>
+          <a:ln w="12700">
+            <a:solidFill>
+              <a:srgbClr val="1A5C2C"/>
+            </a:solidFill>
+            <a:prstDash val="solid"/>
+          </a:ln>
+        </p:spPr>
+        <p:txBody>
+          <a:bodyPr/>
+          <a:lstStyle/>
+          <a:p>
+            <a:endParaRPr lang="en-ZA"/>
+          </a:p>
+        </p:txBody>
+      </p:sp>
+      <p:pic>
+        <p:nvPicPr>
+          <p:cNvPr id="7" name="Image 1" descr="preencoded.png"/>
+          <p:cNvPicPr>
+            <a:picLocks noChangeAspect="1"/>
+          </p:cNvPicPr>
+          <p:nvPr/>
+        </p:nvPicPr>
+        <p:blipFill>
+          <a:blip r:embed="rId3"/>
+          <a:stretch>
+            <a:fillRect/>
+          </a:stretch>
+        </p:blipFill>
+        <p:spPr>
+          <a:xfrm>
+            <a:off x="708660" y="2816352"/>
+            <a:ext cx="320040" cy="320040"/>
+          </a:xfrm>
+          <a:prstGeom prst="rect">
+            <a:avLst/>
+          </a:prstGeom>
+        </p:spPr>
+      </p:pic>
+      <p:sp>
+        <p:nvSpPr>
+          <p:cNvPr id="8" name="Text 4"/>
+          <p:cNvSpPr txBox="1"/>
+          <p:nvPr/>
+        </p:nvSpPr>
+        <p:spPr>
+          <a:xfrm>
+            <a:off x="1508760" y="2487168"/>
+            <a:ext cx="10131552" cy="978408"/>
+          </a:xfrm>
+          <a:prstGeom prst="rect">
+            <a:avLst/>
+          </a:prstGeom>
+          <a:noFill/>
+          <a:ln/>
+        </p:spPr>
+        <p:txBody>
+          <a:bodyPr wrap="square" lIns="0" tIns="0" rIns="0" bIns="0" rtlCol="0" anchor="ctr"/>
+          <a:lstStyle/>
+          <a:p>
+            <a:pPr marL="0" indent="0">
+              <a:buNone/>
+            </a:pPr>
+            <a:r>
+              <a:rPr lang="en-US" sz="2600" b="1" dirty="0">
+                <a:solidFill>
+                  <a:srgbClr val="1A5C2C"/>
+                </a:solidFill>
+                <a:latin typeface="Cambria" pitchFamily="34" charset="0"/>
+                <a:ea typeface="Cambria" pitchFamily="34" charset="-122"/>
+                <a:cs typeface="Cambria" pitchFamily="34" charset="-120"/>
+              </a:rPr>
+              <a:t>A  </a:t>
+            </a:r>
+            <a:r>
+              <a:rPr lang="en-US" sz="2600" dirty="0">
+                <a:solidFill>
+                  <a:srgbClr val="1F2A22"/>
+                </a:solidFill>
+                <a:latin typeface="Calibri" pitchFamily="34" charset="0"/>
+                <a:ea typeface="Calibri" pitchFamily="34" charset="-122"/>
+                <a:cs typeface="Calibri" pitchFamily="34" charset="-120"/>
+              </a:rPr>
+              <a:t>Align: tied to the enterprise Key Result</a:t>
+            </a:r>
+            <a:endParaRPr lang="en-US" sz="2600" dirty="0"/>
+          </a:p>
+        </p:txBody>
+      </p:sp>
+      <p:sp>
+        <p:nvSpPr>
+          <p:cNvPr id="9" name="Shape 5"/>
+          <p:cNvSpPr/>
+          <p:nvPr/>
+        </p:nvSpPr>
+        <p:spPr>
+          <a:xfrm>
+            <a:off x="548640" y="3634740"/>
+            <a:ext cx="640080" cy="640080"/>
+          </a:xfrm>
+          <a:prstGeom prst="ellipse">
+            <a:avLst/>
+          </a:prstGeom>
+          <a:solidFill>
+            <a:srgbClr val="1A5C2C"/>
+          </a:solidFill>
+          <a:ln w="12700">
+            <a:solidFill>
+              <a:srgbClr val="1A5C2C"/>
+            </a:solidFill>
+            <a:prstDash val="solid"/>
+          </a:ln>
+        </p:spPr>
+        <p:txBody>
+          <a:bodyPr/>
+          <a:lstStyle/>
+          <a:p>
+            <a:endParaRPr lang="en-ZA"/>
+          </a:p>
+        </p:txBody>
+      </p:sp>
+      <p:pic>
+        <p:nvPicPr>
+          <p:cNvPr id="10" name="Image 2" descr="preencoded.png"/>
+          <p:cNvPicPr>
+            <a:picLocks noChangeAspect="1"/>
+          </p:cNvPicPr>
+          <p:nvPr/>
+        </p:nvPicPr>
+        <p:blipFill>
+          <a:blip r:embed="rId4"/>
+          <a:stretch>
+            <a:fillRect/>
+          </a:stretch>
+        </p:blipFill>
+        <p:spPr>
+          <a:xfrm>
+            <a:off x="708660" y="3794760"/>
+            <a:ext cx="320040" cy="320040"/>
+          </a:xfrm>
+          <a:prstGeom prst="rect">
+            <a:avLst/>
+          </a:prstGeom>
+        </p:spPr>
+      </p:pic>
+      <p:sp>
+        <p:nvSpPr>
+          <p:cNvPr id="11" name="Text 6"/>
+          <p:cNvSpPr txBox="1"/>
+          <p:nvPr/>
+        </p:nvSpPr>
+        <p:spPr>
+          <a:xfrm>
+            <a:off x="1508760" y="3465576"/>
+            <a:ext cx="10131552" cy="978408"/>
+          </a:xfrm>
+          <a:prstGeom prst="rect">
+            <a:avLst/>
+          </a:prstGeom>
+          <a:noFill/>
+          <a:ln/>
+        </p:spPr>
+        <p:txBody>
+          <a:bodyPr wrap="square" lIns="0" tIns="0" rIns="0" bIns="0" rtlCol="0" anchor="ctr"/>
+          <a:lstStyle/>
+          <a:p>
+            <a:pPr marL="0" indent="0">
+              <a:buNone/>
+            </a:pPr>
+            <a:r>
+              <a:rPr lang="en-US" sz="2600" b="1" dirty="0">
+                <a:solidFill>
+                  <a:srgbClr val="1A5C2C"/>
+                </a:solidFill>
+                <a:latin typeface="Cambria" pitchFamily="34" charset="0"/>
+                <a:ea typeface="Cambria" pitchFamily="34" charset="-122"/>
+                <a:cs typeface="Cambria" pitchFamily="34" charset="-120"/>
+              </a:rPr>
+              <a:t>C  </a:t>
+            </a:r>
+            <a:r>
+              <a:rPr lang="en-US" sz="2600" dirty="0">
+                <a:solidFill>
+                  <a:srgbClr val="1F2A22"/>
+                </a:solidFill>
+                <a:latin typeface="Calibri" pitchFamily="34" charset="0"/>
+                <a:ea typeface="Calibri" pitchFamily="34" charset="-122"/>
+                <a:cs typeface="Calibri" pitchFamily="34" charset="-120"/>
+              </a:rPr>
+              <a:t>Transparency: people and constraints visible</a:t>
+            </a:r>
+            <a:endParaRPr lang="en-US" sz="2600" dirty="0"/>
+          </a:p>
+        </p:txBody>
+      </p:sp>
+      <p:sp>
+        <p:nvSpPr>
+          <p:cNvPr id="12" name="Shape 7"/>
+          <p:cNvSpPr/>
+          <p:nvPr/>
+        </p:nvSpPr>
+        <p:spPr>
+          <a:xfrm>
+            <a:off x="548640" y="4613148"/>
+            <a:ext cx="640080" cy="640080"/>
+          </a:xfrm>
+          <a:prstGeom prst="ellipse">
+            <a:avLst/>
+          </a:prstGeom>
+          <a:solidFill>
+            <a:srgbClr val="1A5C2C"/>
+          </a:solidFill>
+          <a:ln w="12700">
+            <a:solidFill>
+              <a:srgbClr val="1A5C2C"/>
+            </a:solidFill>
+            <a:prstDash val="solid"/>
+          </a:ln>
+        </p:spPr>
+        <p:txBody>
+          <a:bodyPr/>
+          <a:lstStyle/>
+          <a:p>
+            <a:endParaRPr lang="en-ZA"/>
+          </a:p>
+        </p:txBody>
+      </p:sp>
+      <p:pic>
+        <p:nvPicPr>
+          <p:cNvPr id="13" name="Image 3" descr="preencoded.png"/>
+          <p:cNvPicPr>
+            <a:picLocks noChangeAspect="1"/>
+          </p:cNvPicPr>
+          <p:nvPr/>
+        </p:nvPicPr>
+        <p:blipFill>
+          <a:blip r:embed="rId5"/>
+          <a:stretch>
+            <a:fillRect/>
+          </a:stretch>
+        </p:blipFill>
+        <p:spPr>
+          <a:xfrm>
+            <a:off x="708660" y="4773168"/>
+            <a:ext cx="320040" cy="320040"/>
+          </a:xfrm>
+          <a:prstGeom prst="rect">
+            <a:avLst/>
+          </a:prstGeom>
+        </p:spPr>
+      </p:pic>
+      <p:sp>
+        <p:nvSpPr>
+          <p:cNvPr id="14" name="Text 8"/>
+          <p:cNvSpPr txBox="1"/>
+          <p:nvPr/>
+        </p:nvSpPr>
+        <p:spPr>
+          <a:xfrm>
+            <a:off x="1508760" y="4443984"/>
+            <a:ext cx="10131552" cy="978408"/>
+          </a:xfrm>
+          <a:prstGeom prst="rect">
+            <a:avLst/>
+          </a:prstGeom>
+          <a:noFill/>
+          <a:ln/>
+        </p:spPr>
+        <p:txBody>
+          <a:bodyPr wrap="square" lIns="0" tIns="0" rIns="0" bIns="0" rtlCol="0" anchor="ctr"/>
+          <a:lstStyle/>
+          <a:p>
+            <a:pPr marL="0" indent="0">
+              <a:buNone/>
+            </a:pPr>
+            <a:r>
+              <a:rPr lang="en-US" sz="2600" b="1" dirty="0">
+                <a:solidFill>
+                  <a:srgbClr val="1A5C2C"/>
+                </a:solidFill>
+                <a:latin typeface="Cambria" pitchFamily="34" charset="0"/>
+                <a:ea typeface="Cambria" pitchFamily="34" charset="-122"/>
+                <a:cs typeface="Cambria" pitchFamily="34" charset="-120"/>
+              </a:rPr>
+              <a:t>E  </a:t>
+            </a:r>
+            <a:r>
+              <a:rPr lang="en-US" sz="2600" dirty="0">
+                <a:solidFill>
+                  <a:srgbClr val="1F2A22"/>
+                </a:solidFill>
+                <a:latin typeface="Calibri" pitchFamily="34" charset="0"/>
+                <a:ea typeface="Calibri" pitchFamily="34" charset="-122"/>
+                <a:cs typeface="Calibri" pitchFamily="34" charset="-120"/>
+              </a:rPr>
+              <a:t>Accountability: owners with the authority</a:t>
+            </a:r>
+            <a:endParaRPr lang="en-US" sz="2600" dirty="0"/>
+          </a:p>
+        </p:txBody>
+      </p:sp>
+      <p:sp>
+        <p:nvSpPr>
+          <p:cNvPr id="15" name="Shape 9"/>
+          <p:cNvSpPr/>
+          <p:nvPr/>
+        </p:nvSpPr>
+        <p:spPr>
+          <a:xfrm>
+            <a:off x="548640" y="5591556"/>
+            <a:ext cx="640080" cy="640080"/>
+          </a:xfrm>
+          <a:prstGeom prst="ellipse">
+            <a:avLst/>
+          </a:prstGeom>
+          <a:solidFill>
+            <a:srgbClr val="1A5C2C"/>
+          </a:solidFill>
+          <a:ln w="12700">
+            <a:solidFill>
+              <a:srgbClr val="1A5C2C"/>
+            </a:solidFill>
+            <a:prstDash val="solid"/>
+          </a:ln>
+        </p:spPr>
+        <p:txBody>
+          <a:bodyPr/>
+          <a:lstStyle/>
+          <a:p>
+            <a:endParaRPr lang="en-ZA"/>
+          </a:p>
+        </p:txBody>
+      </p:sp>
+      <p:pic>
+        <p:nvPicPr>
+          <p:cNvPr id="16" name="Image 4" descr="preencoded.png"/>
+          <p:cNvPicPr>
+            <a:picLocks noChangeAspect="1"/>
+          </p:cNvPicPr>
+          <p:nvPr/>
+        </p:nvPicPr>
+        <p:blipFill>
+          <a:blip r:embed="rId6"/>
+          <a:stretch>
+            <a:fillRect/>
+          </a:stretch>
+        </p:blipFill>
+        <p:spPr>
+          <a:xfrm>
+            <a:off x="708660" y="5751576"/>
+            <a:ext cx="320040" cy="320040"/>
+          </a:xfrm>
+          <a:prstGeom prst="rect">
+            <a:avLst/>
+          </a:prstGeom>
+        </p:spPr>
+      </p:pic>
+      <p:sp>
+        <p:nvSpPr>
+          <p:cNvPr id="17" name="Text 10"/>
+          <p:cNvSpPr txBox="1"/>
+          <p:nvPr/>
+        </p:nvSpPr>
+        <p:spPr>
+          <a:xfrm>
+            <a:off x="1508760" y="5422392"/>
+            <a:ext cx="10131552" cy="978408"/>
+          </a:xfrm>
+          <a:prstGeom prst="rect">
+            <a:avLst/>
+          </a:prstGeom>
+          <a:noFill/>
+          <a:ln/>
+        </p:spPr>
+        <p:txBody>
+          <a:bodyPr wrap="square" lIns="0" tIns="0" rIns="0" bIns="0" rtlCol="0" anchor="ctr"/>
+          <a:lstStyle/>
+          <a:p>
+            <a:pPr marL="0" indent="0">
+              <a:buNone/>
+            </a:pPr>
+            <a:r>
+              <a:rPr lang="en-US" sz="2600" b="1" dirty="0">
+                <a:solidFill>
+                  <a:srgbClr val="1A5C2C"/>
+                </a:solidFill>
+                <a:latin typeface="Cambria" pitchFamily="34" charset="0"/>
+                <a:ea typeface="Cambria" pitchFamily="34" charset="-122"/>
+                <a:cs typeface="Cambria" pitchFamily="34" charset="-120"/>
+              </a:rPr>
+              <a:t>S  </a:t>
+            </a:r>
+            <a:r>
+              <a:rPr lang="en-US" sz="2600" dirty="0">
+                <a:solidFill>
+                  <a:srgbClr val="1F2A22"/>
+                </a:solidFill>
+                <a:latin typeface="Calibri" pitchFamily="34" charset="0"/>
+                <a:ea typeface="Calibri" pitchFamily="34" charset="-122"/>
+                <a:cs typeface="Calibri" pitchFamily="34" charset="-120"/>
+              </a:rPr>
+              <a:t>Development: capability and conditions improve</a:t>
+            </a:r>
+            <a:endParaRPr lang="en-US" sz="2600" dirty="0"/>
+          </a:p>
+        </p:txBody>
+      </p:sp>
+    </p:spTree>
+  </p:cSld>
+  <p:clrMapOvr>
+    <a:masterClrMapping/>
+  </p:clrMapOvr>
+</p:sld>
+</file>
+
+<file path=ppt/slides/slide32.xml><?xml version="1.0" encoding="utf-8"?>
 <p:sld xmlns:a="http://schemas.openxmlformats.org/drawingml/2006/main" xmlns:r="http://schemas.openxmlformats.org/officeDocument/2006/relationships" xmlns:p="http://schemas.openxmlformats.org/presentationml/2006/main">
   <p:cSld name="Slide 24">
     <p:bg>
@@ -20178,7 +22399,7 @@
 </p:sld>
 </file>
 
-<file path=ppt/slides/slide31.xml><?xml version="1.0" encoding="utf-8"?>
+<file path=ppt/slides/slide33.xml><?xml version="1.0" encoding="utf-8"?>
 <p:sld xmlns:a="http://schemas.openxmlformats.org/drawingml/2006/main" xmlns:r="http://schemas.openxmlformats.org/officeDocument/2006/relationships" xmlns:p="http://schemas.openxmlformats.org/presentationml/2006/main">
   <p:cSld name="Slide 25">
     <p:bg>
@@ -20827,7 +23048,7 @@
 </p:sld>
 </file>
 
-<file path=ppt/slides/slide32.xml><?xml version="1.0" encoding="utf-8"?>
+<file path=ppt/slides/slide34.xml><?xml version="1.0" encoding="utf-8"?>
 <p:sld xmlns:a="http://schemas.openxmlformats.org/drawingml/2006/main" xmlns:p="http://schemas.openxmlformats.org/presentationml/2006/main" xmlns:r="http://schemas.openxmlformats.org/officeDocument/2006/relationships">
   <p:cSld>
     <p:bg>
@@ -20870,7 +23091,7 @@
               <a:buNone/>
             </a:pPr>
             <a:r>
-              <a:rPr lang="en-US" sz="3600" b="1" dirty="0">
+              <a:rPr lang="en-US" sz="3400" b="1" dirty="0">
                 <a:solidFill>
                   <a:srgbClr val="1A5C2C"/>
                 </a:solidFill>
@@ -21422,7 +23643,488 @@
 </p:sld>
 </file>
 
-<file path=ppt/slides/slide33.xml><?xml version="1.0" encoding="utf-8"?>
+<file path=ppt/slides/slide35.xml><?xml version="1.0" encoding="utf-8"?>
+<p:sld xmlns:a="http://schemas.openxmlformats.org/drawingml/2006/main" xmlns:p="http://schemas.openxmlformats.org/presentationml/2006/main" xmlns:r="http://schemas.openxmlformats.org/officeDocument/2006/relationships">
+  <p:cSld>
+    <p:spTree>
+      <p:nvGrpSpPr>
+        <p:cNvPr id="1" name=""/>
+        <p:cNvGrpSpPr/>
+        <p:nvPr/>
+      </p:nvGrpSpPr>
+      <p:grpSpPr/>
+      <p:sp>
+        <p:nvSpPr>
+          <p:cNvPr id="2" name="Text 0"/>
+          <p:cNvSpPr txBox="1"/>
+          <p:nvPr/>
+        </p:nvSpPr>
+        <p:spPr>
+          <a:xfrm>
+            <a:off x="548640" y="411480"/>
+            <a:ext cx="11064240" cy="868680"/>
+          </a:xfrm>
+          <a:prstGeom prst="rect">
+            <a:avLst/>
+          </a:prstGeom>
+          <a:noFill/>
+          <a:ln/>
+        </p:spPr>
+        <p:txBody>
+          <a:bodyPr wrap="square" lIns="0" tIns="0" rIns="0" bIns="0" rtlCol="0" anchor="ctr"/>
+          <a:lstStyle/>
+          <a:p>
+            <a:pPr marL="0" indent="0">
+              <a:buNone/>
+            </a:pPr>
+            <a:r>
+              <a:rPr lang="en-US" sz="3600" b="1" dirty="0">
+                <a:solidFill>
+                  <a:srgbClr val="1A5C2C"/>
+                </a:solidFill>
+                <a:latin typeface="Cambria" pitchFamily="34" charset="0"/>
+                <a:ea typeface="Cambria" pitchFamily="34" charset="-122"/>
+                <a:cs typeface="Cambria" pitchFamily="34" charset="-120"/>
+              </a:rPr>
+              <a:t>5.3 · Activity 3: CEO Performance Scorecard</a:t>
+            </a:r>
+            <a:endParaRPr lang="en-US" sz="3600" dirty="0"/>
+          </a:p>
+        </p:txBody>
+      </p:sp>
+      <p:sp>
+        <p:nvSpPr>
+          <p:cNvPr id="3" name="Shape 1"/>
+          <p:cNvSpPr/>
+          <p:nvPr/>
+        </p:nvSpPr>
+        <p:spPr>
+          <a:xfrm>
+            <a:off x="548640" y="1677924"/>
+            <a:ext cx="640080" cy="640080"/>
+          </a:xfrm>
+          <a:prstGeom prst="ellipse">
+            <a:avLst/>
+          </a:prstGeom>
+          <a:solidFill>
+            <a:srgbClr val="1A5C2C"/>
+          </a:solidFill>
+          <a:ln w="12700">
+            <a:solidFill>
+              <a:srgbClr val="1A5C2C"/>
+            </a:solidFill>
+            <a:prstDash val="solid"/>
+          </a:ln>
+        </p:spPr>
+        <p:txBody>
+          <a:bodyPr/>
+          <a:lstStyle/>
+          <a:p>
+            <a:endParaRPr lang="en-ZA"/>
+          </a:p>
+        </p:txBody>
+      </p:sp>
+      <p:pic>
+        <p:nvPicPr>
+          <p:cNvPr id="4" name="Image 0" descr="preencoded.png"/>
+          <p:cNvPicPr>
+            <a:picLocks noChangeAspect="1"/>
+          </p:cNvPicPr>
+          <p:nvPr/>
+        </p:nvPicPr>
+        <p:blipFill>
+          <a:blip r:embed="rId7"/>
+          <a:stretch>
+            <a:fillRect/>
+          </a:stretch>
+        </p:blipFill>
+        <p:spPr>
+          <a:xfrm>
+            <a:off x="708660" y="1837944"/>
+            <a:ext cx="320040" cy="320040"/>
+          </a:xfrm>
+          <a:prstGeom prst="rect">
+            <a:avLst/>
+          </a:prstGeom>
+        </p:spPr>
+      </p:pic>
+      <p:sp>
+        <p:nvSpPr>
+          <p:cNvPr id="5" name="Text 2"/>
+          <p:cNvSpPr txBox="1"/>
+          <p:nvPr/>
+        </p:nvSpPr>
+        <p:spPr>
+          <a:xfrm>
+            <a:off x="1508760" y="1508760"/>
+            <a:ext cx="10131552" cy="978408"/>
+          </a:xfrm>
+          <a:prstGeom prst="rect">
+            <a:avLst/>
+          </a:prstGeom>
+          <a:noFill/>
+          <a:ln/>
+        </p:spPr>
+        <p:txBody>
+          <a:bodyPr wrap="square" lIns="0" tIns="0" rIns="0" bIns="0" rtlCol="0" anchor="ctr"/>
+          <a:lstStyle/>
+          <a:p>
+            <a:pPr marL="0" indent="0">
+              <a:buNone/>
+            </a:pPr>
+            <a:r>
+              <a:rPr lang="en-US" sz="2600" b="1" dirty="0">
+                <a:solidFill>
+                  <a:srgbClr val="1A5C2C"/>
+                </a:solidFill>
+                <a:latin typeface="Cambria" pitchFamily="34" charset="0"/>
+                <a:ea typeface="Cambria" pitchFamily="34" charset="-122"/>
+                <a:cs typeface="Cambria" pitchFamily="34" charset="-120"/>
+              </a:rPr>
+              <a:t>S  </a:t>
+            </a:r>
+            <a:r>
+              <a:rPr lang="en-US" sz="2600" dirty="0">
+                <a:solidFill>
+                  <a:srgbClr val="1F2A22"/>
+                </a:solidFill>
+                <a:latin typeface="Calibri" pitchFamily="34" charset="0"/>
+                <a:ea typeface="Calibri" pitchFamily="34" charset="-122"/>
+                <a:cs typeface="Calibri" pitchFamily="34" charset="-120"/>
+              </a:rPr>
+              <a:t>Strategy: Key Result measures and their weight</a:t>
+            </a:r>
+            <a:endParaRPr lang="en-US" sz="2600" dirty="0"/>
+          </a:p>
+        </p:txBody>
+      </p:sp>
+      <p:sp>
+        <p:nvSpPr>
+          <p:cNvPr id="6" name="Shape 3"/>
+          <p:cNvSpPr/>
+          <p:nvPr/>
+        </p:nvSpPr>
+        <p:spPr>
+          <a:xfrm>
+            <a:off x="548640" y="2656332"/>
+            <a:ext cx="640080" cy="640080"/>
+          </a:xfrm>
+          <a:prstGeom prst="ellipse">
+            <a:avLst/>
+          </a:prstGeom>
+          <a:solidFill>
+            <a:srgbClr val="1A5C2C"/>
+          </a:solidFill>
+          <a:ln w="12700">
+            <a:solidFill>
+              <a:srgbClr val="1A5C2C"/>
+            </a:solidFill>
+            <a:prstDash val="solid"/>
+          </a:ln>
+        </p:spPr>
+        <p:txBody>
+          <a:bodyPr/>
+          <a:lstStyle/>
+          <a:p>
+            <a:endParaRPr lang="en-ZA"/>
+          </a:p>
+        </p:txBody>
+      </p:sp>
+      <p:pic>
+        <p:nvPicPr>
+          <p:cNvPr id="7" name="Image 1" descr="preencoded.png"/>
+          <p:cNvPicPr>
+            <a:picLocks noChangeAspect="1"/>
+          </p:cNvPicPr>
+          <p:nvPr/>
+        </p:nvPicPr>
+        <p:blipFill>
+          <a:blip r:embed="rId8"/>
+          <a:stretch>
+            <a:fillRect/>
+          </a:stretch>
+        </p:blipFill>
+        <p:spPr>
+          <a:xfrm>
+            <a:off x="708660" y="2816352"/>
+            <a:ext cx="320040" cy="320040"/>
+          </a:xfrm>
+          <a:prstGeom prst="rect">
+            <a:avLst/>
+          </a:prstGeom>
+        </p:spPr>
+      </p:pic>
+      <p:sp>
+        <p:nvSpPr>
+          <p:cNvPr id="8" name="Text 4"/>
+          <p:cNvSpPr txBox="1"/>
+          <p:nvPr/>
+        </p:nvSpPr>
+        <p:spPr>
+          <a:xfrm>
+            <a:off x="1508760" y="2487168"/>
+            <a:ext cx="10131552" cy="978408"/>
+          </a:xfrm>
+          <a:prstGeom prst="rect">
+            <a:avLst/>
+          </a:prstGeom>
+          <a:noFill/>
+          <a:ln/>
+        </p:spPr>
+        <p:txBody>
+          <a:bodyPr wrap="square" lIns="0" tIns="0" rIns="0" bIns="0" rtlCol="0" anchor="ctr"/>
+          <a:lstStyle/>
+          <a:p>
+            <a:pPr marL="0" indent="0">
+              <a:buNone/>
+            </a:pPr>
+            <a:r>
+              <a:rPr lang="en-US" sz="2600" b="1" dirty="0">
+                <a:solidFill>
+                  <a:srgbClr val="1A5C2C"/>
+                </a:solidFill>
+                <a:latin typeface="Cambria" pitchFamily="34" charset="0"/>
+                <a:ea typeface="Cambria" pitchFamily="34" charset="-122"/>
+                <a:cs typeface="Cambria" pitchFamily="34" charset="-120"/>
+              </a:rPr>
+              <a:t>O  </a:t>
+            </a:r>
+            <a:r>
+              <a:rPr lang="en-US" sz="2600" dirty="0">
+                <a:solidFill>
+                  <a:srgbClr val="1F2A22"/>
+                </a:solidFill>
+                <a:latin typeface="Calibri" pitchFamily="34" charset="0"/>
+                <a:ea typeface="Calibri" pitchFamily="34" charset="-122"/>
+                <a:cs typeface="Calibri" pitchFamily="34" charset="-120"/>
+              </a:rPr>
+              <a:t>Operational: KPIs with targets and their weight</a:t>
+            </a:r>
+            <a:endParaRPr lang="en-US" sz="2600" dirty="0"/>
+          </a:p>
+        </p:txBody>
+      </p:sp>
+      <p:sp>
+        <p:nvSpPr>
+          <p:cNvPr id="9" name="Shape 5"/>
+          <p:cNvSpPr/>
+          <p:nvPr/>
+        </p:nvSpPr>
+        <p:spPr>
+          <a:xfrm>
+            <a:off x="548640" y="3634740"/>
+            <a:ext cx="640080" cy="640080"/>
+          </a:xfrm>
+          <a:prstGeom prst="ellipse">
+            <a:avLst/>
+          </a:prstGeom>
+          <a:solidFill>
+            <a:srgbClr val="1A5C2C"/>
+          </a:solidFill>
+          <a:ln w="12700">
+            <a:solidFill>
+              <a:srgbClr val="1A5C2C"/>
+            </a:solidFill>
+            <a:prstDash val="solid"/>
+          </a:ln>
+        </p:spPr>
+        <p:txBody>
+          <a:bodyPr/>
+          <a:lstStyle/>
+          <a:p>
+            <a:endParaRPr lang="en-ZA"/>
+          </a:p>
+        </p:txBody>
+      </p:sp>
+      <p:pic>
+        <p:nvPicPr>
+          <p:cNvPr id="10" name="Image 2" descr="preencoded.png"/>
+          <p:cNvPicPr>
+            <a:picLocks noChangeAspect="1"/>
+          </p:cNvPicPr>
+          <p:nvPr/>
+        </p:nvPicPr>
+        <p:blipFill>
+          <a:blip r:embed="rId9"/>
+          <a:stretch>
+            <a:fillRect/>
+          </a:stretch>
+        </p:blipFill>
+        <p:spPr>
+          <a:xfrm>
+            <a:off x="708660" y="3794760"/>
+            <a:ext cx="320040" cy="320040"/>
+          </a:xfrm>
+          <a:prstGeom prst="rect">
+            <a:avLst/>
+          </a:prstGeom>
+        </p:spPr>
+      </p:pic>
+      <p:sp>
+        <p:nvSpPr>
+          <p:cNvPr id="11" name="Text 6"/>
+          <p:cNvSpPr txBox="1"/>
+          <p:nvPr/>
+        </p:nvSpPr>
+        <p:spPr>
+          <a:xfrm>
+            <a:off x="1508760" y="3465576"/>
+            <a:ext cx="10131552" cy="978408"/>
+          </a:xfrm>
+          <a:prstGeom prst="rect">
+            <a:avLst/>
+          </a:prstGeom>
+          <a:noFill/>
+          <a:ln/>
+        </p:spPr>
+        <p:txBody>
+          <a:bodyPr wrap="square" lIns="0" tIns="0" rIns="0" bIns="0" rtlCol="0" anchor="ctr"/>
+          <a:lstStyle/>
+          <a:p>
+            <a:pPr marL="0" indent="0">
+              <a:buNone/>
+            </a:pPr>
+            <a:r>
+              <a:rPr lang="en-US" sz="2600" b="1" dirty="0">
+                <a:solidFill>
+                  <a:srgbClr val="1A5C2C"/>
+                </a:solidFill>
+                <a:latin typeface="Cambria" pitchFamily="34" charset="0"/>
+                <a:ea typeface="Cambria" pitchFamily="34" charset="-122"/>
+                <a:cs typeface="Cambria" pitchFamily="34" charset="-120"/>
+              </a:rPr>
+              <a:t>B  </a:t>
+            </a:r>
+            <a:r>
+              <a:rPr lang="en-US" sz="2600" dirty="0">
+                <a:solidFill>
+                  <a:srgbClr val="1F2A22"/>
+                </a:solidFill>
+                <a:latin typeface="Calibri" pitchFamily="34" charset="0"/>
+                <a:ea typeface="Calibri" pitchFamily="34" charset="-122"/>
+                <a:cs typeface="Calibri" pitchFamily="34" charset="-120"/>
+              </a:rPr>
+              <a:t>Behavioural: values and behaviours, how assessed</a:t>
+            </a:r>
+            <a:endParaRPr lang="en-US" sz="2600" dirty="0"/>
+          </a:p>
+        </p:txBody>
+      </p:sp>
+      <p:sp>
+        <p:nvSpPr>
+          <p:cNvPr id="12" name="Shape 7"/>
+          <p:cNvSpPr/>
+          <p:nvPr/>
+        </p:nvSpPr>
+        <p:spPr>
+          <a:xfrm>
+            <a:off x="548640" y="4613148"/>
+            <a:ext cx="640080" cy="640080"/>
+          </a:xfrm>
+          <a:prstGeom prst="ellipse">
+            <a:avLst/>
+          </a:prstGeom>
+          <a:solidFill>
+            <a:srgbClr val="1A5C2C"/>
+          </a:solidFill>
+          <a:ln w="12700">
+            <a:solidFill>
+              <a:srgbClr val="1A5C2C"/>
+            </a:solidFill>
+            <a:prstDash val="solid"/>
+          </a:ln>
+        </p:spPr>
+        <p:txBody>
+          <a:bodyPr/>
+          <a:lstStyle/>
+          <a:p>
+            <a:endParaRPr lang="en-ZA"/>
+          </a:p>
+        </p:txBody>
+      </p:sp>
+      <p:pic>
+        <p:nvPicPr>
+          <p:cNvPr id="13" name="Image 3" descr="preencoded.png"/>
+          <p:cNvPicPr>
+            <a:picLocks noChangeAspect="1"/>
+          </p:cNvPicPr>
+          <p:nvPr/>
+        </p:nvPicPr>
+        <p:blipFill>
+          <a:blip r:embed="rId4"/>
+          <a:stretch>
+            <a:fillRect/>
+          </a:stretch>
+        </p:blipFill>
+        <p:spPr>
+          <a:xfrm>
+            <a:off x="708660" y="4773168"/>
+            <a:ext cx="320040" cy="320040"/>
+          </a:xfrm>
+          <a:prstGeom prst="rect">
+            <a:avLst/>
+          </a:prstGeom>
+        </p:spPr>
+      </p:pic>
+      <p:sp>
+        <p:nvSpPr>
+          <p:cNvPr id="14" name="Text 8"/>
+          <p:cNvSpPr txBox="1"/>
+          <p:nvPr/>
+        </p:nvSpPr>
+        <p:spPr>
+          <a:xfrm>
+            <a:off x="1508760" y="4443984"/>
+            <a:ext cx="10131552" cy="978408"/>
+          </a:xfrm>
+          <a:prstGeom prst="rect">
+            <a:avLst/>
+          </a:prstGeom>
+          <a:noFill/>
+          <a:ln/>
+        </p:spPr>
+        <p:txBody>
+          <a:bodyPr wrap="square" lIns="0" tIns="0" rIns="0" bIns="0" rtlCol="0" anchor="ctr"/>
+          <a:lstStyle/>
+          <a:p>
+            <a:pPr marL="0" indent="0">
+              <a:buNone/>
+            </a:pPr>
+            <a:r>
+              <a:rPr lang="en-US" sz="2600" b="1" dirty="0">
+                <a:solidFill>
+                  <a:srgbClr val="1A5C2C"/>
+                </a:solidFill>
+                <a:latin typeface="Cambria" pitchFamily="34" charset="0"/>
+                <a:ea typeface="Cambria" pitchFamily="34" charset="-122"/>
+                <a:cs typeface="Cambria" pitchFamily="34" charset="-120"/>
+              </a:rPr>
+              <a:t>=  </a:t>
+            </a:r>
+            <a:r>
+              <a:rPr lang="en-US" sz="2600" dirty="0">
+                <a:solidFill>
+                  <a:srgbClr val="1F2A22"/>
+                </a:solidFill>
+                <a:latin typeface="Calibri" pitchFamily="34" charset="0"/>
+                <a:ea typeface="Calibri" pitchFamily="34" charset="-122"/>
+                <a:cs typeface="Calibri" pitchFamily="34" charset="-120"/>
+              </a:rPr>
+              <a:t>The three weights add up to 100%</a:t>
+            </a:r>
+            <a:endParaRPr lang="en-US" sz="2600" dirty="0"/>
+          </a:p>
+        </p:txBody>
+      </p:sp>
+    </p:spTree>
+  </p:cSld>
+  <p:clrMapOvr>
+    <a:masterClrMapping/>
+  </p:clrMapOvr>
+</p:sld>
+</file>
+
+<file path=ppt/slides/slide36.xml><?xml version="1.0" encoding="utf-8"?>
 <p:sld xmlns:a="http://schemas.openxmlformats.org/drawingml/2006/main" xmlns:p="http://schemas.openxmlformats.org/presentationml/2006/main" xmlns:r="http://schemas.openxmlformats.org/officeDocument/2006/relationships">
   <p:cSld>
     <p:bg>
@@ -21473,7 +24175,7 @@
                 <a:ea typeface="Cambria" pitchFamily="34" charset="-122"/>
                 <a:cs typeface="Cambria" pitchFamily="34" charset="-120"/>
               </a:rPr>
-              <a:t>5.3 · Activity 3: WARD check-up</a:t>
+              <a:t>5.4 · Activity 4: WARD check-up</a:t>
             </a:r>
             <a:endParaRPr lang="en-US" sz="3600" dirty="0"/>
           </a:p>
@@ -21911,7 +24613,7 @@
 </p:sld>
 </file>
 
-<file path=ppt/slides/slide34.xml><?xml version="1.0" encoding="utf-8"?>
+<file path=ppt/slides/slide37.xml><?xml version="1.0" encoding="utf-8"?>
 <p:sld xmlns:a="http://schemas.openxmlformats.org/drawingml/2006/main" xmlns:r="http://schemas.openxmlformats.org/officeDocument/2006/relationships" xmlns:p="http://schemas.openxmlformats.org/presentationml/2006/main">
   <p:cSld name="Slide 28">
     <p:bg>
@@ -23838,7 +26540,7 @@
         <p:spPr>
           <a:xfrm>
             <a:off x="1737360" y="1691640"/>
-            <a:ext cx="4069080" cy="502920"/>
+            <a:ext cx="4069080" cy="868680"/>
           </a:xfrm>
           <a:prstGeom prst="rect">
             <a:avLst/>
@@ -23876,7 +26578,7 @@
         </p:nvSpPr>
         <p:spPr>
           <a:xfrm>
-            <a:off x="1737360" y="2194560"/>
+            <a:off x="1737360" y="2606040"/>
             <a:ext cx="4069080" cy="457200"/>
           </a:xfrm>
           <a:prstGeom prst="rect">
@@ -23915,8 +26617,8 @@
         </p:nvSpPr>
         <p:spPr>
           <a:xfrm>
-            <a:off x="868680" y="2834640"/>
-            <a:ext cx="4846320" cy="2514600"/>
+            <a:off x="868680" y="3538728"/>
+            <a:ext cx="4846320" cy="1810512"/>
           </a:xfrm>
           <a:prstGeom prst="rect">
             <a:avLst/>
@@ -24070,7 +26772,7 @@
         <p:spPr>
           <a:xfrm>
             <a:off x="7434072" y="1691640"/>
-            <a:ext cx="4069080" cy="502920"/>
+            <a:ext cx="4069080" cy="868680"/>
           </a:xfrm>
           <a:prstGeom prst="rect">
             <a:avLst/>
@@ -24441,7 +27143,7 @@
                 <a:ea typeface="Calibri" pitchFamily="34" charset="-122"/>
                 <a:cs typeface="Calibri" pitchFamily="34" charset="-120"/>
               </a:rPr>
-              <a:t>Environment: the conditions people work in</a:t>
+              <a:t>Environment · FIT: facilities, infrastructure, technology</a:t>
             </a:r>
             <a:endParaRPr lang="en-US" sz="2600" dirty="0"/>
           </a:p>
@@ -24547,7 +27249,7 @@
                 <a:ea typeface="Calibri" pitchFamily="34" charset="-122"/>
                 <a:cs typeface="Calibri" pitchFamily="34" charset="-120"/>
               </a:rPr>
-              <a:t>Systems: processes, workflows, technology</a:t>
+              <a:t>Systems · SIP: standardisation, integration, process efficiency</a:t>
             </a:r>
             <a:endParaRPr lang="en-US" sz="2600" dirty="0"/>
           </a:p>
@@ -24653,7 +27355,7 @@
                 <a:ea typeface="Calibri" pitchFamily="34" charset="-122"/>
                 <a:cs typeface="Calibri" pitchFamily="34" charset="-120"/>
               </a:rPr>
-              <a:t>Resources: people, skills, capacity, funding</a:t>
+              <a:t>Resources · AIR: asset availability, investment, resource utilisation</a:t>
             </a:r>
             <a:endParaRPr lang="en-US" sz="2600" dirty="0"/>
           </a:p>
@@ -24759,7 +27461,7 @@
                 <a:ea typeface="Calibri" pitchFamily="34" charset="-122"/>
                 <a:cs typeface="Calibri" pitchFamily="34" charset="-120"/>
               </a:rPr>
-              <a:t>Governance: decision rights, escalation</a:t>
+              <a:t>Governance · PAR: policies and procedures, authority, risk management</a:t>
             </a:r>
             <a:endParaRPr lang="en-US" sz="2600" dirty="0"/>
           </a:p>
@@ -24929,7 +27631,7 @@
         <p:spPr>
           <a:xfrm>
             <a:off x="1737360" y="1691640"/>
-            <a:ext cx="4069080" cy="502920"/>
+            <a:ext cx="4069080" cy="868680"/>
           </a:xfrm>
           <a:prstGeom prst="rect">
             <a:avLst/>
@@ -24967,7 +27669,7 @@
         </p:nvSpPr>
         <p:spPr>
           <a:xfrm>
-            <a:off x="1737360" y="2194560"/>
+            <a:off x="1737360" y="2606040"/>
             <a:ext cx="4069080" cy="457200"/>
           </a:xfrm>
           <a:prstGeom prst="rect">
@@ -25006,8 +27708,8 @@
         </p:nvSpPr>
         <p:spPr>
           <a:xfrm>
-            <a:off x="868680" y="2834640"/>
-            <a:ext cx="4846320" cy="3429000"/>
+            <a:off x="868680" y="3246120"/>
+            <a:ext cx="4846320" cy="3017520"/>
           </a:xfrm>
           <a:prstGeom prst="rect">
             <a:avLst/>
@@ -25241,7 +27943,7 @@
         </p:nvSpPr>
         <p:spPr>
           <a:xfrm>
-            <a:off x="7434072" y="2194560"/>
+            <a:off x="7434072" y="2606040"/>
             <a:ext cx="4069080" cy="457200"/>
           </a:xfrm>
           <a:prstGeom prst="rect">
@@ -25280,8 +27982,8 @@
         </p:nvSpPr>
         <p:spPr>
           <a:xfrm>
-            <a:off x="6565392" y="2834640"/>
-            <a:ext cx="4846320" cy="3429000"/>
+            <a:off x="6565392" y="3246120"/>
+            <a:ext cx="4846320" cy="3017520"/>
           </a:xfrm>
           <a:prstGeom prst="rect">
             <a:avLst/>
@@ -25309,7 +28011,7 @@
                 <a:ea typeface="Calibri" pitchFamily="34" charset="-122"/>
                 <a:cs typeface="Calibri" pitchFamily="34" charset="-120"/>
               </a:rPr>
-              <a:t>Working conditions support it?</a:t>
+              <a:t>Facilities and technology reliable?</a:t>
             </a:r>
             <a:endParaRPr lang="en-US" sz="2400" dirty="0"/>
           </a:p>
@@ -25351,7 +28053,7 @@
                 <a:ea typeface="Calibri" pitchFamily="34" charset="-122"/>
                 <a:cs typeface="Calibri" pitchFamily="34" charset="-120"/>
               </a:rPr>
-              <a:t>Capacity sufficient?</a:t>
+              <a:t>Equipment and funding sufficient?</a:t>
             </a:r>
             <a:endParaRPr lang="en-US" sz="2400" dirty="0"/>
           </a:p>
